--- a/icbb-website/materials/research-methods/unit-08-slides.pptx
+++ b/icbb-website/materials/research-methods/unit-08-slides.pptx
@@ -1056,7 +1056,7 @@
           <a:p>
             <a:r>
               <a:rPr lang="en-US" dirty="0"/>
-              <a:t>Take-away: Every faulty item produces data you cannot interpret, and no analysis later can repair it. An hour spent on wording saves the whole variable.</a:t>
+              <a:t>The point: Every faulty item produces data you cannot interpret, and no analysis later can repair it. An hour spent on wording saves the whole variable.</a:t>
             </a:r>
             <a:endParaRPr lang="en-US" dirty="0"/>
           </a:p>
@@ -1144,7 +1144,7 @@
           <a:p>
             <a:r>
               <a:rPr lang="en-US" dirty="0"/>
-              <a:t>Take-away: A self-translated instrument has unknown validity, which means the study built on it does too. This is one of the most common fatal flaws in multilingual research.</a:t>
+              <a:t>The point: A self-translated instrument has unknown validity, which means the study built on it does too. This is one of the most common fatal flaws in multilingual research.</a:t>
             </a:r>
             <a:endParaRPr lang="en-US" dirty="0"/>
           </a:p>
@@ -1496,7 +1496,7 @@
           <a:p>
             <a:r>
               <a:rPr lang="en-US" dirty="0"/>
-              <a:t>Read these out at the start and return to them at the end of the unit.</a:t>
+              <a:t>Read these at the start, and return to them at the end of the unit.</a:t>
             </a:r>
             <a:endParaRPr lang="en-US" dirty="0"/>
           </a:p>
@@ -2216,14 +2216,14 @@
         </p:nvSpPr>
         <p:spPr>
           <a:xfrm>
-            <a:off x="0" y="0"/>
-            <a:ext cx="118872" cy="5148072"/>
+            <a:off x="566928" y="4590288"/>
+            <a:ext cx="8010144" cy="10973"/>
           </a:xfrm>
           <a:prstGeom prst="rect">
             <a:avLst/>
           </a:prstGeom>
           <a:solidFill>
-            <a:srgbClr val="0066CC"/>
+            <a:srgbClr val="D8D3CB"/>
           </a:solidFill>
           <a:ln/>
         </p:spPr>
@@ -2238,7 +2238,7 @@
         </p:nvPicPr>
         <p:blipFill>
           <a:blip r:embed="rId1">
-            <a:alphaModFix amt="18000"/>
+            <a:alphaModFix amt="38000"/>
           </a:blip>
           <a:stretch>
             <a:fillRect/>
@@ -2246,8 +2246,8 @@
         </p:blipFill>
         <p:spPr>
           <a:xfrm>
-            <a:off x="6903720" y="3977640"/>
-            <a:ext cx="1920240" cy="1280160"/>
+            <a:off x="7973568" y="4709160"/>
+            <a:ext cx="566928" cy="374904"/>
           </a:xfrm>
           <a:prstGeom prst="rect">
             <a:avLst/>
@@ -2266,8 +2266,8 @@
         </p:nvSpPr>
         <p:spPr>
           <a:xfrm>
-            <a:off x="8503920" y="4709160"/>
-            <a:ext cx="800000" cy="300000"/>
+            <a:off x="566928" y="4700016"/>
+            <a:ext cx="914400" cy="274320"/>
           </a:xfrm>
           <a:prstGeom prst="rect">
             <a:avLst/>
@@ -2282,10 +2282,13 @@
           <a:bodyPr/>
           <a:lstStyle>
             <a:lvl1pPr>
-              <a:defRPr sz="1000">
-                <a:solidFill>
-                  <a:srgbClr val="6B7280"/>
-                </a:solidFill>
+              <a:defRPr sz="900">
+                <a:solidFill>
+                  <a:srgbClr val="5F6B76"/>
+                </a:solidFill>
+                <a:latin typeface="Corbel"/>
+                <a:ea typeface="Corbel"/>
+                <a:cs typeface="Corbel"/>
               </a:defRPr>
             </a:lvl1pPr>
           </a:lstStyle>
@@ -2313,7 +2316,7 @@
     <p:bg>
       <p:bgPr>
         <a:solidFill>
-          <a:srgbClr val="004D99"/>
+          <a:srgbClr val="132330"/>
         </a:solidFill>
       </p:bgPr>
     </p:bg>
@@ -2339,14 +2342,14 @@
         </p:nvSpPr>
         <p:spPr>
           <a:xfrm>
-            <a:off x="0" y="4526280"/>
-            <a:ext cx="9144000" cy="621792"/>
+            <a:off x="685800" y="1481328"/>
+            <a:ext cx="1051560" cy="25603"/>
           </a:xfrm>
           <a:prstGeom prst="rect">
             <a:avLst/>
           </a:prstGeom>
           <a:solidFill>
-            <a:srgbClr val="00A86B"/>
+            <a:srgbClr val="9A6A3C"/>
           </a:solidFill>
           <a:ln/>
         </p:spPr>
@@ -2361,7 +2364,7 @@
         </p:nvPicPr>
         <p:blipFill>
           <a:blip r:embed="rId1">
-            <a:alphaModFix amt="75000"/>
+            <a:alphaModFix amt="45000"/>
           </a:blip>
           <a:stretch>
             <a:fillRect/>
@@ -2369,8 +2372,8 @@
         </p:blipFill>
         <p:spPr>
           <a:xfrm>
-            <a:off x="7452360" y="384048"/>
-            <a:ext cx="1371600" cy="914400"/>
+            <a:off x="7863840" y="4315968"/>
+            <a:ext cx="676656" cy="448056"/>
           </a:xfrm>
           <a:prstGeom prst="rect">
             <a:avLst/>
@@ -2414,8 +2417,8 @@
         </p:nvSpPr>
         <p:spPr>
           <a:xfrm>
-            <a:off x="8503920" y="4709160"/>
-            <a:ext cx="800000" cy="300000"/>
+            <a:off x="566928" y="4700016"/>
+            <a:ext cx="914400" cy="274320"/>
           </a:xfrm>
           <a:prstGeom prst="rect">
             <a:avLst/>
@@ -2430,10 +2433,13 @@
           <a:bodyPr/>
           <a:lstStyle>
             <a:lvl1pPr>
-              <a:defRPr sz="1000">
-                <a:solidFill>
-                  <a:srgbClr val="6B7280"/>
-                </a:solidFill>
+              <a:defRPr sz="900">
+                <a:solidFill>
+                  <a:srgbClr val="5F6B76"/>
+                </a:solidFill>
+                <a:latin typeface="Corbel"/>
+                <a:ea typeface="Corbel"/>
+                <a:cs typeface="Corbel"/>
               </a:defRPr>
             </a:lvl1pPr>
           </a:lstStyle>
@@ -2734,8 +2740,8 @@
         </p:nvSpPr>
         <p:spPr>
           <a:xfrm>
-            <a:off x="548640" y="1005840"/>
-            <a:ext cx="6675120" cy="274320"/>
+            <a:off x="685800" y="1024128"/>
+            <a:ext cx="6766560" cy="292608"/>
           </a:xfrm>
           <a:prstGeom prst="rect">
             <a:avLst/>
@@ -2751,14 +2757,17 @@
               <a:buNone/>
             </a:pPr>
             <a:r>
-              <a:rPr lang="en-US" sz="1200" b="1" spc="200" kern="0" dirty="0">
-                <a:solidFill>
-                  <a:srgbClr val="00A86B"/>
-                </a:solidFill>
-              </a:rPr>
-              <a:t>ICBB-RM101  ·  UNIT 8 OF 10</a:t>
-            </a:r>
-            <a:endParaRPr lang="en-US" sz="1200" dirty="0"/>
+              <a:rPr lang="en-US" sz="1150" spc="240" kern="0" dirty="0">
+                <a:solidFill>
+                  <a:srgbClr val="C8A67B"/>
+                </a:solidFill>
+                <a:latin typeface="Corbel" pitchFamily="34" charset="0"/>
+                <a:ea typeface="Corbel" pitchFamily="34" charset="-122"/>
+                <a:cs typeface="Corbel" pitchFamily="34" charset="-120"/>
+              </a:rPr>
+              <a:t>ICBB-RM101   ·   Unit 8 of 10</a:t>
+            </a:r>
+            <a:endParaRPr lang="en-US" sz="1150" dirty="0"/>
           </a:p>
         </p:txBody>
       </p:sp>
@@ -2770,8 +2779,8 @@
         </p:nvSpPr>
         <p:spPr>
           <a:xfrm>
-            <a:off x="548640" y="1371600"/>
-            <a:ext cx="6766560" cy="1371600"/>
+            <a:off x="685800" y="1700784"/>
+            <a:ext cx="6858000" cy="1417320"/>
           </a:xfrm>
           <a:prstGeom prst="rect">
             <a:avLst/>
@@ -2784,17 +2793,23 @@
           <a:lstStyle/>
           <a:p>
             <a:pPr indent="0" marL="0">
+              <a:lnSpc>
+                <a:spcPct val="102000"/>
+              </a:lnSpc>
               <a:buNone/>
             </a:pPr>
             <a:r>
-              <a:rPr lang="en-US" sz="3400" b="1" dirty="0">
+              <a:rPr lang="en-US" sz="3300" dirty="0">
                 <a:solidFill>
                   <a:srgbClr val="FFFFFF"/>
                 </a:solidFill>
+                <a:latin typeface="Constantia" pitchFamily="34" charset="0"/>
+                <a:ea typeface="Constantia" pitchFamily="34" charset="-122"/>
+                <a:cs typeface="Constantia" pitchFamily="34" charset="-120"/>
               </a:rPr>
               <a:t>Data Collection, Instruments and Measurement</a:t>
             </a:r>
-            <a:endParaRPr lang="en-US" sz="3400" dirty="0"/>
+            <a:endParaRPr lang="en-US" sz="3300" dirty="0"/>
           </a:p>
         </p:txBody>
       </p:sp>
@@ -2806,8 +2821,8 @@
         </p:nvSpPr>
         <p:spPr>
           <a:xfrm>
-            <a:off x="548640" y="2788920"/>
-            <a:ext cx="6766560" cy="1188720"/>
+            <a:off x="685800" y="3127248"/>
+            <a:ext cx="6309360" cy="1051560"/>
           </a:xfrm>
           <a:prstGeom prst="rect">
             <a:avLst/>
@@ -2821,19 +2836,22 @@
           <a:p>
             <a:pPr indent="0" marL="0">
               <a:lnSpc>
-                <a:spcPct val="120000"/>
+                <a:spcPct val="128000"/>
               </a:lnSpc>
               <a:buNone/>
             </a:pPr>
             <a:r>
-              <a:rPr lang="en-US" sz="1400" dirty="0">
-                <a:solidFill>
-                  <a:srgbClr val="DCE7F5"/>
-                </a:solidFill>
+              <a:rPr lang="en-US" sz="1350" dirty="0">
+                <a:solidFill>
+                  <a:srgbClr val="B9C2CB"/>
+                </a:solidFill>
+                <a:latin typeface="Corbel" pitchFamily="34" charset="0"/>
+                <a:ea typeface="Corbel" pitchFamily="34" charset="-122"/>
+                <a:cs typeface="Corbel" pitchFamily="34" charset="-120"/>
               </a:rPr>
               <a:t>Turning abstract constructs into things you can actually record, and the validity and reliability evidence needed before anyone believes the numbers your instrument produces.</a:t>
             </a:r>
-            <a:endParaRPr lang="en-US" sz="1400" dirty="0"/>
+            <a:endParaRPr lang="en-US" sz="1350" dirty="0"/>
           </a:p>
         </p:txBody>
       </p:sp>
@@ -2845,8 +2863,8 @@
         </p:nvSpPr>
         <p:spPr>
           <a:xfrm>
-            <a:off x="548640" y="4645152"/>
-            <a:ext cx="5486400" cy="365760"/>
+            <a:off x="685800" y="4407408"/>
+            <a:ext cx="4572000" cy="274320"/>
           </a:xfrm>
           <a:prstGeom prst="rect">
             <a:avLst/>
@@ -2862,14 +2880,17 @@
               <a:buNone/>
             </a:pPr>
             <a:r>
-              <a:rPr lang="en-US" sz="1200" b="1" dirty="0">
-                <a:solidFill>
-                  <a:srgbClr val="FFFFFF"/>
-                </a:solidFill>
-              </a:rPr>
-              <a:t>Jesse Anak  ·  ICBB</a:t>
-            </a:r>
-            <a:endParaRPr lang="en-US" sz="1200" dirty="0"/>
+              <a:rPr lang="en-US" sz="1050" spc="120" kern="0" dirty="0">
+                <a:solidFill>
+                  <a:srgbClr val="8894A0"/>
+                </a:solidFill>
+                <a:latin typeface="Corbel" pitchFamily="34" charset="0"/>
+                <a:ea typeface="Corbel" pitchFamily="34" charset="-122"/>
+                <a:cs typeface="Corbel" pitchFamily="34" charset="-120"/>
+              </a:rPr>
+              <a:t>Jesse Anak   ·   ICBB</a:t>
+            </a:r>
+            <a:endParaRPr lang="en-US" sz="1050" dirty="0"/>
           </a:p>
         </p:txBody>
       </p:sp>
@@ -2906,8 +2927,8 @@
         </p:nvSpPr>
         <p:spPr>
           <a:xfrm>
-            <a:off x="502920" y="292608"/>
-            <a:ext cx="8046720" cy="228600"/>
+            <a:off x="566928" y="384048"/>
+            <a:ext cx="7772400" cy="237744"/>
           </a:xfrm>
           <a:prstGeom prst="rect">
             <a:avLst/>
@@ -2923,14 +2944,17 @@
               <a:buNone/>
             </a:pPr>
             <a:r>
-              <a:rPr lang="en-US" sz="1100" b="1" spc="150" kern="0" dirty="0">
-                <a:solidFill>
-                  <a:srgbClr val="0066CC"/>
-                </a:solidFill>
+              <a:rPr lang="en-US" sz="1000" spc="200" kern="0" dirty="0">
+                <a:solidFill>
+                  <a:srgbClr val="9A6A3C"/>
+                </a:solidFill>
+                <a:latin typeface="Corbel" pitchFamily="34" charset="0"/>
+                <a:ea typeface="Corbel" pitchFamily="34" charset="-122"/>
+                <a:cs typeface="Corbel" pitchFamily="34" charset="-120"/>
               </a:rPr>
               <a:t>UNIT 8</a:t>
             </a:r>
-            <a:endParaRPr lang="en-US" sz="1100" dirty="0"/>
+            <a:endParaRPr lang="en-US" sz="1000" dirty="0"/>
           </a:p>
         </p:txBody>
       </p:sp>
@@ -2942,8 +2966,8 @@
         </p:nvSpPr>
         <p:spPr>
           <a:xfrm>
-            <a:off x="502920" y="548640"/>
-            <a:ext cx="8046720" cy="640080"/>
+            <a:off x="566928" y="658368"/>
+            <a:ext cx="7772400" cy="658368"/>
           </a:xfrm>
           <a:prstGeom prst="rect">
             <a:avLst/>
@@ -2956,30 +2980,56 @@
           <a:lstStyle/>
           <a:p>
             <a:pPr indent="0" marL="0">
+              <a:lnSpc>
+                <a:spcPct val="100000"/>
+              </a:lnSpc>
               <a:buNone/>
             </a:pPr>
             <a:r>
-              <a:rPr lang="en-US" sz="2400" b="1" dirty="0">
-                <a:solidFill>
-                  <a:srgbClr val="111827"/>
-                </a:solidFill>
+              <a:rPr lang="en-US" sz="2500" dirty="0">
+                <a:solidFill>
+                  <a:srgbClr val="1C3140"/>
+                </a:solidFill>
+                <a:latin typeface="Constantia" pitchFamily="34" charset="0"/>
+                <a:ea typeface="Constantia" pitchFamily="34" charset="-122"/>
+                <a:cs typeface="Constantia" pitchFamily="34" charset="-120"/>
               </a:rPr>
               <a:t>Validity and reliability (1/2)</a:t>
             </a:r>
-            <a:endParaRPr lang="en-US" sz="2400" dirty="0"/>
-          </a:p>
-        </p:txBody>
-      </p:sp>
-      <p:sp>
-        <p:nvSpPr>
-          <p:cNvPr id="4" name="Text 2"/>
+            <a:endParaRPr lang="en-US" sz="2500" dirty="0"/>
+          </a:p>
+        </p:txBody>
+      </p:sp>
+      <p:sp>
+        <p:nvSpPr>
+          <p:cNvPr id="4" name="Shape 2"/>
           <p:cNvSpPr/>
           <p:nvPr/>
         </p:nvSpPr>
         <p:spPr>
           <a:xfrm>
-            <a:off x="685800" y="1325880"/>
-            <a:ext cx="7772400" cy="3200400"/>
+            <a:off x="566928" y="1335024"/>
+            <a:ext cx="566928" cy="20117"/>
+          </a:xfrm>
+          <a:prstGeom prst="rect">
+            <a:avLst/>
+          </a:prstGeom>
+          <a:solidFill>
+            <a:srgbClr val="9A6A3C"/>
+          </a:solidFill>
+          <a:ln/>
+        </p:spPr>
+      </p:sp>
+      <p:sp>
+        <p:nvSpPr>
+          <p:cNvPr id="5" name="Text 3"/>
+          <p:cNvSpPr/>
+          <p:nvPr/>
+        </p:nvSpPr>
+        <p:spPr>
+          <a:xfrm>
+            <a:off x="713232" y="1664208"/>
+            <a:ext cx="7498080" cy="2788920"/>
           </a:xfrm>
           <a:prstGeom prst="rect">
             <a:avLst/>
@@ -2993,19 +3043,22 @@
           <a:p>
             <a:pPr marL="342900" indent="-342900">
               <a:lnSpc>
-                <a:spcPct val="125000"/>
+                <a:spcPct val="130000"/>
               </a:lnSpc>
               <a:spcAft>
-                <a:spcPts val="800"/>
+                <a:spcPts val="1100"/>
               </a:spcAft>
               <a:buSzPct val="100000"/>
-              <a:buChar char="•"/>
+              <a:buChar char="–"/>
             </a:pPr>
             <a:r>
               <a:rPr lang="en-US" sz="1500" dirty="0">
                 <a:solidFill>
-                  <a:srgbClr val="374151"/>
-                </a:solidFill>
+                  <a:srgbClr val="23282E"/>
+                </a:solidFill>
+                <a:latin typeface="Corbel" pitchFamily="34" charset="0"/>
+                <a:ea typeface="Corbel" pitchFamily="34" charset="-122"/>
+                <a:cs typeface="Corbel" pitchFamily="34" charset="-120"/>
               </a:rPr>
               <a:t>Face validity — does it look appropriate? The weakest form, but worth checking</a:t>
             </a:r>
@@ -3014,19 +3067,22 @@
           <a:p>
             <a:pPr marL="342900" indent="-342900">
               <a:lnSpc>
-                <a:spcPct val="125000"/>
+                <a:spcPct val="130000"/>
               </a:lnSpc>
               <a:spcAft>
-                <a:spcPts val="800"/>
+                <a:spcPts val="1100"/>
               </a:spcAft>
               <a:buSzPct val="100000"/>
-              <a:buChar char="•"/>
+              <a:buChar char="–"/>
             </a:pPr>
             <a:r>
               <a:rPr lang="en-US" sz="1500" dirty="0">
                 <a:solidFill>
-                  <a:srgbClr val="374151"/>
-                </a:solidFill>
+                  <a:srgbClr val="23282E"/>
+                </a:solidFill>
+                <a:latin typeface="Corbel" pitchFamily="34" charset="0"/>
+                <a:ea typeface="Corbel" pitchFamily="34" charset="-122"/>
+                <a:cs typeface="Corbel" pitchFamily="34" charset="-120"/>
               </a:rPr>
               <a:t>Content validity — does it cover the whole construct? Established by expert panel, often with a content validity index</a:t>
             </a:r>
@@ -3035,19 +3091,22 @@
           <a:p>
             <a:pPr marL="342900" indent="-342900">
               <a:lnSpc>
-                <a:spcPct val="125000"/>
+                <a:spcPct val="130000"/>
               </a:lnSpc>
               <a:spcAft>
-                <a:spcPts val="800"/>
+                <a:spcPts val="1100"/>
               </a:spcAft>
               <a:buSzPct val="100000"/>
-              <a:buChar char="•"/>
+              <a:buChar char="–"/>
             </a:pPr>
             <a:r>
               <a:rPr lang="en-US" sz="1500" dirty="0">
                 <a:solidFill>
-                  <a:srgbClr val="374151"/>
-                </a:solidFill>
+                  <a:srgbClr val="23282E"/>
+                </a:solidFill>
+                <a:latin typeface="Corbel" pitchFamily="34" charset="0"/>
+                <a:ea typeface="Corbel" pitchFamily="34" charset="-122"/>
+                <a:cs typeface="Corbel" pitchFamily="34" charset="-120"/>
               </a:rPr>
               <a:t>Construct validity — does it behave as theory predicts? Evidenced by convergent and discriminant correlations and factor analysis</a:t>
             </a:r>
@@ -3056,19 +3115,22 @@
           <a:p>
             <a:pPr marL="342900" indent="-342900">
               <a:lnSpc>
-                <a:spcPct val="125000"/>
+                <a:spcPct val="130000"/>
               </a:lnSpc>
               <a:spcAft>
-                <a:spcPts val="800"/>
+                <a:spcPts val="1100"/>
               </a:spcAft>
               <a:buSzPct val="100000"/>
-              <a:buChar char="•"/>
+              <a:buChar char="–"/>
             </a:pPr>
             <a:r>
               <a:rPr lang="en-US" sz="1500" dirty="0">
                 <a:solidFill>
-                  <a:srgbClr val="374151"/>
-                </a:solidFill>
+                  <a:srgbClr val="23282E"/>
+                </a:solidFill>
+                <a:latin typeface="Corbel" pitchFamily="34" charset="0"/>
+                <a:ea typeface="Corbel" pitchFamily="34" charset="-122"/>
+                <a:cs typeface="Corbel" pitchFamily="34" charset="-120"/>
               </a:rPr>
               <a:t>Criterion validity — does it agree with a gold standard, concurrently or predictively?</a:t>
             </a:r>
@@ -3088,8 +3150,8 @@
         </p:nvSpPr>
         <p:spPr>
           <a:xfrm>
-            <a:off x="8503920" y="4709160"/>
-            <a:ext cx="800000" cy="300000"/>
+            <a:off x="566928" y="4700016"/>
+            <a:ext cx="914400" cy="274320"/>
           </a:xfrm>
           <a:prstGeom prst="rect">
             <a:avLst/>
@@ -3104,10 +3166,13 @@
           <a:bodyPr/>
           <a:lstStyle>
             <a:lvl1pPr>
-              <a:defRPr sz="1000">
-                <a:solidFill>
-                  <a:srgbClr val="6B7280"/>
-                </a:solidFill>
+              <a:defRPr sz="900">
+                <a:solidFill>
+                  <a:srgbClr val="5F6B76"/>
+                </a:solidFill>
+                <a:latin typeface="Corbel"/>
+                <a:ea typeface="Corbel"/>
+                <a:cs typeface="Corbel"/>
               </a:defRPr>
             </a:lvl1pPr>
           </a:lstStyle>
@@ -3154,8 +3219,8 @@
         </p:nvSpPr>
         <p:spPr>
           <a:xfrm>
-            <a:off x="502920" y="292608"/>
-            <a:ext cx="8046720" cy="228600"/>
+            <a:off x="566928" y="384048"/>
+            <a:ext cx="7772400" cy="237744"/>
           </a:xfrm>
           <a:prstGeom prst="rect">
             <a:avLst/>
@@ -3171,14 +3236,17 @@
               <a:buNone/>
             </a:pPr>
             <a:r>
-              <a:rPr lang="en-US" sz="1100" b="1" spc="150" kern="0" dirty="0">
-                <a:solidFill>
-                  <a:srgbClr val="0066CC"/>
-                </a:solidFill>
+              <a:rPr lang="en-US" sz="1000" spc="200" kern="0" dirty="0">
+                <a:solidFill>
+                  <a:srgbClr val="9A6A3C"/>
+                </a:solidFill>
+                <a:latin typeface="Corbel" pitchFamily="34" charset="0"/>
+                <a:ea typeface="Corbel" pitchFamily="34" charset="-122"/>
+                <a:cs typeface="Corbel" pitchFamily="34" charset="-120"/>
               </a:rPr>
               <a:t>UNIT 8</a:t>
             </a:r>
-            <a:endParaRPr lang="en-US" sz="1100" dirty="0"/>
+            <a:endParaRPr lang="en-US" sz="1000" dirty="0"/>
           </a:p>
         </p:txBody>
       </p:sp>
@@ -3190,8 +3258,8 @@
         </p:nvSpPr>
         <p:spPr>
           <a:xfrm>
-            <a:off x="502920" y="548640"/>
-            <a:ext cx="8046720" cy="640080"/>
+            <a:off x="566928" y="658368"/>
+            <a:ext cx="7772400" cy="658368"/>
           </a:xfrm>
           <a:prstGeom prst="rect">
             <a:avLst/>
@@ -3204,30 +3272,56 @@
           <a:lstStyle/>
           <a:p>
             <a:pPr indent="0" marL="0">
+              <a:lnSpc>
+                <a:spcPct val="100000"/>
+              </a:lnSpc>
               <a:buNone/>
             </a:pPr>
             <a:r>
-              <a:rPr lang="en-US" sz="2400" b="1" dirty="0">
-                <a:solidFill>
-                  <a:srgbClr val="111827"/>
-                </a:solidFill>
+              <a:rPr lang="en-US" sz="2500" dirty="0">
+                <a:solidFill>
+                  <a:srgbClr val="1C3140"/>
+                </a:solidFill>
+                <a:latin typeface="Constantia" pitchFamily="34" charset="0"/>
+                <a:ea typeface="Constantia" pitchFamily="34" charset="-122"/>
+                <a:cs typeface="Constantia" pitchFamily="34" charset="-120"/>
               </a:rPr>
               <a:t>Validity and reliability (2/2)</a:t>
             </a:r>
-            <a:endParaRPr lang="en-US" sz="2400" dirty="0"/>
-          </a:p>
-        </p:txBody>
-      </p:sp>
-      <p:sp>
-        <p:nvSpPr>
-          <p:cNvPr id="4" name="Text 2"/>
+            <a:endParaRPr lang="en-US" sz="2500" dirty="0"/>
+          </a:p>
+        </p:txBody>
+      </p:sp>
+      <p:sp>
+        <p:nvSpPr>
+          <p:cNvPr id="4" name="Shape 2"/>
           <p:cNvSpPr/>
           <p:nvPr/>
         </p:nvSpPr>
         <p:spPr>
           <a:xfrm>
-            <a:off x="685800" y="1325880"/>
-            <a:ext cx="7772400" cy="3200400"/>
+            <a:off x="566928" y="1335024"/>
+            <a:ext cx="566928" cy="20117"/>
+          </a:xfrm>
+          <a:prstGeom prst="rect">
+            <a:avLst/>
+          </a:prstGeom>
+          <a:solidFill>
+            <a:srgbClr val="9A6A3C"/>
+          </a:solidFill>
+          <a:ln/>
+        </p:spPr>
+      </p:sp>
+      <p:sp>
+        <p:nvSpPr>
+          <p:cNvPr id="5" name="Text 3"/>
+          <p:cNvSpPr/>
+          <p:nvPr/>
+        </p:nvSpPr>
+        <p:spPr>
+          <a:xfrm>
+            <a:off x="713232" y="1664208"/>
+            <a:ext cx="7498080" cy="2788920"/>
           </a:xfrm>
           <a:prstGeom prst="rect">
             <a:avLst/>
@@ -3241,86 +3335,98 @@
           <a:p>
             <a:pPr marL="342900" indent="-342900">
               <a:lnSpc>
-                <a:spcPct val="125000"/>
+                <a:spcPct val="130000"/>
               </a:lnSpc>
               <a:spcAft>
-                <a:spcPts val="800"/>
+                <a:spcPts val="1100"/>
               </a:spcAft>
               <a:buSzPct val="100000"/>
-              <a:buChar char="•"/>
-            </a:pPr>
-            <a:r>
-              <a:rPr lang="en-US" sz="1300" dirty="0">
-                <a:solidFill>
-                  <a:srgbClr val="374151"/>
-                </a:solidFill>
+              <a:buChar char="–"/>
+            </a:pPr>
+            <a:r>
+              <a:rPr lang="en-US" sz="1350" dirty="0">
+                <a:solidFill>
+                  <a:srgbClr val="23282E"/>
+                </a:solidFill>
+                <a:latin typeface="Corbel" pitchFamily="34" charset="0"/>
+                <a:ea typeface="Corbel" pitchFamily="34" charset="-122"/>
+                <a:cs typeface="Corbel" pitchFamily="34" charset="-120"/>
               </a:rPr>
               <a:t>Internal consistency — do items measure the same thing? Cronbach's alpha, where roughly 0.70-0.95 is acceptable and above 0.95 suggests redundant items</a:t>
             </a:r>
-            <a:endParaRPr lang="en-US" sz="1300" dirty="0"/>
+            <a:endParaRPr lang="en-US" sz="1350" dirty="0"/>
           </a:p>
           <a:p>
             <a:pPr marL="342900" indent="-342900">
               <a:lnSpc>
-                <a:spcPct val="125000"/>
+                <a:spcPct val="130000"/>
               </a:lnSpc>
               <a:spcAft>
-                <a:spcPts val="800"/>
+                <a:spcPts val="1100"/>
               </a:spcAft>
               <a:buSzPct val="100000"/>
-              <a:buChar char="•"/>
-            </a:pPr>
-            <a:r>
-              <a:rPr lang="en-US" sz="1300" dirty="0">
-                <a:solidFill>
-                  <a:srgbClr val="374151"/>
-                </a:solidFill>
+              <a:buChar char="–"/>
+            </a:pPr>
+            <a:r>
+              <a:rPr lang="en-US" sz="1350" dirty="0">
+                <a:solidFill>
+                  <a:srgbClr val="23282E"/>
+                </a:solidFill>
+                <a:latin typeface="Corbel" pitchFamily="34" charset="0"/>
+                <a:ea typeface="Corbel" pitchFamily="34" charset="-122"/>
+                <a:cs typeface="Corbel" pitchFamily="34" charset="-120"/>
               </a:rPr>
               <a:t>Test-retest reliability — does it give the same answer on a stable characteristic over a short interval?</a:t>
             </a:r>
-            <a:endParaRPr lang="en-US" sz="1300" dirty="0"/>
+            <a:endParaRPr lang="en-US" sz="1350" dirty="0"/>
           </a:p>
           <a:p>
             <a:pPr marL="342900" indent="-342900">
               <a:lnSpc>
-                <a:spcPct val="125000"/>
+                <a:spcPct val="130000"/>
               </a:lnSpc>
               <a:spcAft>
-                <a:spcPts val="800"/>
+                <a:spcPts val="1100"/>
               </a:spcAft>
               <a:buSzPct val="100000"/>
-              <a:buChar char="•"/>
-            </a:pPr>
-            <a:r>
-              <a:rPr lang="en-US" sz="1300" dirty="0">
-                <a:solidFill>
-                  <a:srgbClr val="374151"/>
-                </a:solidFill>
+              <a:buChar char="–"/>
+            </a:pPr>
+            <a:r>
+              <a:rPr lang="en-US" sz="1350" dirty="0">
+                <a:solidFill>
+                  <a:srgbClr val="23282E"/>
+                </a:solidFill>
+                <a:latin typeface="Corbel" pitchFamily="34" charset="0"/>
+                <a:ea typeface="Corbel" pitchFamily="34" charset="-122"/>
+                <a:cs typeface="Corbel" pitchFamily="34" charset="-120"/>
               </a:rPr>
               <a:t>Inter-rater reliability — do different observers agree? Reported as Cohen's kappa or an intraclass correlation</a:t>
             </a:r>
-            <a:endParaRPr lang="en-US" sz="1300" dirty="0"/>
+            <a:endParaRPr lang="en-US" sz="1350" dirty="0"/>
           </a:p>
           <a:p>
             <a:pPr marL="342900" indent="-342900">
               <a:lnSpc>
-                <a:spcPct val="125000"/>
+                <a:spcPct val="130000"/>
               </a:lnSpc>
               <a:spcAft>
-                <a:spcPts val="800"/>
+                <a:spcPts val="1100"/>
               </a:spcAft>
               <a:buSzPct val="100000"/>
-              <a:buChar char="•"/>
-            </a:pPr>
-            <a:r>
-              <a:rPr lang="en-US" sz="1300" dirty="0">
-                <a:solidFill>
-                  <a:srgbClr val="374151"/>
-                </a:solidFill>
+              <a:buChar char="–"/>
+            </a:pPr>
+            <a:r>
+              <a:rPr lang="en-US" sz="1350" dirty="0">
+                <a:solidFill>
+                  <a:srgbClr val="23282E"/>
+                </a:solidFill>
+                <a:latin typeface="Corbel" pitchFamily="34" charset="0"/>
+                <a:ea typeface="Corbel" pitchFamily="34" charset="-122"/>
+                <a:cs typeface="Corbel" pitchFamily="34" charset="-120"/>
               </a:rPr>
               <a:t>An instrument can be reliable but not valid — consistently measuring the wrong thing</a:t>
             </a:r>
-            <a:endParaRPr lang="en-US" sz="1300" dirty="0"/>
+            <a:endParaRPr lang="en-US" sz="1350" dirty="0"/>
           </a:p>
         </p:txBody>
       </p:sp>
@@ -3336,8 +3442,8 @@
         </p:nvSpPr>
         <p:spPr>
           <a:xfrm>
-            <a:off x="8503920" y="4709160"/>
-            <a:ext cx="800000" cy="300000"/>
+            <a:off x="566928" y="4700016"/>
+            <a:ext cx="914400" cy="274320"/>
           </a:xfrm>
           <a:prstGeom prst="rect">
             <a:avLst/>
@@ -3352,10 +3458,13 @@
           <a:bodyPr/>
           <a:lstStyle>
             <a:lvl1pPr>
-              <a:defRPr sz="1000">
-                <a:solidFill>
-                  <a:srgbClr val="6B7280"/>
-                </a:solidFill>
+              <a:defRPr sz="900">
+                <a:solidFill>
+                  <a:srgbClr val="5F6B76"/>
+                </a:solidFill>
+                <a:latin typeface="Corbel"/>
+                <a:ea typeface="Corbel"/>
+                <a:cs typeface="Corbel"/>
               </a:defRPr>
             </a:lvl1pPr>
           </a:lstStyle>
@@ -3402,8 +3511,8 @@
         </p:nvSpPr>
         <p:spPr>
           <a:xfrm>
-            <a:off x="502920" y="292608"/>
-            <a:ext cx="8046720" cy="228600"/>
+            <a:off x="566928" y="384048"/>
+            <a:ext cx="7772400" cy="237744"/>
           </a:xfrm>
           <a:prstGeom prst="rect">
             <a:avLst/>
@@ -3419,14 +3528,17 @@
               <a:buNone/>
             </a:pPr>
             <a:r>
-              <a:rPr lang="en-US" sz="1100" b="1" spc="150" kern="0" dirty="0">
-                <a:solidFill>
-                  <a:srgbClr val="0066CC"/>
-                </a:solidFill>
+              <a:rPr lang="en-US" sz="1000" spc="200" kern="0" dirty="0">
+                <a:solidFill>
+                  <a:srgbClr val="9A6A3C"/>
+                </a:solidFill>
+                <a:latin typeface="Corbel" pitchFamily="34" charset="0"/>
+                <a:ea typeface="Corbel" pitchFamily="34" charset="-122"/>
+                <a:cs typeface="Corbel" pitchFamily="34" charset="-120"/>
               </a:rPr>
               <a:t>UNIT 8</a:t>
             </a:r>
-            <a:endParaRPr lang="en-US" sz="1100" dirty="0"/>
+            <a:endParaRPr lang="en-US" sz="1000" dirty="0"/>
           </a:p>
         </p:txBody>
       </p:sp>
@@ -3438,8 +3550,8 @@
         </p:nvSpPr>
         <p:spPr>
           <a:xfrm>
-            <a:off x="502920" y="548640"/>
-            <a:ext cx="8046720" cy="548640"/>
+            <a:off x="566928" y="658368"/>
+            <a:ext cx="7772400" cy="658368"/>
           </a:xfrm>
           <a:prstGeom prst="rect">
             <a:avLst/>
@@ -3452,19 +3564,45 @@
           <a:lstStyle/>
           <a:p>
             <a:pPr indent="0" marL="0">
+              <a:lnSpc>
+                <a:spcPct val="100000"/>
+              </a:lnSpc>
               <a:buNone/>
             </a:pPr>
             <a:r>
-              <a:rPr lang="en-US" sz="2200" b="1" dirty="0">
-                <a:solidFill>
-                  <a:srgbClr val="111827"/>
-                </a:solidFill>
+              <a:rPr lang="en-US" sz="2500" dirty="0">
+                <a:solidFill>
+                  <a:srgbClr val="1C3140"/>
+                </a:solidFill>
+                <a:latin typeface="Constantia" pitchFamily="34" charset="0"/>
+                <a:ea typeface="Constantia" pitchFamily="34" charset="-122"/>
+                <a:cs typeface="Constantia" pitchFamily="34" charset="-120"/>
               </a:rPr>
               <a:t>Which evidence to report</a:t>
             </a:r>
-            <a:endParaRPr lang="en-US" sz="2200" dirty="0"/>
-          </a:p>
-        </p:txBody>
+            <a:endParaRPr lang="en-US" sz="2500" dirty="0"/>
+          </a:p>
+        </p:txBody>
+      </p:sp>
+      <p:sp>
+        <p:nvSpPr>
+          <p:cNvPr id="4" name="Shape 2"/>
+          <p:cNvSpPr/>
+          <p:nvPr/>
+        </p:nvSpPr>
+        <p:spPr>
+          <a:xfrm>
+            <a:off x="566928" y="1335024"/>
+            <a:ext cx="566928" cy="20117"/>
+          </a:xfrm>
+          <a:prstGeom prst="rect">
+            <a:avLst/>
+          </a:prstGeom>
+          <a:solidFill>
+            <a:srgbClr val="9A6A3C"/>
+          </a:solidFill>
+          <a:ln/>
+        </p:spPr>
       </p:sp>
       <p:graphicFrame>
         <p:nvGraphicFramePr>
@@ -3481,17 +3619,17 @@
           </p:nvPr>
         </p:nvGraphicFramePr>
         <p:xfrm>
-          <a:off x="502920" y="1234440"/>
-          <a:ext cx="8138160" cy="914400"/>
+          <a:off x="566928" y="1627632"/>
+          <a:ext cx="8010144" cy="914400"/>
         </p:xfrm>
         <a:graphic>
           <a:graphicData uri="http://schemas.openxmlformats.org/drawingml/2006/table">
             <a:tbl>
               <a:tblPr/>
               <a:tblGrid>
-                <a:gridCol w="2712720"/>
-                <a:gridCol w="2712720"/>
-                <a:gridCol w="2712720"/>
+                <a:gridCol w="2670048"/>
+                <a:gridCol w="2670048"/>
+                <a:gridCol w="2670048"/>
               </a:tblGrid>
               <a:tr h="0">
                 <a:tc>
@@ -3505,45 +3643,52 @@
                       <a:r>
                         <a:rPr lang="en-US" sz="1100" b="1" dirty="0">
                           <a:solidFill>
-                            <a:srgbClr val="FFFFFF"/>
+                            <a:srgbClr val="1C3140"/>
                           </a:solidFill>
+                          <a:latin typeface="Corbel" pitchFamily="34" charset="0"/>
+                          <a:ea typeface="Corbel" pitchFamily="34" charset="-122"/>
+                          <a:cs typeface="Corbel" pitchFamily="34" charset="-120"/>
                         </a:rPr>
                         <a:t>Property</a:t>
                       </a:r>
-                      <a:endParaRPr lang="en-US" sz="1100" dirty="0"/>
+                      <a:endParaRPr lang="en-US" sz="1100" dirty="0">
+                        <a:latin typeface="Corbel" charset="0"/>
+                        <a:ea typeface="Corbel" charset="0"/>
+                        <a:cs typeface="Corbel" charset="0"/>
+                      </a:endParaRPr>
                     </a:p>
                   </a:txBody>
-                  <a:tcPr marL="91440" marR="91440" marT="45720" marB="45720" anchor="t">
-                    <a:lnL w="6350" cap="flat" cmpd="sng" algn="ctr">
+                  <a:tcPr marL="76200" marR="76200" marT="76200" marB="76200" anchor="t">
+                    <a:lnL w="5080" cap="flat" cmpd="sng" algn="ctr">
                       <a:solidFill>
-                        <a:srgbClr val="D1D5DB"/>
+                        <a:srgbClr val="D8D3CB"/>
                       </a:solidFill>
                       <a:prstDash val="solid"/>
                       <a:round/>
                       <a:headEnd type="none" w="med" len="med"/>
                       <a:tailEnd type="none" w="med" len="med"/>
                     </a:lnL>
-                    <a:lnR w="6350" cap="flat" cmpd="sng" algn="ctr">
+                    <a:lnR w="5080" cap="flat" cmpd="sng" algn="ctr">
                       <a:solidFill>
-                        <a:srgbClr val="D1D5DB"/>
+                        <a:srgbClr val="D8D3CB"/>
                       </a:solidFill>
                       <a:prstDash val="solid"/>
                       <a:round/>
                       <a:headEnd type="none" w="med" len="med"/>
                       <a:tailEnd type="none" w="med" len="med"/>
                     </a:lnR>
-                    <a:lnT w="6350" cap="flat" cmpd="sng" algn="ctr">
+                    <a:lnT w="5080" cap="flat" cmpd="sng" algn="ctr">
                       <a:solidFill>
-                        <a:srgbClr val="D1D5DB"/>
+                        <a:srgbClr val="D8D3CB"/>
                       </a:solidFill>
                       <a:prstDash val="solid"/>
                       <a:round/>
                       <a:headEnd type="none" w="med" len="med"/>
                       <a:tailEnd type="none" w="med" len="med"/>
                     </a:lnT>
-                    <a:lnB w="6350" cap="flat" cmpd="sng" algn="ctr">
+                    <a:lnB w="5080" cap="flat" cmpd="sng" algn="ctr">
                       <a:solidFill>
-                        <a:srgbClr val="D1D5DB"/>
+                        <a:srgbClr val="D8D3CB"/>
                       </a:solidFill>
                       <a:prstDash val="solid"/>
                       <a:round/>
@@ -3551,7 +3696,7 @@
                       <a:tailEnd type="none" w="med" len="med"/>
                     </a:lnB>
                     <a:solidFill>
-                      <a:srgbClr val="004D99"/>
+                      <a:srgbClr val="F6F4F0"/>
                     </a:solidFill>
                   </a:tcPr>
                 </a:tc>
@@ -3566,45 +3711,52 @@
                       <a:r>
                         <a:rPr lang="en-US" sz="1100" b="1" dirty="0">
                           <a:solidFill>
-                            <a:srgbClr val="FFFFFF"/>
+                            <a:srgbClr val="1C3140"/>
                           </a:solidFill>
+                          <a:latin typeface="Corbel" pitchFamily="34" charset="0"/>
+                          <a:ea typeface="Corbel" pitchFamily="34" charset="-122"/>
+                          <a:cs typeface="Corbel" pitchFamily="34" charset="-120"/>
                         </a:rPr>
                         <a:t>Statistic</a:t>
                       </a:r>
-                      <a:endParaRPr lang="en-US" sz="1100" dirty="0"/>
+                      <a:endParaRPr lang="en-US" sz="1100" dirty="0">
+                        <a:latin typeface="Corbel" charset="0"/>
+                        <a:ea typeface="Corbel" charset="0"/>
+                        <a:cs typeface="Corbel" charset="0"/>
+                      </a:endParaRPr>
                     </a:p>
                   </a:txBody>
-                  <a:tcPr marL="91440" marR="91440" marT="45720" marB="45720" anchor="t">
-                    <a:lnL w="6350" cap="flat" cmpd="sng" algn="ctr">
+                  <a:tcPr marL="76200" marR="76200" marT="76200" marB="76200" anchor="t">
+                    <a:lnL w="5080" cap="flat" cmpd="sng" algn="ctr">
                       <a:solidFill>
-                        <a:srgbClr val="D1D5DB"/>
+                        <a:srgbClr val="D8D3CB"/>
                       </a:solidFill>
                       <a:prstDash val="solid"/>
                       <a:round/>
                       <a:headEnd type="none" w="med" len="med"/>
                       <a:tailEnd type="none" w="med" len="med"/>
                     </a:lnL>
-                    <a:lnR w="6350" cap="flat" cmpd="sng" algn="ctr">
+                    <a:lnR w="5080" cap="flat" cmpd="sng" algn="ctr">
                       <a:solidFill>
-                        <a:srgbClr val="D1D5DB"/>
+                        <a:srgbClr val="D8D3CB"/>
                       </a:solidFill>
                       <a:prstDash val="solid"/>
                       <a:round/>
                       <a:headEnd type="none" w="med" len="med"/>
                       <a:tailEnd type="none" w="med" len="med"/>
                     </a:lnR>
-                    <a:lnT w="6350" cap="flat" cmpd="sng" algn="ctr">
+                    <a:lnT w="5080" cap="flat" cmpd="sng" algn="ctr">
                       <a:solidFill>
-                        <a:srgbClr val="D1D5DB"/>
+                        <a:srgbClr val="D8D3CB"/>
                       </a:solidFill>
                       <a:prstDash val="solid"/>
                       <a:round/>
                       <a:headEnd type="none" w="med" len="med"/>
                       <a:tailEnd type="none" w="med" len="med"/>
                     </a:lnT>
-                    <a:lnB w="6350" cap="flat" cmpd="sng" algn="ctr">
+                    <a:lnB w="5080" cap="flat" cmpd="sng" algn="ctr">
                       <a:solidFill>
-                        <a:srgbClr val="D1D5DB"/>
+                        <a:srgbClr val="D8D3CB"/>
                       </a:solidFill>
                       <a:prstDash val="solid"/>
                       <a:round/>
@@ -3612,7 +3764,7 @@
                       <a:tailEnd type="none" w="med" len="med"/>
                     </a:lnB>
                     <a:solidFill>
-                      <a:srgbClr val="004D99"/>
+                      <a:srgbClr val="F6F4F0"/>
                     </a:solidFill>
                   </a:tcPr>
                 </a:tc>
@@ -3627,45 +3779,52 @@
                       <a:r>
                         <a:rPr lang="en-US" sz="1100" b="1" dirty="0">
                           <a:solidFill>
-                            <a:srgbClr val="FFFFFF"/>
+                            <a:srgbClr val="1C3140"/>
                           </a:solidFill>
+                          <a:latin typeface="Corbel" pitchFamily="34" charset="0"/>
+                          <a:ea typeface="Corbel" pitchFamily="34" charset="-122"/>
+                          <a:cs typeface="Corbel" pitchFamily="34" charset="-120"/>
                         </a:rPr>
                         <a:t>Rough benchmark</a:t>
                       </a:r>
-                      <a:endParaRPr lang="en-US" sz="1100" dirty="0"/>
+                      <a:endParaRPr lang="en-US" sz="1100" dirty="0">
+                        <a:latin typeface="Corbel" charset="0"/>
+                        <a:ea typeface="Corbel" charset="0"/>
+                        <a:cs typeface="Corbel" charset="0"/>
+                      </a:endParaRPr>
                     </a:p>
                   </a:txBody>
-                  <a:tcPr marL="91440" marR="91440" marT="45720" marB="45720" anchor="t">
-                    <a:lnL w="6350" cap="flat" cmpd="sng" algn="ctr">
+                  <a:tcPr marL="76200" marR="76200" marT="76200" marB="76200" anchor="t">
+                    <a:lnL w="5080" cap="flat" cmpd="sng" algn="ctr">
                       <a:solidFill>
-                        <a:srgbClr val="D1D5DB"/>
+                        <a:srgbClr val="D8D3CB"/>
                       </a:solidFill>
                       <a:prstDash val="solid"/>
                       <a:round/>
                       <a:headEnd type="none" w="med" len="med"/>
                       <a:tailEnd type="none" w="med" len="med"/>
                     </a:lnL>
-                    <a:lnR w="6350" cap="flat" cmpd="sng" algn="ctr">
+                    <a:lnR w="5080" cap="flat" cmpd="sng" algn="ctr">
                       <a:solidFill>
-                        <a:srgbClr val="D1D5DB"/>
+                        <a:srgbClr val="D8D3CB"/>
                       </a:solidFill>
                       <a:prstDash val="solid"/>
                       <a:round/>
                       <a:headEnd type="none" w="med" len="med"/>
                       <a:tailEnd type="none" w="med" len="med"/>
                     </a:lnR>
-                    <a:lnT w="6350" cap="flat" cmpd="sng" algn="ctr">
+                    <a:lnT w="5080" cap="flat" cmpd="sng" algn="ctr">
                       <a:solidFill>
-                        <a:srgbClr val="D1D5DB"/>
+                        <a:srgbClr val="D8D3CB"/>
                       </a:solidFill>
                       <a:prstDash val="solid"/>
                       <a:round/>
                       <a:headEnd type="none" w="med" len="med"/>
                       <a:tailEnd type="none" w="med" len="med"/>
                     </a:lnT>
-                    <a:lnB w="6350" cap="flat" cmpd="sng" algn="ctr">
+                    <a:lnB w="5080" cap="flat" cmpd="sng" algn="ctr">
                       <a:solidFill>
-                        <a:srgbClr val="D1D5DB"/>
+                        <a:srgbClr val="D8D3CB"/>
                       </a:solidFill>
                       <a:prstDash val="solid"/>
                       <a:round/>
@@ -3673,7 +3832,7 @@
                       <a:tailEnd type="none" w="med" len="med"/>
                     </a:lnB>
                     <a:solidFill>
-                      <a:srgbClr val="004D99"/>
+                      <a:srgbClr val="F6F4F0"/>
                     </a:solidFill>
                   </a:tcPr>
                 </a:tc>
@@ -3690,45 +3849,52 @@
                       <a:r>
                         <a:rPr lang="en-US" sz="1100" dirty="0">
                           <a:solidFill>
-                            <a:srgbClr val="374151"/>
+                            <a:srgbClr val="23282E"/>
                           </a:solidFill>
+                          <a:latin typeface="Corbel" pitchFamily="34" charset="0"/>
+                          <a:ea typeface="Corbel" pitchFamily="34" charset="-122"/>
+                          <a:cs typeface="Corbel" pitchFamily="34" charset="-120"/>
                         </a:rPr>
                         <a:t>Internal consistency</a:t>
                       </a:r>
-                      <a:endParaRPr lang="en-US" sz="1100" dirty="0"/>
+                      <a:endParaRPr lang="en-US" sz="1100" dirty="0">
+                        <a:latin typeface="Corbel" charset="0"/>
+                        <a:ea typeface="Corbel" charset="0"/>
+                        <a:cs typeface="Corbel" charset="0"/>
+                      </a:endParaRPr>
                     </a:p>
                   </a:txBody>
-                  <a:tcPr marL="91440" marR="91440" marT="45720" marB="45720" anchor="t">
-                    <a:lnL w="6350" cap="flat" cmpd="sng" algn="ctr">
+                  <a:tcPr marL="76200" marR="76200" marT="76200" marB="76200" anchor="t">
+                    <a:lnL w="5080" cap="flat" cmpd="sng" algn="ctr">
                       <a:solidFill>
-                        <a:srgbClr val="D1D5DB"/>
+                        <a:srgbClr val="D8D3CB"/>
                       </a:solidFill>
                       <a:prstDash val="solid"/>
                       <a:round/>
                       <a:headEnd type="none" w="med" len="med"/>
                       <a:tailEnd type="none" w="med" len="med"/>
                     </a:lnL>
-                    <a:lnR w="6350" cap="flat" cmpd="sng" algn="ctr">
+                    <a:lnR w="5080" cap="flat" cmpd="sng" algn="ctr">
                       <a:solidFill>
-                        <a:srgbClr val="D1D5DB"/>
+                        <a:srgbClr val="D8D3CB"/>
                       </a:solidFill>
                       <a:prstDash val="solid"/>
                       <a:round/>
                       <a:headEnd type="none" w="med" len="med"/>
                       <a:tailEnd type="none" w="med" len="med"/>
                     </a:lnR>
-                    <a:lnT w="6350" cap="flat" cmpd="sng" algn="ctr">
+                    <a:lnT w="5080" cap="flat" cmpd="sng" algn="ctr">
                       <a:solidFill>
-                        <a:srgbClr val="D1D5DB"/>
+                        <a:srgbClr val="D8D3CB"/>
                       </a:solidFill>
                       <a:prstDash val="solid"/>
                       <a:round/>
                       <a:headEnd type="none" w="med" len="med"/>
                       <a:tailEnd type="none" w="med" len="med"/>
                     </a:lnT>
-                    <a:lnB w="6350" cap="flat" cmpd="sng" algn="ctr">
+                    <a:lnB w="5080" cap="flat" cmpd="sng" algn="ctr">
                       <a:solidFill>
-                        <a:srgbClr val="D1D5DB"/>
+                        <a:srgbClr val="D8D3CB"/>
                       </a:solidFill>
                       <a:prstDash val="solid"/>
                       <a:round/>
@@ -3751,45 +3917,52 @@
                       <a:r>
                         <a:rPr lang="en-US" sz="1100" dirty="0">
                           <a:solidFill>
-                            <a:srgbClr val="374151"/>
+                            <a:srgbClr val="23282E"/>
                           </a:solidFill>
+                          <a:latin typeface="Corbel" pitchFamily="34" charset="0"/>
+                          <a:ea typeface="Corbel" pitchFamily="34" charset="-122"/>
+                          <a:cs typeface="Corbel" pitchFamily="34" charset="-120"/>
                         </a:rPr>
                         <a:t>Cronbach's alpha</a:t>
                       </a:r>
-                      <a:endParaRPr lang="en-US" sz="1100" dirty="0"/>
+                      <a:endParaRPr lang="en-US" sz="1100" dirty="0">
+                        <a:latin typeface="Corbel" charset="0"/>
+                        <a:ea typeface="Corbel" charset="0"/>
+                        <a:cs typeface="Corbel" charset="0"/>
+                      </a:endParaRPr>
                     </a:p>
                   </a:txBody>
-                  <a:tcPr marL="91440" marR="91440" marT="45720" marB="45720" anchor="t">
-                    <a:lnL w="6350" cap="flat" cmpd="sng" algn="ctr">
+                  <a:tcPr marL="76200" marR="76200" marT="76200" marB="76200" anchor="t">
+                    <a:lnL w="5080" cap="flat" cmpd="sng" algn="ctr">
                       <a:solidFill>
-                        <a:srgbClr val="D1D5DB"/>
+                        <a:srgbClr val="D8D3CB"/>
                       </a:solidFill>
                       <a:prstDash val="solid"/>
                       <a:round/>
                       <a:headEnd type="none" w="med" len="med"/>
                       <a:tailEnd type="none" w="med" len="med"/>
                     </a:lnL>
-                    <a:lnR w="6350" cap="flat" cmpd="sng" algn="ctr">
+                    <a:lnR w="5080" cap="flat" cmpd="sng" algn="ctr">
                       <a:solidFill>
-                        <a:srgbClr val="D1D5DB"/>
+                        <a:srgbClr val="D8D3CB"/>
                       </a:solidFill>
                       <a:prstDash val="solid"/>
                       <a:round/>
                       <a:headEnd type="none" w="med" len="med"/>
                       <a:tailEnd type="none" w="med" len="med"/>
                     </a:lnR>
-                    <a:lnT w="6350" cap="flat" cmpd="sng" algn="ctr">
+                    <a:lnT w="5080" cap="flat" cmpd="sng" algn="ctr">
                       <a:solidFill>
-                        <a:srgbClr val="D1D5DB"/>
+                        <a:srgbClr val="D8D3CB"/>
                       </a:solidFill>
                       <a:prstDash val="solid"/>
                       <a:round/>
                       <a:headEnd type="none" w="med" len="med"/>
                       <a:tailEnd type="none" w="med" len="med"/>
                     </a:lnT>
-                    <a:lnB w="6350" cap="flat" cmpd="sng" algn="ctr">
+                    <a:lnB w="5080" cap="flat" cmpd="sng" algn="ctr">
                       <a:solidFill>
-                        <a:srgbClr val="D1D5DB"/>
+                        <a:srgbClr val="D8D3CB"/>
                       </a:solidFill>
                       <a:prstDash val="solid"/>
                       <a:round/>
@@ -3812,45 +3985,52 @@
                       <a:r>
                         <a:rPr lang="en-US" sz="1100" dirty="0">
                           <a:solidFill>
-                            <a:srgbClr val="374151"/>
+                            <a:srgbClr val="23282E"/>
                           </a:solidFill>
+                          <a:latin typeface="Corbel" pitchFamily="34" charset="0"/>
+                          <a:ea typeface="Corbel" pitchFamily="34" charset="-122"/>
+                          <a:cs typeface="Corbel" pitchFamily="34" charset="-120"/>
                         </a:rPr>
                         <a:t>0.70 - 0.95</a:t>
                       </a:r>
-                      <a:endParaRPr lang="en-US" sz="1100" dirty="0"/>
+                      <a:endParaRPr lang="en-US" sz="1100" dirty="0">
+                        <a:latin typeface="Corbel" charset="0"/>
+                        <a:ea typeface="Corbel" charset="0"/>
+                        <a:cs typeface="Corbel" charset="0"/>
+                      </a:endParaRPr>
                     </a:p>
                   </a:txBody>
-                  <a:tcPr marL="91440" marR="91440" marT="45720" marB="45720" anchor="t">
-                    <a:lnL w="6350" cap="flat" cmpd="sng" algn="ctr">
+                  <a:tcPr marL="76200" marR="76200" marT="76200" marB="76200" anchor="t">
+                    <a:lnL w="5080" cap="flat" cmpd="sng" algn="ctr">
                       <a:solidFill>
-                        <a:srgbClr val="D1D5DB"/>
+                        <a:srgbClr val="D8D3CB"/>
                       </a:solidFill>
                       <a:prstDash val="solid"/>
                       <a:round/>
                       <a:headEnd type="none" w="med" len="med"/>
                       <a:tailEnd type="none" w="med" len="med"/>
                     </a:lnL>
-                    <a:lnR w="6350" cap="flat" cmpd="sng" algn="ctr">
+                    <a:lnR w="5080" cap="flat" cmpd="sng" algn="ctr">
                       <a:solidFill>
-                        <a:srgbClr val="D1D5DB"/>
+                        <a:srgbClr val="D8D3CB"/>
                       </a:solidFill>
                       <a:prstDash val="solid"/>
                       <a:round/>
                       <a:headEnd type="none" w="med" len="med"/>
                       <a:tailEnd type="none" w="med" len="med"/>
                     </a:lnR>
-                    <a:lnT w="6350" cap="flat" cmpd="sng" algn="ctr">
+                    <a:lnT w="5080" cap="flat" cmpd="sng" algn="ctr">
                       <a:solidFill>
-                        <a:srgbClr val="D1D5DB"/>
+                        <a:srgbClr val="D8D3CB"/>
                       </a:solidFill>
                       <a:prstDash val="solid"/>
                       <a:round/>
                       <a:headEnd type="none" w="med" len="med"/>
                       <a:tailEnd type="none" w="med" len="med"/>
                     </a:lnT>
-                    <a:lnB w="6350" cap="flat" cmpd="sng" algn="ctr">
+                    <a:lnB w="5080" cap="flat" cmpd="sng" algn="ctr">
                       <a:solidFill>
-                        <a:srgbClr val="D1D5DB"/>
+                        <a:srgbClr val="D8D3CB"/>
                       </a:solidFill>
                       <a:prstDash val="solid"/>
                       <a:round/>
@@ -3875,230 +4055,52 @@
                       <a:r>
                         <a:rPr lang="en-US" sz="1100" dirty="0">
                           <a:solidFill>
-                            <a:srgbClr val="374151"/>
+                            <a:srgbClr val="23282E"/>
                           </a:solidFill>
+                          <a:latin typeface="Corbel" pitchFamily="34" charset="0"/>
+                          <a:ea typeface="Corbel" pitchFamily="34" charset="-122"/>
+                          <a:cs typeface="Corbel" pitchFamily="34" charset="-120"/>
                         </a:rPr>
                         <a:t>Test-retest</a:t>
                       </a:r>
-                      <a:endParaRPr lang="en-US" sz="1100" dirty="0"/>
+                      <a:endParaRPr lang="en-US" sz="1100" dirty="0">
+                        <a:latin typeface="Corbel" charset="0"/>
+                        <a:ea typeface="Corbel" charset="0"/>
+                        <a:cs typeface="Corbel" charset="0"/>
+                      </a:endParaRPr>
                     </a:p>
                   </a:txBody>
-                  <a:tcPr marL="91440" marR="91440" marT="45720" marB="45720" anchor="t">
-                    <a:lnL w="6350" cap="flat" cmpd="sng" algn="ctr">
+                  <a:tcPr marL="76200" marR="76200" marT="76200" marB="76200" anchor="t">
+                    <a:lnL w="5080" cap="flat" cmpd="sng" algn="ctr">
                       <a:solidFill>
-                        <a:srgbClr val="D1D5DB"/>
+                        <a:srgbClr val="D8D3CB"/>
                       </a:solidFill>
                       <a:prstDash val="solid"/>
                       <a:round/>
                       <a:headEnd type="none" w="med" len="med"/>
                       <a:tailEnd type="none" w="med" len="med"/>
                     </a:lnL>
-                    <a:lnR w="6350" cap="flat" cmpd="sng" algn="ctr">
+                    <a:lnR w="5080" cap="flat" cmpd="sng" algn="ctr">
                       <a:solidFill>
-                        <a:srgbClr val="D1D5DB"/>
+                        <a:srgbClr val="D8D3CB"/>
                       </a:solidFill>
                       <a:prstDash val="solid"/>
                       <a:round/>
                       <a:headEnd type="none" w="med" len="med"/>
                       <a:tailEnd type="none" w="med" len="med"/>
                     </a:lnR>
-                    <a:lnT w="6350" cap="flat" cmpd="sng" algn="ctr">
+                    <a:lnT w="5080" cap="flat" cmpd="sng" algn="ctr">
                       <a:solidFill>
-                        <a:srgbClr val="D1D5DB"/>
+                        <a:srgbClr val="D8D3CB"/>
                       </a:solidFill>
                       <a:prstDash val="solid"/>
                       <a:round/>
                       <a:headEnd type="none" w="med" len="med"/>
                       <a:tailEnd type="none" w="med" len="med"/>
                     </a:lnT>
-                    <a:lnB w="6350" cap="flat" cmpd="sng" algn="ctr">
+                    <a:lnB w="5080" cap="flat" cmpd="sng" algn="ctr">
                       <a:solidFill>
-                        <a:srgbClr val="D1D5DB"/>
-                      </a:solidFill>
-                      <a:prstDash val="solid"/>
-                      <a:round/>
-                      <a:headEnd type="none" w="med" len="med"/>
-                      <a:tailEnd type="none" w="med" len="med"/>
-                    </a:lnB>
-                    <a:solidFill>
-                      <a:srgbClr val="F9FAFB"/>
-                    </a:solidFill>
-                  </a:tcPr>
-                </a:tc>
-                <a:tc>
-                  <a:txBody>
-                    <a:bodyPr/>
-                    <a:lstStyle/>
-                    <a:p>
-                      <a:pPr indent="0" marL="0">
-                        <a:buNone/>
-                      </a:pPr>
-                      <a:r>
-                        <a:rPr lang="en-US" sz="1100" dirty="0">
-                          <a:solidFill>
-                            <a:srgbClr val="374151"/>
-                          </a:solidFill>
-                        </a:rPr>
-                        <a:t>ICC or Pearson r</a:t>
-                      </a:r>
-                      <a:endParaRPr lang="en-US" sz="1100" dirty="0"/>
-                    </a:p>
-                  </a:txBody>
-                  <a:tcPr marL="91440" marR="91440" marT="45720" marB="45720" anchor="t">
-                    <a:lnL w="6350" cap="flat" cmpd="sng" algn="ctr">
-                      <a:solidFill>
-                        <a:srgbClr val="D1D5DB"/>
-                      </a:solidFill>
-                      <a:prstDash val="solid"/>
-                      <a:round/>
-                      <a:headEnd type="none" w="med" len="med"/>
-                      <a:tailEnd type="none" w="med" len="med"/>
-                    </a:lnL>
-                    <a:lnR w="6350" cap="flat" cmpd="sng" algn="ctr">
-                      <a:solidFill>
-                        <a:srgbClr val="D1D5DB"/>
-                      </a:solidFill>
-                      <a:prstDash val="solid"/>
-                      <a:round/>
-                      <a:headEnd type="none" w="med" len="med"/>
-                      <a:tailEnd type="none" w="med" len="med"/>
-                    </a:lnR>
-                    <a:lnT w="6350" cap="flat" cmpd="sng" algn="ctr">
-                      <a:solidFill>
-                        <a:srgbClr val="D1D5DB"/>
-                      </a:solidFill>
-                      <a:prstDash val="solid"/>
-                      <a:round/>
-                      <a:headEnd type="none" w="med" len="med"/>
-                      <a:tailEnd type="none" w="med" len="med"/>
-                    </a:lnT>
-                    <a:lnB w="6350" cap="flat" cmpd="sng" algn="ctr">
-                      <a:solidFill>
-                        <a:srgbClr val="D1D5DB"/>
-                      </a:solidFill>
-                      <a:prstDash val="solid"/>
-                      <a:round/>
-                      <a:headEnd type="none" w="med" len="med"/>
-                      <a:tailEnd type="none" w="med" len="med"/>
-                    </a:lnB>
-                    <a:solidFill>
-                      <a:srgbClr val="F9FAFB"/>
-                    </a:solidFill>
-                  </a:tcPr>
-                </a:tc>
-                <a:tc>
-                  <a:txBody>
-                    <a:bodyPr/>
-                    <a:lstStyle/>
-                    <a:p>
-                      <a:pPr indent="0" marL="0">
-                        <a:buNone/>
-                      </a:pPr>
-                      <a:r>
-                        <a:rPr lang="en-US" sz="1100" dirty="0">
-                          <a:solidFill>
-                            <a:srgbClr val="374151"/>
-                          </a:solidFill>
-                        </a:rPr>
-                        <a:t>≥ 0.70</a:t>
-                      </a:r>
-                      <a:endParaRPr lang="en-US" sz="1100" dirty="0"/>
-                    </a:p>
-                  </a:txBody>
-                  <a:tcPr marL="91440" marR="91440" marT="45720" marB="45720" anchor="t">
-                    <a:lnL w="6350" cap="flat" cmpd="sng" algn="ctr">
-                      <a:solidFill>
-                        <a:srgbClr val="D1D5DB"/>
-                      </a:solidFill>
-                      <a:prstDash val="solid"/>
-                      <a:round/>
-                      <a:headEnd type="none" w="med" len="med"/>
-                      <a:tailEnd type="none" w="med" len="med"/>
-                    </a:lnL>
-                    <a:lnR w="6350" cap="flat" cmpd="sng" algn="ctr">
-                      <a:solidFill>
-                        <a:srgbClr val="D1D5DB"/>
-                      </a:solidFill>
-                      <a:prstDash val="solid"/>
-                      <a:round/>
-                      <a:headEnd type="none" w="med" len="med"/>
-                      <a:tailEnd type="none" w="med" len="med"/>
-                    </a:lnR>
-                    <a:lnT w="6350" cap="flat" cmpd="sng" algn="ctr">
-                      <a:solidFill>
-                        <a:srgbClr val="D1D5DB"/>
-                      </a:solidFill>
-                      <a:prstDash val="solid"/>
-                      <a:round/>
-                      <a:headEnd type="none" w="med" len="med"/>
-                      <a:tailEnd type="none" w="med" len="med"/>
-                    </a:lnT>
-                    <a:lnB w="6350" cap="flat" cmpd="sng" algn="ctr">
-                      <a:solidFill>
-                        <a:srgbClr val="D1D5DB"/>
-                      </a:solidFill>
-                      <a:prstDash val="solid"/>
-                      <a:round/>
-                      <a:headEnd type="none" w="med" len="med"/>
-                      <a:tailEnd type="none" w="med" len="med"/>
-                    </a:lnB>
-                    <a:solidFill>
-                      <a:srgbClr val="F9FAFB"/>
-                    </a:solidFill>
-                  </a:tcPr>
-                </a:tc>
-              </a:tr>
-              <a:tr h="0">
-                <a:tc>
-                  <a:txBody>
-                    <a:bodyPr/>
-                    <a:lstStyle/>
-                    <a:p>
-                      <a:pPr indent="0" marL="0">
-                        <a:buNone/>
-                      </a:pPr>
-                      <a:r>
-                        <a:rPr lang="en-US" sz="1100" dirty="0">
-                          <a:solidFill>
-                            <a:srgbClr val="374151"/>
-                          </a:solidFill>
-                        </a:rPr>
-                        <a:t>Inter-rater agreement</a:t>
-                      </a:r>
-                      <a:endParaRPr lang="en-US" sz="1100" dirty="0"/>
-                    </a:p>
-                  </a:txBody>
-                  <a:tcPr marL="91440" marR="91440" marT="45720" marB="45720" anchor="t">
-                    <a:lnL w="6350" cap="flat" cmpd="sng" algn="ctr">
-                      <a:solidFill>
-                        <a:srgbClr val="D1D5DB"/>
-                      </a:solidFill>
-                      <a:prstDash val="solid"/>
-                      <a:round/>
-                      <a:headEnd type="none" w="med" len="med"/>
-                      <a:tailEnd type="none" w="med" len="med"/>
-                    </a:lnL>
-                    <a:lnR w="6350" cap="flat" cmpd="sng" algn="ctr">
-                      <a:solidFill>
-                        <a:srgbClr val="D1D5DB"/>
-                      </a:solidFill>
-                      <a:prstDash val="solid"/>
-                      <a:round/>
-                      <a:headEnd type="none" w="med" len="med"/>
-                      <a:tailEnd type="none" w="med" len="med"/>
-                    </a:lnR>
-                    <a:lnT w="6350" cap="flat" cmpd="sng" algn="ctr">
-                      <a:solidFill>
-                        <a:srgbClr val="D1D5DB"/>
-                      </a:solidFill>
-                      <a:prstDash val="solid"/>
-                      <a:round/>
-                      <a:headEnd type="none" w="med" len="med"/>
-                      <a:tailEnd type="none" w="med" len="med"/>
-                    </a:lnT>
-                    <a:lnB w="6350" cap="flat" cmpd="sng" algn="ctr">
-                      <a:solidFill>
-                        <a:srgbClr val="D1D5DB"/>
+                        <a:srgbClr val="D8D3CB"/>
                       </a:solidFill>
                       <a:prstDash val="solid"/>
                       <a:round/>
@@ -4121,45 +4123,52 @@
                       <a:r>
                         <a:rPr lang="en-US" sz="1100" dirty="0">
                           <a:solidFill>
-                            <a:srgbClr val="374151"/>
+                            <a:srgbClr val="23282E"/>
                           </a:solidFill>
+                          <a:latin typeface="Corbel" pitchFamily="34" charset="0"/>
+                          <a:ea typeface="Corbel" pitchFamily="34" charset="-122"/>
+                          <a:cs typeface="Corbel" pitchFamily="34" charset="-120"/>
                         </a:rPr>
-                        <a:t>Cohen's kappa</a:t>
+                        <a:t>ICC or Pearson r</a:t>
                       </a:r>
-                      <a:endParaRPr lang="en-US" sz="1100" dirty="0"/>
+                      <a:endParaRPr lang="en-US" sz="1100" dirty="0">
+                        <a:latin typeface="Corbel" charset="0"/>
+                        <a:ea typeface="Corbel" charset="0"/>
+                        <a:cs typeface="Corbel" charset="0"/>
+                      </a:endParaRPr>
                     </a:p>
                   </a:txBody>
-                  <a:tcPr marL="91440" marR="91440" marT="45720" marB="45720" anchor="t">
-                    <a:lnL w="6350" cap="flat" cmpd="sng" algn="ctr">
+                  <a:tcPr marL="76200" marR="76200" marT="76200" marB="76200" anchor="t">
+                    <a:lnL w="5080" cap="flat" cmpd="sng" algn="ctr">
                       <a:solidFill>
-                        <a:srgbClr val="D1D5DB"/>
+                        <a:srgbClr val="D8D3CB"/>
                       </a:solidFill>
                       <a:prstDash val="solid"/>
                       <a:round/>
                       <a:headEnd type="none" w="med" len="med"/>
                       <a:tailEnd type="none" w="med" len="med"/>
                     </a:lnL>
-                    <a:lnR w="6350" cap="flat" cmpd="sng" algn="ctr">
+                    <a:lnR w="5080" cap="flat" cmpd="sng" algn="ctr">
                       <a:solidFill>
-                        <a:srgbClr val="D1D5DB"/>
+                        <a:srgbClr val="D8D3CB"/>
                       </a:solidFill>
                       <a:prstDash val="solid"/>
                       <a:round/>
                       <a:headEnd type="none" w="med" len="med"/>
                       <a:tailEnd type="none" w="med" len="med"/>
                     </a:lnR>
-                    <a:lnT w="6350" cap="flat" cmpd="sng" algn="ctr">
+                    <a:lnT w="5080" cap="flat" cmpd="sng" algn="ctr">
                       <a:solidFill>
-                        <a:srgbClr val="D1D5DB"/>
+                        <a:srgbClr val="D8D3CB"/>
                       </a:solidFill>
                       <a:prstDash val="solid"/>
                       <a:round/>
                       <a:headEnd type="none" w="med" len="med"/>
                       <a:tailEnd type="none" w="med" len="med"/>
                     </a:lnT>
-                    <a:lnB w="6350" cap="flat" cmpd="sng" algn="ctr">
+                    <a:lnB w="5080" cap="flat" cmpd="sng" algn="ctr">
                       <a:solidFill>
-                        <a:srgbClr val="D1D5DB"/>
+                        <a:srgbClr val="D8D3CB"/>
                       </a:solidFill>
                       <a:prstDash val="solid"/>
                       <a:round/>
@@ -4182,45 +4191,52 @@
                       <a:r>
                         <a:rPr lang="en-US" sz="1100" dirty="0">
                           <a:solidFill>
-                            <a:srgbClr val="374151"/>
+                            <a:srgbClr val="23282E"/>
                           </a:solidFill>
+                          <a:latin typeface="Corbel" pitchFamily="34" charset="0"/>
+                          <a:ea typeface="Corbel" pitchFamily="34" charset="-122"/>
+                          <a:cs typeface="Corbel" pitchFamily="34" charset="-120"/>
                         </a:rPr>
-                        <a:t>≥ 0.60 substantial</a:t>
+                        <a:t>≥ 0.70</a:t>
                       </a:r>
-                      <a:endParaRPr lang="en-US" sz="1100" dirty="0"/>
+                      <a:endParaRPr lang="en-US" sz="1100" dirty="0">
+                        <a:latin typeface="Corbel" charset="0"/>
+                        <a:ea typeface="Corbel" charset="0"/>
+                        <a:cs typeface="Corbel" charset="0"/>
+                      </a:endParaRPr>
                     </a:p>
                   </a:txBody>
-                  <a:tcPr marL="91440" marR="91440" marT="45720" marB="45720" anchor="t">
-                    <a:lnL w="6350" cap="flat" cmpd="sng" algn="ctr">
+                  <a:tcPr marL="76200" marR="76200" marT="76200" marB="76200" anchor="t">
+                    <a:lnL w="5080" cap="flat" cmpd="sng" algn="ctr">
                       <a:solidFill>
-                        <a:srgbClr val="D1D5DB"/>
+                        <a:srgbClr val="D8D3CB"/>
                       </a:solidFill>
                       <a:prstDash val="solid"/>
                       <a:round/>
                       <a:headEnd type="none" w="med" len="med"/>
                       <a:tailEnd type="none" w="med" len="med"/>
                     </a:lnL>
-                    <a:lnR w="6350" cap="flat" cmpd="sng" algn="ctr">
+                    <a:lnR w="5080" cap="flat" cmpd="sng" algn="ctr">
                       <a:solidFill>
-                        <a:srgbClr val="D1D5DB"/>
+                        <a:srgbClr val="D8D3CB"/>
                       </a:solidFill>
                       <a:prstDash val="solid"/>
                       <a:round/>
                       <a:headEnd type="none" w="med" len="med"/>
                       <a:tailEnd type="none" w="med" len="med"/>
                     </a:lnR>
-                    <a:lnT w="6350" cap="flat" cmpd="sng" algn="ctr">
+                    <a:lnT w="5080" cap="flat" cmpd="sng" algn="ctr">
                       <a:solidFill>
-                        <a:srgbClr val="D1D5DB"/>
+                        <a:srgbClr val="D8D3CB"/>
                       </a:solidFill>
                       <a:prstDash val="solid"/>
                       <a:round/>
                       <a:headEnd type="none" w="med" len="med"/>
                       <a:tailEnd type="none" w="med" len="med"/>
                     </a:lnT>
-                    <a:lnB w="6350" cap="flat" cmpd="sng" algn="ctr">
+                    <a:lnB w="5080" cap="flat" cmpd="sng" algn="ctr">
                       <a:solidFill>
-                        <a:srgbClr val="D1D5DB"/>
+                        <a:srgbClr val="D8D3CB"/>
                       </a:solidFill>
                       <a:prstDash val="solid"/>
                       <a:round/>
@@ -4245,230 +4261,52 @@
                       <a:r>
                         <a:rPr lang="en-US" sz="1100" dirty="0">
                           <a:solidFill>
-                            <a:srgbClr val="374151"/>
+                            <a:srgbClr val="23282E"/>
                           </a:solidFill>
+                          <a:latin typeface="Corbel" pitchFamily="34" charset="0"/>
+                          <a:ea typeface="Corbel" pitchFamily="34" charset="-122"/>
+                          <a:cs typeface="Corbel" pitchFamily="34" charset="-120"/>
                         </a:rPr>
-                        <a:t>Content validity</a:t>
+                        <a:t>Inter-rater agreement</a:t>
                       </a:r>
-                      <a:endParaRPr lang="en-US" sz="1100" dirty="0"/>
+                      <a:endParaRPr lang="en-US" sz="1100" dirty="0">
+                        <a:latin typeface="Corbel" charset="0"/>
+                        <a:ea typeface="Corbel" charset="0"/>
+                        <a:cs typeface="Corbel" charset="0"/>
+                      </a:endParaRPr>
                     </a:p>
                   </a:txBody>
-                  <a:tcPr marL="91440" marR="91440" marT="45720" marB="45720" anchor="t">
-                    <a:lnL w="6350" cap="flat" cmpd="sng" algn="ctr">
+                  <a:tcPr marL="76200" marR="76200" marT="76200" marB="76200" anchor="t">
+                    <a:lnL w="5080" cap="flat" cmpd="sng" algn="ctr">
                       <a:solidFill>
-                        <a:srgbClr val="D1D5DB"/>
+                        <a:srgbClr val="D8D3CB"/>
                       </a:solidFill>
                       <a:prstDash val="solid"/>
                       <a:round/>
                       <a:headEnd type="none" w="med" len="med"/>
                       <a:tailEnd type="none" w="med" len="med"/>
                     </a:lnL>
-                    <a:lnR w="6350" cap="flat" cmpd="sng" algn="ctr">
+                    <a:lnR w="5080" cap="flat" cmpd="sng" algn="ctr">
                       <a:solidFill>
-                        <a:srgbClr val="D1D5DB"/>
+                        <a:srgbClr val="D8D3CB"/>
                       </a:solidFill>
                       <a:prstDash val="solid"/>
                       <a:round/>
                       <a:headEnd type="none" w="med" len="med"/>
                       <a:tailEnd type="none" w="med" len="med"/>
                     </a:lnR>
-                    <a:lnT w="6350" cap="flat" cmpd="sng" algn="ctr">
+                    <a:lnT w="5080" cap="flat" cmpd="sng" algn="ctr">
                       <a:solidFill>
-                        <a:srgbClr val="D1D5DB"/>
+                        <a:srgbClr val="D8D3CB"/>
                       </a:solidFill>
                       <a:prstDash val="solid"/>
                       <a:round/>
                       <a:headEnd type="none" w="med" len="med"/>
                       <a:tailEnd type="none" w="med" len="med"/>
                     </a:lnT>
-                    <a:lnB w="6350" cap="flat" cmpd="sng" algn="ctr">
+                    <a:lnB w="5080" cap="flat" cmpd="sng" algn="ctr">
                       <a:solidFill>
-                        <a:srgbClr val="D1D5DB"/>
-                      </a:solidFill>
-                      <a:prstDash val="solid"/>
-                      <a:round/>
-                      <a:headEnd type="none" w="med" len="med"/>
-                      <a:tailEnd type="none" w="med" len="med"/>
-                    </a:lnB>
-                    <a:solidFill>
-                      <a:srgbClr val="F9FAFB"/>
-                    </a:solidFill>
-                  </a:tcPr>
-                </a:tc>
-                <a:tc>
-                  <a:txBody>
-                    <a:bodyPr/>
-                    <a:lstStyle/>
-                    <a:p>
-                      <a:pPr indent="0" marL="0">
-                        <a:buNone/>
-                      </a:pPr>
-                      <a:r>
-                        <a:rPr lang="en-US" sz="1100" dirty="0">
-                          <a:solidFill>
-                            <a:srgbClr val="374151"/>
-                          </a:solidFill>
-                        </a:rPr>
-                        <a:t>CVI</a:t>
-                      </a:r>
-                      <a:endParaRPr lang="en-US" sz="1100" dirty="0"/>
-                    </a:p>
-                  </a:txBody>
-                  <a:tcPr marL="91440" marR="91440" marT="45720" marB="45720" anchor="t">
-                    <a:lnL w="6350" cap="flat" cmpd="sng" algn="ctr">
-                      <a:solidFill>
-                        <a:srgbClr val="D1D5DB"/>
-                      </a:solidFill>
-                      <a:prstDash val="solid"/>
-                      <a:round/>
-                      <a:headEnd type="none" w="med" len="med"/>
-                      <a:tailEnd type="none" w="med" len="med"/>
-                    </a:lnL>
-                    <a:lnR w="6350" cap="flat" cmpd="sng" algn="ctr">
-                      <a:solidFill>
-                        <a:srgbClr val="D1D5DB"/>
-                      </a:solidFill>
-                      <a:prstDash val="solid"/>
-                      <a:round/>
-                      <a:headEnd type="none" w="med" len="med"/>
-                      <a:tailEnd type="none" w="med" len="med"/>
-                    </a:lnR>
-                    <a:lnT w="6350" cap="flat" cmpd="sng" algn="ctr">
-                      <a:solidFill>
-                        <a:srgbClr val="D1D5DB"/>
-                      </a:solidFill>
-                      <a:prstDash val="solid"/>
-                      <a:round/>
-                      <a:headEnd type="none" w="med" len="med"/>
-                      <a:tailEnd type="none" w="med" len="med"/>
-                    </a:lnT>
-                    <a:lnB w="6350" cap="flat" cmpd="sng" algn="ctr">
-                      <a:solidFill>
-                        <a:srgbClr val="D1D5DB"/>
-                      </a:solidFill>
-                      <a:prstDash val="solid"/>
-                      <a:round/>
-                      <a:headEnd type="none" w="med" len="med"/>
-                      <a:tailEnd type="none" w="med" len="med"/>
-                    </a:lnB>
-                    <a:solidFill>
-                      <a:srgbClr val="F9FAFB"/>
-                    </a:solidFill>
-                  </a:tcPr>
-                </a:tc>
-                <a:tc>
-                  <a:txBody>
-                    <a:bodyPr/>
-                    <a:lstStyle/>
-                    <a:p>
-                      <a:pPr indent="0" marL="0">
-                        <a:buNone/>
-                      </a:pPr>
-                      <a:r>
-                        <a:rPr lang="en-US" sz="1100" dirty="0">
-                          <a:solidFill>
-                            <a:srgbClr val="374151"/>
-                          </a:solidFill>
-                        </a:rPr>
-                        <a:t>≥ 0.78 per item</a:t>
-                      </a:r>
-                      <a:endParaRPr lang="en-US" sz="1100" dirty="0"/>
-                    </a:p>
-                  </a:txBody>
-                  <a:tcPr marL="91440" marR="91440" marT="45720" marB="45720" anchor="t">
-                    <a:lnL w="6350" cap="flat" cmpd="sng" algn="ctr">
-                      <a:solidFill>
-                        <a:srgbClr val="D1D5DB"/>
-                      </a:solidFill>
-                      <a:prstDash val="solid"/>
-                      <a:round/>
-                      <a:headEnd type="none" w="med" len="med"/>
-                      <a:tailEnd type="none" w="med" len="med"/>
-                    </a:lnL>
-                    <a:lnR w="6350" cap="flat" cmpd="sng" algn="ctr">
-                      <a:solidFill>
-                        <a:srgbClr val="D1D5DB"/>
-                      </a:solidFill>
-                      <a:prstDash val="solid"/>
-                      <a:round/>
-                      <a:headEnd type="none" w="med" len="med"/>
-                      <a:tailEnd type="none" w="med" len="med"/>
-                    </a:lnR>
-                    <a:lnT w="6350" cap="flat" cmpd="sng" algn="ctr">
-                      <a:solidFill>
-                        <a:srgbClr val="D1D5DB"/>
-                      </a:solidFill>
-                      <a:prstDash val="solid"/>
-                      <a:round/>
-                      <a:headEnd type="none" w="med" len="med"/>
-                      <a:tailEnd type="none" w="med" len="med"/>
-                    </a:lnT>
-                    <a:lnB w="6350" cap="flat" cmpd="sng" algn="ctr">
-                      <a:solidFill>
-                        <a:srgbClr val="D1D5DB"/>
-                      </a:solidFill>
-                      <a:prstDash val="solid"/>
-                      <a:round/>
-                      <a:headEnd type="none" w="med" len="med"/>
-                      <a:tailEnd type="none" w="med" len="med"/>
-                    </a:lnB>
-                    <a:solidFill>
-                      <a:srgbClr val="F9FAFB"/>
-                    </a:solidFill>
-                  </a:tcPr>
-                </a:tc>
-              </a:tr>
-              <a:tr h="0">
-                <a:tc>
-                  <a:txBody>
-                    <a:bodyPr/>
-                    <a:lstStyle/>
-                    <a:p>
-                      <a:pPr indent="0" marL="0">
-                        <a:buNone/>
-                      </a:pPr>
-                      <a:r>
-                        <a:rPr lang="en-US" sz="1100" dirty="0">
-                          <a:solidFill>
-                            <a:srgbClr val="374151"/>
-                          </a:solidFill>
-                        </a:rPr>
-                        <a:t>Construct validity</a:t>
-                      </a:r>
-                      <a:endParaRPr lang="en-US" sz="1100" dirty="0"/>
-                    </a:p>
-                  </a:txBody>
-                  <a:tcPr marL="91440" marR="91440" marT="45720" marB="45720" anchor="t">
-                    <a:lnL w="6350" cap="flat" cmpd="sng" algn="ctr">
-                      <a:solidFill>
-                        <a:srgbClr val="D1D5DB"/>
-                      </a:solidFill>
-                      <a:prstDash val="solid"/>
-                      <a:round/>
-                      <a:headEnd type="none" w="med" len="med"/>
-                      <a:tailEnd type="none" w="med" len="med"/>
-                    </a:lnL>
-                    <a:lnR w="6350" cap="flat" cmpd="sng" algn="ctr">
-                      <a:solidFill>
-                        <a:srgbClr val="D1D5DB"/>
-                      </a:solidFill>
-                      <a:prstDash val="solid"/>
-                      <a:round/>
-                      <a:headEnd type="none" w="med" len="med"/>
-                      <a:tailEnd type="none" w="med" len="med"/>
-                    </a:lnR>
-                    <a:lnT w="6350" cap="flat" cmpd="sng" algn="ctr">
-                      <a:solidFill>
-                        <a:srgbClr val="D1D5DB"/>
-                      </a:solidFill>
-                      <a:prstDash val="solid"/>
-                      <a:round/>
-                      <a:headEnd type="none" w="med" len="med"/>
-                      <a:tailEnd type="none" w="med" len="med"/>
-                    </a:lnT>
-                    <a:lnB w="6350" cap="flat" cmpd="sng" algn="ctr">
-                      <a:solidFill>
-                        <a:srgbClr val="D1D5DB"/>
+                        <a:srgbClr val="D8D3CB"/>
                       </a:solidFill>
                       <a:prstDash val="solid"/>
                       <a:round/>
@@ -4491,45 +4329,52 @@
                       <a:r>
                         <a:rPr lang="en-US" sz="1100" dirty="0">
                           <a:solidFill>
-                            <a:srgbClr val="374151"/>
+                            <a:srgbClr val="23282E"/>
                           </a:solidFill>
+                          <a:latin typeface="Corbel" pitchFamily="34" charset="0"/>
+                          <a:ea typeface="Corbel" pitchFamily="34" charset="-122"/>
+                          <a:cs typeface="Corbel" pitchFamily="34" charset="-120"/>
                         </a:rPr>
-                        <a:t>Factor loadings</a:t>
+                        <a:t>Cohen's kappa</a:t>
                       </a:r>
-                      <a:endParaRPr lang="en-US" sz="1100" dirty="0"/>
+                      <a:endParaRPr lang="en-US" sz="1100" dirty="0">
+                        <a:latin typeface="Corbel" charset="0"/>
+                        <a:ea typeface="Corbel" charset="0"/>
+                        <a:cs typeface="Corbel" charset="0"/>
+                      </a:endParaRPr>
                     </a:p>
                   </a:txBody>
-                  <a:tcPr marL="91440" marR="91440" marT="45720" marB="45720" anchor="t">
-                    <a:lnL w="6350" cap="flat" cmpd="sng" algn="ctr">
+                  <a:tcPr marL="76200" marR="76200" marT="76200" marB="76200" anchor="t">
+                    <a:lnL w="5080" cap="flat" cmpd="sng" algn="ctr">
                       <a:solidFill>
-                        <a:srgbClr val="D1D5DB"/>
+                        <a:srgbClr val="D8D3CB"/>
                       </a:solidFill>
                       <a:prstDash val="solid"/>
                       <a:round/>
                       <a:headEnd type="none" w="med" len="med"/>
                       <a:tailEnd type="none" w="med" len="med"/>
                     </a:lnL>
-                    <a:lnR w="6350" cap="flat" cmpd="sng" algn="ctr">
+                    <a:lnR w="5080" cap="flat" cmpd="sng" algn="ctr">
                       <a:solidFill>
-                        <a:srgbClr val="D1D5DB"/>
+                        <a:srgbClr val="D8D3CB"/>
                       </a:solidFill>
                       <a:prstDash val="solid"/>
                       <a:round/>
                       <a:headEnd type="none" w="med" len="med"/>
                       <a:tailEnd type="none" w="med" len="med"/>
                     </a:lnR>
-                    <a:lnT w="6350" cap="flat" cmpd="sng" algn="ctr">
+                    <a:lnT w="5080" cap="flat" cmpd="sng" algn="ctr">
                       <a:solidFill>
-                        <a:srgbClr val="D1D5DB"/>
+                        <a:srgbClr val="D8D3CB"/>
                       </a:solidFill>
                       <a:prstDash val="solid"/>
                       <a:round/>
                       <a:headEnd type="none" w="med" len="med"/>
                       <a:tailEnd type="none" w="med" len="med"/>
                     </a:lnT>
-                    <a:lnB w="6350" cap="flat" cmpd="sng" algn="ctr">
+                    <a:lnB w="5080" cap="flat" cmpd="sng" algn="ctr">
                       <a:solidFill>
-                        <a:srgbClr val="D1D5DB"/>
+                        <a:srgbClr val="D8D3CB"/>
                       </a:solidFill>
                       <a:prstDash val="solid"/>
                       <a:round/>
@@ -4552,45 +4397,464 @@
                       <a:r>
                         <a:rPr lang="en-US" sz="1100" dirty="0">
                           <a:solidFill>
-                            <a:srgbClr val="374151"/>
+                            <a:srgbClr val="23282E"/>
                           </a:solidFill>
+                          <a:latin typeface="Corbel" pitchFamily="34" charset="0"/>
+                          <a:ea typeface="Corbel" pitchFamily="34" charset="-122"/>
+                          <a:cs typeface="Corbel" pitchFamily="34" charset="-120"/>
                         </a:rPr>
-                        <a:t>≥ 0.40</a:t>
+                        <a:t>≥ 0.60 substantial</a:t>
                       </a:r>
-                      <a:endParaRPr lang="en-US" sz="1100" dirty="0"/>
+                      <a:endParaRPr lang="en-US" sz="1100" dirty="0">
+                        <a:latin typeface="Corbel" charset="0"/>
+                        <a:ea typeface="Corbel" charset="0"/>
+                        <a:cs typeface="Corbel" charset="0"/>
+                      </a:endParaRPr>
                     </a:p>
                   </a:txBody>
-                  <a:tcPr marL="91440" marR="91440" marT="45720" marB="45720" anchor="t">
-                    <a:lnL w="6350" cap="flat" cmpd="sng" algn="ctr">
+                  <a:tcPr marL="76200" marR="76200" marT="76200" marB="76200" anchor="t">
+                    <a:lnL w="5080" cap="flat" cmpd="sng" algn="ctr">
                       <a:solidFill>
-                        <a:srgbClr val="D1D5DB"/>
+                        <a:srgbClr val="D8D3CB"/>
                       </a:solidFill>
                       <a:prstDash val="solid"/>
                       <a:round/>
                       <a:headEnd type="none" w="med" len="med"/>
                       <a:tailEnd type="none" w="med" len="med"/>
                     </a:lnL>
-                    <a:lnR w="6350" cap="flat" cmpd="sng" algn="ctr">
+                    <a:lnR w="5080" cap="flat" cmpd="sng" algn="ctr">
                       <a:solidFill>
-                        <a:srgbClr val="D1D5DB"/>
+                        <a:srgbClr val="D8D3CB"/>
                       </a:solidFill>
                       <a:prstDash val="solid"/>
                       <a:round/>
                       <a:headEnd type="none" w="med" len="med"/>
                       <a:tailEnd type="none" w="med" len="med"/>
                     </a:lnR>
-                    <a:lnT w="6350" cap="flat" cmpd="sng" algn="ctr">
+                    <a:lnT w="5080" cap="flat" cmpd="sng" algn="ctr">
                       <a:solidFill>
-                        <a:srgbClr val="D1D5DB"/>
+                        <a:srgbClr val="D8D3CB"/>
                       </a:solidFill>
                       <a:prstDash val="solid"/>
                       <a:round/>
                       <a:headEnd type="none" w="med" len="med"/>
                       <a:tailEnd type="none" w="med" len="med"/>
                     </a:lnT>
-                    <a:lnB w="6350" cap="flat" cmpd="sng" algn="ctr">
+                    <a:lnB w="5080" cap="flat" cmpd="sng" algn="ctr">
                       <a:solidFill>
-                        <a:srgbClr val="D1D5DB"/>
+                        <a:srgbClr val="D8D3CB"/>
+                      </a:solidFill>
+                      <a:prstDash val="solid"/>
+                      <a:round/>
+                      <a:headEnd type="none" w="med" len="med"/>
+                      <a:tailEnd type="none" w="med" len="med"/>
+                    </a:lnB>
+                    <a:solidFill>
+                      <a:srgbClr val="FFFFFF"/>
+                    </a:solidFill>
+                  </a:tcPr>
+                </a:tc>
+              </a:tr>
+              <a:tr h="0">
+                <a:tc>
+                  <a:txBody>
+                    <a:bodyPr/>
+                    <a:lstStyle/>
+                    <a:p>
+                      <a:pPr indent="0" marL="0">
+                        <a:buNone/>
+                      </a:pPr>
+                      <a:r>
+                        <a:rPr lang="en-US" sz="1100" dirty="0">
+                          <a:solidFill>
+                            <a:srgbClr val="23282E"/>
+                          </a:solidFill>
+                          <a:latin typeface="Corbel" pitchFamily="34" charset="0"/>
+                          <a:ea typeface="Corbel" pitchFamily="34" charset="-122"/>
+                          <a:cs typeface="Corbel" pitchFamily="34" charset="-120"/>
+                        </a:rPr>
+                        <a:t>Content validity</a:t>
+                      </a:r>
+                      <a:endParaRPr lang="en-US" sz="1100" dirty="0">
+                        <a:latin typeface="Corbel" charset="0"/>
+                        <a:ea typeface="Corbel" charset="0"/>
+                        <a:cs typeface="Corbel" charset="0"/>
+                      </a:endParaRPr>
+                    </a:p>
+                  </a:txBody>
+                  <a:tcPr marL="76200" marR="76200" marT="76200" marB="76200" anchor="t">
+                    <a:lnL w="5080" cap="flat" cmpd="sng" algn="ctr">
+                      <a:solidFill>
+                        <a:srgbClr val="D8D3CB"/>
+                      </a:solidFill>
+                      <a:prstDash val="solid"/>
+                      <a:round/>
+                      <a:headEnd type="none" w="med" len="med"/>
+                      <a:tailEnd type="none" w="med" len="med"/>
+                    </a:lnL>
+                    <a:lnR w="5080" cap="flat" cmpd="sng" algn="ctr">
+                      <a:solidFill>
+                        <a:srgbClr val="D8D3CB"/>
+                      </a:solidFill>
+                      <a:prstDash val="solid"/>
+                      <a:round/>
+                      <a:headEnd type="none" w="med" len="med"/>
+                      <a:tailEnd type="none" w="med" len="med"/>
+                    </a:lnR>
+                    <a:lnT w="5080" cap="flat" cmpd="sng" algn="ctr">
+                      <a:solidFill>
+                        <a:srgbClr val="D8D3CB"/>
+                      </a:solidFill>
+                      <a:prstDash val="solid"/>
+                      <a:round/>
+                      <a:headEnd type="none" w="med" len="med"/>
+                      <a:tailEnd type="none" w="med" len="med"/>
+                    </a:lnT>
+                    <a:lnB w="5080" cap="flat" cmpd="sng" algn="ctr">
+                      <a:solidFill>
+                        <a:srgbClr val="D8D3CB"/>
+                      </a:solidFill>
+                      <a:prstDash val="solid"/>
+                      <a:round/>
+                      <a:headEnd type="none" w="med" len="med"/>
+                      <a:tailEnd type="none" w="med" len="med"/>
+                    </a:lnB>
+                    <a:solidFill>
+                      <a:srgbClr val="FFFFFF"/>
+                    </a:solidFill>
+                  </a:tcPr>
+                </a:tc>
+                <a:tc>
+                  <a:txBody>
+                    <a:bodyPr/>
+                    <a:lstStyle/>
+                    <a:p>
+                      <a:pPr indent="0" marL="0">
+                        <a:buNone/>
+                      </a:pPr>
+                      <a:r>
+                        <a:rPr lang="en-US" sz="1100" dirty="0">
+                          <a:solidFill>
+                            <a:srgbClr val="23282E"/>
+                          </a:solidFill>
+                          <a:latin typeface="Corbel" pitchFamily="34" charset="0"/>
+                          <a:ea typeface="Corbel" pitchFamily="34" charset="-122"/>
+                          <a:cs typeface="Corbel" pitchFamily="34" charset="-120"/>
+                        </a:rPr>
+                        <a:t>CVI</a:t>
+                      </a:r>
+                      <a:endParaRPr lang="en-US" sz="1100" dirty="0">
+                        <a:latin typeface="Corbel" charset="0"/>
+                        <a:ea typeface="Corbel" charset="0"/>
+                        <a:cs typeface="Corbel" charset="0"/>
+                      </a:endParaRPr>
+                    </a:p>
+                  </a:txBody>
+                  <a:tcPr marL="76200" marR="76200" marT="76200" marB="76200" anchor="t">
+                    <a:lnL w="5080" cap="flat" cmpd="sng" algn="ctr">
+                      <a:solidFill>
+                        <a:srgbClr val="D8D3CB"/>
+                      </a:solidFill>
+                      <a:prstDash val="solid"/>
+                      <a:round/>
+                      <a:headEnd type="none" w="med" len="med"/>
+                      <a:tailEnd type="none" w="med" len="med"/>
+                    </a:lnL>
+                    <a:lnR w="5080" cap="flat" cmpd="sng" algn="ctr">
+                      <a:solidFill>
+                        <a:srgbClr val="D8D3CB"/>
+                      </a:solidFill>
+                      <a:prstDash val="solid"/>
+                      <a:round/>
+                      <a:headEnd type="none" w="med" len="med"/>
+                      <a:tailEnd type="none" w="med" len="med"/>
+                    </a:lnR>
+                    <a:lnT w="5080" cap="flat" cmpd="sng" algn="ctr">
+                      <a:solidFill>
+                        <a:srgbClr val="D8D3CB"/>
+                      </a:solidFill>
+                      <a:prstDash val="solid"/>
+                      <a:round/>
+                      <a:headEnd type="none" w="med" len="med"/>
+                      <a:tailEnd type="none" w="med" len="med"/>
+                    </a:lnT>
+                    <a:lnB w="5080" cap="flat" cmpd="sng" algn="ctr">
+                      <a:solidFill>
+                        <a:srgbClr val="D8D3CB"/>
+                      </a:solidFill>
+                      <a:prstDash val="solid"/>
+                      <a:round/>
+                      <a:headEnd type="none" w="med" len="med"/>
+                      <a:tailEnd type="none" w="med" len="med"/>
+                    </a:lnB>
+                    <a:solidFill>
+                      <a:srgbClr val="FFFFFF"/>
+                    </a:solidFill>
+                  </a:tcPr>
+                </a:tc>
+                <a:tc>
+                  <a:txBody>
+                    <a:bodyPr/>
+                    <a:lstStyle/>
+                    <a:p>
+                      <a:pPr indent="0" marL="0">
+                        <a:buNone/>
+                      </a:pPr>
+                      <a:r>
+                        <a:rPr lang="en-US" sz="1100" dirty="0">
+                          <a:solidFill>
+                            <a:srgbClr val="23282E"/>
+                          </a:solidFill>
+                          <a:latin typeface="Corbel" pitchFamily="34" charset="0"/>
+                          <a:ea typeface="Corbel" pitchFamily="34" charset="-122"/>
+                          <a:cs typeface="Corbel" pitchFamily="34" charset="-120"/>
+                        </a:rPr>
+                        <a:t>≥ 0.78 per item</a:t>
+                      </a:r>
+                      <a:endParaRPr lang="en-US" sz="1100" dirty="0">
+                        <a:latin typeface="Corbel" charset="0"/>
+                        <a:ea typeface="Corbel" charset="0"/>
+                        <a:cs typeface="Corbel" charset="0"/>
+                      </a:endParaRPr>
+                    </a:p>
+                  </a:txBody>
+                  <a:tcPr marL="76200" marR="76200" marT="76200" marB="76200" anchor="t">
+                    <a:lnL w="5080" cap="flat" cmpd="sng" algn="ctr">
+                      <a:solidFill>
+                        <a:srgbClr val="D8D3CB"/>
+                      </a:solidFill>
+                      <a:prstDash val="solid"/>
+                      <a:round/>
+                      <a:headEnd type="none" w="med" len="med"/>
+                      <a:tailEnd type="none" w="med" len="med"/>
+                    </a:lnL>
+                    <a:lnR w="5080" cap="flat" cmpd="sng" algn="ctr">
+                      <a:solidFill>
+                        <a:srgbClr val="D8D3CB"/>
+                      </a:solidFill>
+                      <a:prstDash val="solid"/>
+                      <a:round/>
+                      <a:headEnd type="none" w="med" len="med"/>
+                      <a:tailEnd type="none" w="med" len="med"/>
+                    </a:lnR>
+                    <a:lnT w="5080" cap="flat" cmpd="sng" algn="ctr">
+                      <a:solidFill>
+                        <a:srgbClr val="D8D3CB"/>
+                      </a:solidFill>
+                      <a:prstDash val="solid"/>
+                      <a:round/>
+                      <a:headEnd type="none" w="med" len="med"/>
+                      <a:tailEnd type="none" w="med" len="med"/>
+                    </a:lnT>
+                    <a:lnB w="5080" cap="flat" cmpd="sng" algn="ctr">
+                      <a:solidFill>
+                        <a:srgbClr val="D8D3CB"/>
+                      </a:solidFill>
+                      <a:prstDash val="solid"/>
+                      <a:round/>
+                      <a:headEnd type="none" w="med" len="med"/>
+                      <a:tailEnd type="none" w="med" len="med"/>
+                    </a:lnB>
+                    <a:solidFill>
+                      <a:srgbClr val="FFFFFF"/>
+                    </a:solidFill>
+                  </a:tcPr>
+                </a:tc>
+              </a:tr>
+              <a:tr h="0">
+                <a:tc>
+                  <a:txBody>
+                    <a:bodyPr/>
+                    <a:lstStyle/>
+                    <a:p>
+                      <a:pPr indent="0" marL="0">
+                        <a:buNone/>
+                      </a:pPr>
+                      <a:r>
+                        <a:rPr lang="en-US" sz="1100" dirty="0">
+                          <a:solidFill>
+                            <a:srgbClr val="23282E"/>
+                          </a:solidFill>
+                          <a:latin typeface="Corbel" pitchFamily="34" charset="0"/>
+                          <a:ea typeface="Corbel" pitchFamily="34" charset="-122"/>
+                          <a:cs typeface="Corbel" pitchFamily="34" charset="-120"/>
+                        </a:rPr>
+                        <a:t>Construct validity</a:t>
+                      </a:r>
+                      <a:endParaRPr lang="en-US" sz="1100" dirty="0">
+                        <a:latin typeface="Corbel" charset="0"/>
+                        <a:ea typeface="Corbel" charset="0"/>
+                        <a:cs typeface="Corbel" charset="0"/>
+                      </a:endParaRPr>
+                    </a:p>
+                  </a:txBody>
+                  <a:tcPr marL="76200" marR="76200" marT="76200" marB="76200" anchor="t">
+                    <a:lnL w="5080" cap="flat" cmpd="sng" algn="ctr">
+                      <a:solidFill>
+                        <a:srgbClr val="D8D3CB"/>
+                      </a:solidFill>
+                      <a:prstDash val="solid"/>
+                      <a:round/>
+                      <a:headEnd type="none" w="med" len="med"/>
+                      <a:tailEnd type="none" w="med" len="med"/>
+                    </a:lnL>
+                    <a:lnR w="5080" cap="flat" cmpd="sng" algn="ctr">
+                      <a:solidFill>
+                        <a:srgbClr val="D8D3CB"/>
+                      </a:solidFill>
+                      <a:prstDash val="solid"/>
+                      <a:round/>
+                      <a:headEnd type="none" w="med" len="med"/>
+                      <a:tailEnd type="none" w="med" len="med"/>
+                    </a:lnR>
+                    <a:lnT w="5080" cap="flat" cmpd="sng" algn="ctr">
+                      <a:solidFill>
+                        <a:srgbClr val="D8D3CB"/>
+                      </a:solidFill>
+                      <a:prstDash val="solid"/>
+                      <a:round/>
+                      <a:headEnd type="none" w="med" len="med"/>
+                      <a:tailEnd type="none" w="med" len="med"/>
+                    </a:lnT>
+                    <a:lnB w="5080" cap="flat" cmpd="sng" algn="ctr">
+                      <a:solidFill>
+                        <a:srgbClr val="D8D3CB"/>
+                      </a:solidFill>
+                      <a:prstDash val="solid"/>
+                      <a:round/>
+                      <a:headEnd type="none" w="med" len="med"/>
+                      <a:tailEnd type="none" w="med" len="med"/>
+                    </a:lnB>
+                    <a:solidFill>
+                      <a:srgbClr val="FFFFFF"/>
+                    </a:solidFill>
+                  </a:tcPr>
+                </a:tc>
+                <a:tc>
+                  <a:txBody>
+                    <a:bodyPr/>
+                    <a:lstStyle/>
+                    <a:p>
+                      <a:pPr indent="0" marL="0">
+                        <a:buNone/>
+                      </a:pPr>
+                      <a:r>
+                        <a:rPr lang="en-US" sz="1100" dirty="0">
+                          <a:solidFill>
+                            <a:srgbClr val="23282E"/>
+                          </a:solidFill>
+                          <a:latin typeface="Corbel" pitchFamily="34" charset="0"/>
+                          <a:ea typeface="Corbel" pitchFamily="34" charset="-122"/>
+                          <a:cs typeface="Corbel" pitchFamily="34" charset="-120"/>
+                        </a:rPr>
+                        <a:t>Factor loadings</a:t>
+                      </a:r>
+                      <a:endParaRPr lang="en-US" sz="1100" dirty="0">
+                        <a:latin typeface="Corbel" charset="0"/>
+                        <a:ea typeface="Corbel" charset="0"/>
+                        <a:cs typeface="Corbel" charset="0"/>
+                      </a:endParaRPr>
+                    </a:p>
+                  </a:txBody>
+                  <a:tcPr marL="76200" marR="76200" marT="76200" marB="76200" anchor="t">
+                    <a:lnL w="5080" cap="flat" cmpd="sng" algn="ctr">
+                      <a:solidFill>
+                        <a:srgbClr val="D8D3CB"/>
+                      </a:solidFill>
+                      <a:prstDash val="solid"/>
+                      <a:round/>
+                      <a:headEnd type="none" w="med" len="med"/>
+                      <a:tailEnd type="none" w="med" len="med"/>
+                    </a:lnL>
+                    <a:lnR w="5080" cap="flat" cmpd="sng" algn="ctr">
+                      <a:solidFill>
+                        <a:srgbClr val="D8D3CB"/>
+                      </a:solidFill>
+                      <a:prstDash val="solid"/>
+                      <a:round/>
+                      <a:headEnd type="none" w="med" len="med"/>
+                      <a:tailEnd type="none" w="med" len="med"/>
+                    </a:lnR>
+                    <a:lnT w="5080" cap="flat" cmpd="sng" algn="ctr">
+                      <a:solidFill>
+                        <a:srgbClr val="D8D3CB"/>
+                      </a:solidFill>
+                      <a:prstDash val="solid"/>
+                      <a:round/>
+                      <a:headEnd type="none" w="med" len="med"/>
+                      <a:tailEnd type="none" w="med" len="med"/>
+                    </a:lnT>
+                    <a:lnB w="5080" cap="flat" cmpd="sng" algn="ctr">
+                      <a:solidFill>
+                        <a:srgbClr val="D8D3CB"/>
+                      </a:solidFill>
+                      <a:prstDash val="solid"/>
+                      <a:round/>
+                      <a:headEnd type="none" w="med" len="med"/>
+                      <a:tailEnd type="none" w="med" len="med"/>
+                    </a:lnB>
+                    <a:solidFill>
+                      <a:srgbClr val="FFFFFF"/>
+                    </a:solidFill>
+                  </a:tcPr>
+                </a:tc>
+                <a:tc>
+                  <a:txBody>
+                    <a:bodyPr/>
+                    <a:lstStyle/>
+                    <a:p>
+                      <a:pPr indent="0" marL="0">
+                        <a:buNone/>
+                      </a:pPr>
+                      <a:r>
+                        <a:rPr lang="en-US" sz="1100" dirty="0">
+                          <a:solidFill>
+                            <a:srgbClr val="23282E"/>
+                          </a:solidFill>
+                          <a:latin typeface="Corbel" pitchFamily="34" charset="0"/>
+                          <a:ea typeface="Corbel" pitchFamily="34" charset="-122"/>
+                          <a:cs typeface="Corbel" pitchFamily="34" charset="-120"/>
+                        </a:rPr>
+                        <a:t>≥ 0.40</a:t>
+                      </a:r>
+                      <a:endParaRPr lang="en-US" sz="1100" dirty="0">
+                        <a:latin typeface="Corbel" charset="0"/>
+                        <a:ea typeface="Corbel" charset="0"/>
+                        <a:cs typeface="Corbel" charset="0"/>
+                      </a:endParaRPr>
+                    </a:p>
+                  </a:txBody>
+                  <a:tcPr marL="76200" marR="76200" marT="76200" marB="76200" anchor="t">
+                    <a:lnL w="5080" cap="flat" cmpd="sng" algn="ctr">
+                      <a:solidFill>
+                        <a:srgbClr val="D8D3CB"/>
+                      </a:solidFill>
+                      <a:prstDash val="solid"/>
+                      <a:round/>
+                      <a:headEnd type="none" w="med" len="med"/>
+                      <a:tailEnd type="none" w="med" len="med"/>
+                    </a:lnL>
+                    <a:lnR w="5080" cap="flat" cmpd="sng" algn="ctr">
+                      <a:solidFill>
+                        <a:srgbClr val="D8D3CB"/>
+                      </a:solidFill>
+                      <a:prstDash val="solid"/>
+                      <a:round/>
+                      <a:headEnd type="none" w="med" len="med"/>
+                      <a:tailEnd type="none" w="med" len="med"/>
+                    </a:lnR>
+                    <a:lnT w="5080" cap="flat" cmpd="sng" algn="ctr">
+                      <a:solidFill>
+                        <a:srgbClr val="D8D3CB"/>
+                      </a:solidFill>
+                      <a:prstDash val="solid"/>
+                      <a:round/>
+                      <a:headEnd type="none" w="med" len="med"/>
+                      <a:tailEnd type="none" w="med" len="med"/>
+                    </a:lnT>
+                    <a:lnB w="5080" cap="flat" cmpd="sng" algn="ctr">
+                      <a:solidFill>
+                        <a:srgbClr val="D8D3CB"/>
                       </a:solidFill>
                       <a:prstDash val="solid"/>
                       <a:round/>
@@ -4619,8 +4883,8 @@
         </p:nvSpPr>
         <p:spPr>
           <a:xfrm>
-            <a:off x="8503920" y="4709160"/>
-            <a:ext cx="800000" cy="300000"/>
+            <a:off x="566928" y="4700016"/>
+            <a:ext cx="914400" cy="274320"/>
           </a:xfrm>
           <a:prstGeom prst="rect">
             <a:avLst/>
@@ -4635,10 +4899,13 @@
           <a:bodyPr/>
           <a:lstStyle>
             <a:lvl1pPr>
-              <a:defRPr sz="1000">
-                <a:solidFill>
-                  <a:srgbClr val="6B7280"/>
-                </a:solidFill>
+              <a:defRPr sz="900">
+                <a:solidFill>
+                  <a:srgbClr val="5F6B76"/>
+                </a:solidFill>
+                <a:latin typeface="Corbel"/>
+                <a:ea typeface="Corbel"/>
+                <a:cs typeface="Corbel"/>
               </a:defRPr>
             </a:lvl1pPr>
           </a:lstStyle>
@@ -4685,8 +4952,8 @@
         </p:nvSpPr>
         <p:spPr>
           <a:xfrm>
-            <a:off x="502920" y="292608"/>
-            <a:ext cx="8046720" cy="228600"/>
+            <a:off x="566928" y="384048"/>
+            <a:ext cx="7772400" cy="237744"/>
           </a:xfrm>
           <a:prstGeom prst="rect">
             <a:avLst/>
@@ -4702,14 +4969,17 @@
               <a:buNone/>
             </a:pPr>
             <a:r>
-              <a:rPr lang="en-US" sz="1100" b="1" spc="150" kern="0" dirty="0">
-                <a:solidFill>
-                  <a:srgbClr val="0066CC"/>
-                </a:solidFill>
+              <a:rPr lang="en-US" sz="1000" spc="200" kern="0" dirty="0">
+                <a:solidFill>
+                  <a:srgbClr val="9A6A3C"/>
+                </a:solidFill>
+                <a:latin typeface="Corbel" pitchFamily="34" charset="0"/>
+                <a:ea typeface="Corbel" pitchFamily="34" charset="-122"/>
+                <a:cs typeface="Corbel" pitchFamily="34" charset="-120"/>
               </a:rPr>
               <a:t>UNIT 8</a:t>
             </a:r>
-            <a:endParaRPr lang="en-US" sz="1100" dirty="0"/>
+            <a:endParaRPr lang="en-US" sz="1000" dirty="0"/>
           </a:p>
         </p:txBody>
       </p:sp>
@@ -4721,8 +4991,8 @@
         </p:nvSpPr>
         <p:spPr>
           <a:xfrm>
-            <a:off x="502920" y="548640"/>
-            <a:ext cx="8046720" cy="640080"/>
+            <a:off x="566928" y="658368"/>
+            <a:ext cx="7772400" cy="658368"/>
           </a:xfrm>
           <a:prstGeom prst="rect">
             <a:avLst/>
@@ -4735,30 +5005,56 @@
           <a:lstStyle/>
           <a:p>
             <a:pPr indent="0" marL="0">
+              <a:lnSpc>
+                <a:spcPct val="100000"/>
+              </a:lnSpc>
               <a:buNone/>
             </a:pPr>
             <a:r>
-              <a:rPr lang="en-US" sz="2400" b="1" dirty="0">
-                <a:solidFill>
-                  <a:srgbClr val="111827"/>
-                </a:solidFill>
+              <a:rPr lang="en-US" sz="2500" dirty="0">
+                <a:solidFill>
+                  <a:srgbClr val="1C3140"/>
+                </a:solidFill>
+                <a:latin typeface="Constantia" pitchFamily="34" charset="0"/>
+                <a:ea typeface="Constantia" pitchFamily="34" charset="-122"/>
+                <a:cs typeface="Constantia" pitchFamily="34" charset="-120"/>
               </a:rPr>
               <a:t>Piloting and data capture (1/2)</a:t>
             </a:r>
-            <a:endParaRPr lang="en-US" sz="2400" dirty="0"/>
-          </a:p>
-        </p:txBody>
-      </p:sp>
-      <p:sp>
-        <p:nvSpPr>
-          <p:cNvPr id="4" name="Text 2"/>
+            <a:endParaRPr lang="en-US" sz="2500" dirty="0"/>
+          </a:p>
+        </p:txBody>
+      </p:sp>
+      <p:sp>
+        <p:nvSpPr>
+          <p:cNvPr id="4" name="Shape 2"/>
           <p:cNvSpPr/>
           <p:nvPr/>
         </p:nvSpPr>
         <p:spPr>
           <a:xfrm>
-            <a:off x="685800" y="1325880"/>
-            <a:ext cx="7772400" cy="3200400"/>
+            <a:off x="566928" y="1335024"/>
+            <a:ext cx="566928" cy="20117"/>
+          </a:xfrm>
+          <a:prstGeom prst="rect">
+            <a:avLst/>
+          </a:prstGeom>
+          <a:solidFill>
+            <a:srgbClr val="9A6A3C"/>
+          </a:solidFill>
+          <a:ln/>
+        </p:spPr>
+      </p:sp>
+      <p:sp>
+        <p:nvSpPr>
+          <p:cNvPr id="5" name="Text 3"/>
+          <p:cNvSpPr/>
+          <p:nvPr/>
+        </p:nvSpPr>
+        <p:spPr>
+          <a:xfrm>
+            <a:off x="713232" y="1664208"/>
+            <a:ext cx="7498080" cy="2788920"/>
           </a:xfrm>
           <a:prstGeom prst="rect">
             <a:avLst/>
@@ -4772,19 +5068,22 @@
           <a:p>
             <a:pPr marL="342900" indent="-342900">
               <a:lnSpc>
-                <a:spcPct val="125000"/>
+                <a:spcPct val="130000"/>
               </a:lnSpc>
               <a:spcAft>
-                <a:spcPts val="800"/>
+                <a:spcPts val="1100"/>
               </a:spcAft>
               <a:buSzPct val="100000"/>
-              <a:buChar char="•"/>
+              <a:buChar char="–"/>
             </a:pPr>
             <a:r>
               <a:rPr lang="en-US" sz="1500" dirty="0">
                 <a:solidFill>
-                  <a:srgbClr val="374151"/>
-                </a:solidFill>
+                  <a:srgbClr val="23282E"/>
+                </a:solidFill>
+                <a:latin typeface="Corbel" pitchFamily="34" charset="0"/>
+                <a:ea typeface="Corbel" pitchFamily="34" charset="-122"/>
+                <a:cs typeface="Corbel" pitchFamily="34" charset="-120"/>
               </a:rPr>
               <a:t>Pilot on 10% of the intended sample, or at least 20-30 respondents, drawn from the same population but excluded from the main study</a:t>
             </a:r>
@@ -4793,19 +5092,22 @@
           <a:p>
             <a:pPr marL="342900" indent="-342900">
               <a:lnSpc>
-                <a:spcPct val="125000"/>
+                <a:spcPct val="130000"/>
               </a:lnSpc>
               <a:spcAft>
-                <a:spcPts val="800"/>
+                <a:spcPts val="1100"/>
               </a:spcAft>
               <a:buSzPct val="100000"/>
-              <a:buChar char="•"/>
+              <a:buChar char="–"/>
             </a:pPr>
             <a:r>
               <a:rPr lang="en-US" sz="1500" dirty="0">
                 <a:solidFill>
-                  <a:srgbClr val="374151"/>
-                </a:solidFill>
+                  <a:srgbClr val="23282E"/>
+                </a:solidFill>
+                <a:latin typeface="Corbel" pitchFamily="34" charset="0"/>
+                <a:ea typeface="Corbel" pitchFamily="34" charset="-122"/>
+                <a:cs typeface="Corbel" pitchFamily="34" charset="-120"/>
               </a:rPr>
               <a:t>The pilot tests comprehension, timing, flow, skip logic, coding and the analysis plan — run your intended analysis on pilot data</a:t>
             </a:r>
@@ -4814,19 +5116,22 @@
           <a:p>
             <a:pPr marL="342900" indent="-342900">
               <a:lnSpc>
-                <a:spcPct val="125000"/>
+                <a:spcPct val="130000"/>
               </a:lnSpc>
               <a:spcAft>
-                <a:spcPts val="800"/>
+                <a:spcPts val="1100"/>
               </a:spcAft>
               <a:buSzPct val="100000"/>
-              <a:buChar char="•"/>
+              <a:buChar char="–"/>
             </a:pPr>
             <a:r>
               <a:rPr lang="en-US" sz="1500" dirty="0">
                 <a:solidFill>
-                  <a:srgbClr val="374151"/>
-                </a:solidFill>
+                  <a:srgbClr val="23282E"/>
+                </a:solidFill>
+                <a:latin typeface="Corbel" pitchFamily="34" charset="0"/>
+                <a:ea typeface="Corbel" pitchFamily="34" charset="-122"/>
+                <a:cs typeface="Corbel" pitchFamily="34" charset="-120"/>
               </a:rPr>
               <a:t>Electronic capture (KoBoToolbox, REDCap, ODK, CommCare) enforces ranges and skip logic at the point of entry and removes a transcription step</a:t>
             </a:r>
@@ -4846,8 +5151,8 @@
         </p:nvSpPr>
         <p:spPr>
           <a:xfrm>
-            <a:off x="8503920" y="4709160"/>
-            <a:ext cx="800000" cy="300000"/>
+            <a:off x="566928" y="4700016"/>
+            <a:ext cx="914400" cy="274320"/>
           </a:xfrm>
           <a:prstGeom prst="rect">
             <a:avLst/>
@@ -4862,10 +5167,13 @@
           <a:bodyPr/>
           <a:lstStyle>
             <a:lvl1pPr>
-              <a:defRPr sz="1000">
-                <a:solidFill>
-                  <a:srgbClr val="6B7280"/>
-                </a:solidFill>
+              <a:defRPr sz="900">
+                <a:solidFill>
+                  <a:srgbClr val="5F6B76"/>
+                </a:solidFill>
+                <a:latin typeface="Corbel"/>
+                <a:ea typeface="Corbel"/>
+                <a:cs typeface="Corbel"/>
               </a:defRPr>
             </a:lvl1pPr>
           </a:lstStyle>
@@ -4912,8 +5220,8 @@
         </p:nvSpPr>
         <p:spPr>
           <a:xfrm>
-            <a:off x="502920" y="292608"/>
-            <a:ext cx="8046720" cy="228600"/>
+            <a:off x="566928" y="384048"/>
+            <a:ext cx="7772400" cy="237744"/>
           </a:xfrm>
           <a:prstGeom prst="rect">
             <a:avLst/>
@@ -4929,14 +5237,17 @@
               <a:buNone/>
             </a:pPr>
             <a:r>
-              <a:rPr lang="en-US" sz="1100" b="1" spc="150" kern="0" dirty="0">
-                <a:solidFill>
-                  <a:srgbClr val="0066CC"/>
-                </a:solidFill>
+              <a:rPr lang="en-US" sz="1000" spc="200" kern="0" dirty="0">
+                <a:solidFill>
+                  <a:srgbClr val="9A6A3C"/>
+                </a:solidFill>
+                <a:latin typeface="Corbel" pitchFamily="34" charset="0"/>
+                <a:ea typeface="Corbel" pitchFamily="34" charset="-122"/>
+                <a:cs typeface="Corbel" pitchFamily="34" charset="-120"/>
               </a:rPr>
               <a:t>UNIT 8</a:t>
             </a:r>
-            <a:endParaRPr lang="en-US" sz="1100" dirty="0"/>
+            <a:endParaRPr lang="en-US" sz="1000" dirty="0"/>
           </a:p>
         </p:txBody>
       </p:sp>
@@ -4948,8 +5259,8 @@
         </p:nvSpPr>
         <p:spPr>
           <a:xfrm>
-            <a:off x="502920" y="548640"/>
-            <a:ext cx="8046720" cy="640080"/>
+            <a:off x="566928" y="658368"/>
+            <a:ext cx="7772400" cy="658368"/>
           </a:xfrm>
           <a:prstGeom prst="rect">
             <a:avLst/>
@@ -4962,30 +5273,56 @@
           <a:lstStyle/>
           <a:p>
             <a:pPr indent="0" marL="0">
+              <a:lnSpc>
+                <a:spcPct val="100000"/>
+              </a:lnSpc>
               <a:buNone/>
             </a:pPr>
             <a:r>
-              <a:rPr lang="en-US" sz="2400" b="1" dirty="0">
-                <a:solidFill>
-                  <a:srgbClr val="111827"/>
-                </a:solidFill>
+              <a:rPr lang="en-US" sz="2500" dirty="0">
+                <a:solidFill>
+                  <a:srgbClr val="1C3140"/>
+                </a:solidFill>
+                <a:latin typeface="Constantia" pitchFamily="34" charset="0"/>
+                <a:ea typeface="Constantia" pitchFamily="34" charset="-122"/>
+                <a:cs typeface="Constantia" pitchFamily="34" charset="-120"/>
               </a:rPr>
               <a:t>Piloting and data capture (2/2)</a:t>
             </a:r>
-            <a:endParaRPr lang="en-US" sz="2400" dirty="0"/>
-          </a:p>
-        </p:txBody>
-      </p:sp>
-      <p:sp>
-        <p:nvSpPr>
-          <p:cNvPr id="4" name="Text 2"/>
+            <a:endParaRPr lang="en-US" sz="2500" dirty="0"/>
+          </a:p>
+        </p:txBody>
+      </p:sp>
+      <p:sp>
+        <p:nvSpPr>
+          <p:cNvPr id="4" name="Shape 2"/>
           <p:cNvSpPr/>
           <p:nvPr/>
         </p:nvSpPr>
         <p:spPr>
           <a:xfrm>
-            <a:off x="685800" y="1325880"/>
-            <a:ext cx="7772400" cy="3200400"/>
+            <a:off x="566928" y="1335024"/>
+            <a:ext cx="566928" cy="20117"/>
+          </a:xfrm>
+          <a:prstGeom prst="rect">
+            <a:avLst/>
+          </a:prstGeom>
+          <a:solidFill>
+            <a:srgbClr val="9A6A3C"/>
+          </a:solidFill>
+          <a:ln/>
+        </p:spPr>
+      </p:sp>
+      <p:sp>
+        <p:nvSpPr>
+          <p:cNvPr id="5" name="Text 3"/>
+          <p:cNvSpPr/>
+          <p:nvPr/>
+        </p:nvSpPr>
+        <p:spPr>
+          <a:xfrm>
+            <a:off x="713232" y="1664208"/>
+            <a:ext cx="7498080" cy="2788920"/>
           </a:xfrm>
           <a:prstGeom prst="rect">
             <a:avLst/>
@@ -4999,19 +5336,22 @@
           <a:p>
             <a:pPr marL="342900" indent="-342900">
               <a:lnSpc>
-                <a:spcPct val="125000"/>
+                <a:spcPct val="130000"/>
               </a:lnSpc>
               <a:spcAft>
-                <a:spcPts val="800"/>
+                <a:spcPts val="1100"/>
               </a:spcAft>
               <a:buSzPct val="100000"/>
-              <a:buChar char="•"/>
+              <a:buChar char="–"/>
             </a:pPr>
             <a:r>
               <a:rPr lang="en-US" sz="1500" dirty="0">
                 <a:solidFill>
-                  <a:srgbClr val="374151"/>
-                </a:solidFill>
+                  <a:srgbClr val="23282E"/>
+                </a:solidFill>
+                <a:latin typeface="Corbel" pitchFamily="34" charset="0"/>
+                <a:ea typeface="Corbel" pitchFamily="34" charset="-122"/>
+                <a:cs typeface="Corbel" pitchFamily="34" charset="-120"/>
               </a:rPr>
               <a:t>Paper remains appropriate where power, connectivity or literacy make devices impractical; plan double entry if so</a:t>
             </a:r>
@@ -5020,19 +5360,22 @@
           <a:p>
             <a:pPr marL="342900" indent="-342900">
               <a:lnSpc>
-                <a:spcPct val="125000"/>
+                <a:spcPct val="130000"/>
               </a:lnSpc>
               <a:spcAft>
-                <a:spcPts val="800"/>
+                <a:spcPts val="1100"/>
               </a:spcAft>
               <a:buSzPct val="100000"/>
-              <a:buChar char="•"/>
+              <a:buChar char="–"/>
             </a:pPr>
             <a:r>
               <a:rPr lang="en-US" sz="1500" dirty="0">
                 <a:solidFill>
-                  <a:srgbClr val="374151"/>
-                </a:solidFill>
+                  <a:srgbClr val="23282E"/>
+                </a:solidFill>
+                <a:latin typeface="Corbel" pitchFamily="34" charset="0"/>
+                <a:ea typeface="Corbel" pitchFamily="34" charset="-122"/>
+                <a:cs typeface="Corbel" pitchFamily="34" charset="-120"/>
               </a:rPr>
               <a:t>Build validation rules: allowed ranges, required fields, logical consistency checks between related items</a:t>
             </a:r>
@@ -5041,19 +5384,22 @@
           <a:p>
             <a:pPr marL="342900" indent="-342900">
               <a:lnSpc>
-                <a:spcPct val="125000"/>
+                <a:spcPct val="130000"/>
               </a:lnSpc>
               <a:spcAft>
-                <a:spcPts val="800"/>
+                <a:spcPts val="1100"/>
               </a:spcAft>
               <a:buSzPct val="100000"/>
-              <a:buChar char="•"/>
+              <a:buChar char="–"/>
             </a:pPr>
             <a:r>
               <a:rPr lang="en-US" sz="1500" dirty="0">
                 <a:solidFill>
-                  <a:srgbClr val="374151"/>
-                </a:solidFill>
+                  <a:srgbClr val="23282E"/>
+                </a:solidFill>
+                <a:latin typeface="Corbel" pitchFamily="34" charset="0"/>
+                <a:ea typeface="Corbel" pitchFamily="34" charset="-122"/>
+                <a:cs typeface="Corbel" pitchFamily="34" charset="-120"/>
               </a:rPr>
               <a:t>Train and standardise data collectors, then check inter-rater agreement rather than assuming it</a:t>
             </a:r>
@@ -5062,19 +5408,22 @@
           <a:p>
             <a:pPr marL="342900" indent="-342900">
               <a:lnSpc>
-                <a:spcPct val="125000"/>
+                <a:spcPct val="130000"/>
               </a:lnSpc>
               <a:spcAft>
-                <a:spcPts val="800"/>
+                <a:spcPts val="1100"/>
               </a:spcAft>
               <a:buSzPct val="100000"/>
-              <a:buChar char="•"/>
+              <a:buChar char="–"/>
             </a:pPr>
             <a:r>
               <a:rPr lang="en-US" sz="1500" dirty="0">
                 <a:solidFill>
-                  <a:srgbClr val="374151"/>
-                </a:solidFill>
+                  <a:srgbClr val="23282E"/>
+                </a:solidFill>
+                <a:latin typeface="Corbel" pitchFamily="34" charset="0"/>
+                <a:ea typeface="Corbel" pitchFamily="34" charset="-122"/>
+                <a:cs typeface="Corbel" pitchFamily="34" charset="-120"/>
               </a:rPr>
               <a:t>Anonymise at collection where possible, keeping any identifier link in a separate secured file</a:t>
             </a:r>
@@ -5094,8 +5443,8 @@
         </p:nvSpPr>
         <p:spPr>
           <a:xfrm>
-            <a:off x="8503920" y="4709160"/>
-            <a:ext cx="800000" cy="300000"/>
+            <a:off x="566928" y="4700016"/>
+            <a:ext cx="914400" cy="274320"/>
           </a:xfrm>
           <a:prstGeom prst="rect">
             <a:avLst/>
@@ -5110,10 +5459,13 @@
           <a:bodyPr/>
           <a:lstStyle>
             <a:lvl1pPr>
-              <a:defRPr sz="1000">
-                <a:solidFill>
-                  <a:srgbClr val="6B7280"/>
-                </a:solidFill>
+              <a:defRPr sz="900">
+                <a:solidFill>
+                  <a:srgbClr val="5F6B76"/>
+                </a:solidFill>
+                <a:latin typeface="Corbel"/>
+                <a:ea typeface="Corbel"/>
+                <a:cs typeface="Corbel"/>
               </a:defRPr>
             </a:lvl1pPr>
           </a:lstStyle>
@@ -5160,8 +5512,8 @@
         </p:nvSpPr>
         <p:spPr>
           <a:xfrm>
-            <a:off x="502920" y="292608"/>
-            <a:ext cx="8046720" cy="228600"/>
+            <a:off x="566928" y="384048"/>
+            <a:ext cx="7772400" cy="237744"/>
           </a:xfrm>
           <a:prstGeom prst="rect">
             <a:avLst/>
@@ -5177,14 +5529,17 @@
               <a:buNone/>
             </a:pPr>
             <a:r>
-              <a:rPr lang="en-US" sz="1100" b="1" spc="150" kern="0" dirty="0">
-                <a:solidFill>
-                  <a:srgbClr val="00A86B"/>
-                </a:solidFill>
+              <a:rPr lang="en-US" sz="1000" spc="200" kern="0" dirty="0">
+                <a:solidFill>
+                  <a:srgbClr val="9A6A3C"/>
+                </a:solidFill>
+                <a:latin typeface="Corbel" pitchFamily="34" charset="0"/>
+                <a:ea typeface="Corbel" pitchFamily="34" charset="-122"/>
+                <a:cs typeface="Corbel" pitchFamily="34" charset="-120"/>
               </a:rPr>
               <a:t>UNIT 8  ·  WORKED EXAMPLE</a:t>
             </a:r>
-            <a:endParaRPr lang="en-US" sz="1100" dirty="0"/>
+            <a:endParaRPr lang="en-US" sz="1000" dirty="0"/>
           </a:p>
         </p:txBody>
       </p:sp>
@@ -5196,8 +5551,8 @@
         </p:nvSpPr>
         <p:spPr>
           <a:xfrm>
-            <a:off x="502920" y="548640"/>
-            <a:ext cx="8046720" cy="566928"/>
+            <a:off x="566928" y="658368"/>
+            <a:ext cx="7772400" cy="658368"/>
           </a:xfrm>
           <a:prstGeom prst="rect">
             <a:avLst/>
@@ -5210,17 +5565,23 @@
           <a:lstStyle/>
           <a:p>
             <a:pPr indent="0" marL="0">
+              <a:lnSpc>
+                <a:spcPct val="100000"/>
+              </a:lnSpc>
               <a:buNone/>
             </a:pPr>
             <a:r>
-              <a:rPr lang="en-US" sz="2300" b="1" dirty="0">
-                <a:solidFill>
-                  <a:srgbClr val="111827"/>
-                </a:solidFill>
+              <a:rPr lang="en-US" sz="2500" dirty="0">
+                <a:solidFill>
+                  <a:srgbClr val="1C3140"/>
+                </a:solidFill>
+                <a:latin typeface="Constantia" pitchFamily="34" charset="0"/>
+                <a:ea typeface="Constantia" pitchFamily="34" charset="-122"/>
+                <a:cs typeface="Constantia" pitchFamily="34" charset="-120"/>
               </a:rPr>
               <a:t>A questionnaire item pulled apart</a:t>
             </a:r>
-            <a:endParaRPr lang="en-US" sz="2300" dirty="0"/>
+            <a:endParaRPr lang="en-US" sz="2500" dirty="0"/>
           </a:p>
         </p:txBody>
       </p:sp>
@@ -5232,21 +5593,16 @@
         </p:nvSpPr>
         <p:spPr>
           <a:xfrm>
-            <a:off x="502920" y="1207008"/>
-            <a:ext cx="8138160" cy="3200400"/>
+            <a:off x="566928" y="1335024"/>
+            <a:ext cx="566928" cy="20117"/>
           </a:xfrm>
           <a:prstGeom prst="rect">
             <a:avLst/>
           </a:prstGeom>
           <a:solidFill>
-            <a:srgbClr val="F3F7FC"/>
+            <a:srgbClr val="9A6A3C"/>
           </a:solidFill>
-          <a:ln w="9525">
-            <a:solidFill>
-              <a:srgbClr val="0066CC"/>
-            </a:solidFill>
-            <a:prstDash val="solid"/>
-          </a:ln>
+          <a:ln/>
         </p:spPr>
       </p:sp>
       <p:sp>
@@ -5257,8 +5613,8 @@
         </p:nvSpPr>
         <p:spPr>
           <a:xfrm>
-            <a:off x="731520" y="1371600"/>
-            <a:ext cx="7680960" cy="1005840"/>
+            <a:off x="566928" y="1645920"/>
+            <a:ext cx="8010144" cy="822960"/>
           </a:xfrm>
           <a:prstGeom prst="rect">
             <a:avLst/>
@@ -5271,156 +5627,195 @@
           <a:lstStyle/>
           <a:p>
             <a:pPr indent="0" marL="0">
+              <a:lnSpc>
+                <a:spcPct val="124000"/>
+              </a:lnSpc>
+              <a:buNone/>
+            </a:pPr>
+            <a:r>
+              <a:rPr lang="en-US" sz="1300" i="1" dirty="0">
+                <a:solidFill>
+                  <a:srgbClr val="5F6B76"/>
+                </a:solidFill>
+                <a:latin typeface="Constantia" pitchFamily="34" charset="0"/>
+                <a:ea typeface="Constantia" pitchFamily="34" charset="-122"/>
+                <a:cs typeface="Constantia" pitchFamily="34" charset="-120"/>
+              </a:rPr>
+              <a:t>A draft patient satisfaction survey includes: "How satisfied were you with the cost and quality of care? (Very satisfied / Satisfied / Dissatisfied)"</a:t>
+            </a:r>
+            <a:endParaRPr lang="en-US" sz="1300" dirty="0"/>
+          </a:p>
+        </p:txBody>
+      </p:sp>
+      <p:sp>
+        <p:nvSpPr>
+          <p:cNvPr id="6" name="Text 4"/>
+          <p:cNvSpPr/>
+          <p:nvPr/>
+        </p:nvSpPr>
+        <p:spPr>
+          <a:xfrm>
+            <a:off x="786384" y="2523744"/>
+            <a:ext cx="7406640" cy="1920240"/>
+          </a:xfrm>
+          <a:prstGeom prst="rect">
+            <a:avLst/>
+          </a:prstGeom>
+          <a:noFill/>
+          <a:ln/>
+        </p:spPr>
+        <p:txBody>
+          <a:bodyPr wrap="square" rtlCol="0" anchor="t"/>
+          <a:lstStyle/>
+          <a:p>
+            <a:pPr marL="342900" indent="-342900">
               <a:lnSpc>
                 <a:spcPct val="120000"/>
               </a:lnSpc>
-              <a:buNone/>
-            </a:pPr>
-            <a:r>
-              <a:rPr lang="en-US" sz="1400" i="1" dirty="0">
-                <a:solidFill>
-                  <a:srgbClr val="374151"/>
-                </a:solidFill>
-              </a:rPr>
-              <a:t>A draft patient satisfaction survey includes: "How satisfied were you with the cost and quality of care? (Very satisfied / Satisfied / Dissatisfied)"</a:t>
-            </a:r>
-            <a:endParaRPr lang="en-US" sz="1400" dirty="0"/>
-          </a:p>
-        </p:txBody>
-      </p:sp>
-      <p:sp>
-        <p:nvSpPr>
-          <p:cNvPr id="6" name="Text 4"/>
-          <p:cNvSpPr/>
-          <p:nvPr/>
-        </p:nvSpPr>
-        <p:spPr>
-          <a:xfrm>
-            <a:off x="868680" y="2395728"/>
-            <a:ext cx="7452360" cy="1920240"/>
-          </a:xfrm>
-          <a:prstGeom prst="rect">
-            <a:avLst/>
-          </a:prstGeom>
-          <a:noFill/>
-          <a:ln/>
-        </p:spPr>
-        <p:txBody>
-          <a:bodyPr wrap="square" rtlCol="0" anchor="t"/>
-          <a:lstStyle/>
-          <a:p>
-            <a:pPr marL="342900" indent="-342900">
-              <a:lnSpc>
-                <a:spcPct val="115000"/>
-              </a:lnSpc>
+              <a:spcAft>
+                <a:spcPts val="500"/>
+              </a:spcAft>
               <a:buSzPct val="100000"/>
               <a:buFont typeface="+mj-lt"/>
               <a:buAutoNum type="arabicPeriod" startAt="1"/>
             </a:pPr>
             <a:r>
-              <a:rPr lang="en-US" sz="1300" dirty="0">
-                <a:solidFill>
-                  <a:srgbClr val="374151"/>
-                </a:solidFill>
+              <a:rPr lang="en-US" sz="1250" dirty="0">
+                <a:solidFill>
+                  <a:srgbClr val="23282E"/>
+                </a:solidFill>
+                <a:latin typeface="Corbel" pitchFamily="34" charset="0"/>
+                <a:ea typeface="Corbel" pitchFamily="34" charset="-122"/>
+                <a:cs typeface="Corbel" pitchFamily="34" charset="-120"/>
               </a:rPr>
               <a:t>Double-barrelled: a patient happy with quality but not cost cannot answer truthfully.</a:t>
             </a:r>
-            <a:endParaRPr lang="en-US" sz="1300" dirty="0"/>
+            <a:endParaRPr lang="en-US" sz="1250" dirty="0"/>
           </a:p>
           <a:p>
             <a:pPr marL="342900" indent="-342900">
               <a:lnSpc>
-                <a:spcPct val="115000"/>
+                <a:spcPct val="120000"/>
               </a:lnSpc>
+              <a:spcAft>
+                <a:spcPts val="500"/>
+              </a:spcAft>
               <a:buSzPct val="100000"/>
               <a:buFont typeface="+mj-lt"/>
               <a:buAutoNum type="arabicPeriod" startAt="1"/>
             </a:pPr>
             <a:r>
-              <a:rPr lang="en-US" sz="1300" dirty="0">
-                <a:solidFill>
-                  <a:srgbClr val="374151"/>
-                </a:solidFill>
+              <a:rPr lang="en-US" sz="1250" dirty="0">
+                <a:solidFill>
+                  <a:srgbClr val="23282E"/>
+                </a:solidFill>
+                <a:latin typeface="Corbel" pitchFamily="34" charset="0"/>
+                <a:ea typeface="Corbel" pitchFamily="34" charset="-122"/>
+                <a:cs typeface="Corbel" pitchFamily="34" charset="-120"/>
               </a:rPr>
               <a:t>The response options are unbalanced — two positive, one negative — which pushes answers upward.</a:t>
             </a:r>
-            <a:endParaRPr lang="en-US" sz="1300" dirty="0"/>
+            <a:endParaRPr lang="en-US" sz="1250" dirty="0"/>
           </a:p>
           <a:p>
             <a:pPr marL="342900" indent="-342900">
               <a:lnSpc>
-                <a:spcPct val="115000"/>
+                <a:spcPct val="120000"/>
               </a:lnSpc>
+              <a:spcAft>
+                <a:spcPts val="500"/>
+              </a:spcAft>
               <a:buSzPct val="100000"/>
               <a:buFont typeface="+mj-lt"/>
               <a:buAutoNum type="arabicPeriod" startAt="1"/>
             </a:pPr>
             <a:r>
-              <a:rPr lang="en-US" sz="1300" dirty="0">
-                <a:solidFill>
-                  <a:srgbClr val="374151"/>
-                </a:solidFill>
+              <a:rPr lang="en-US" sz="1250" dirty="0">
+                <a:solidFill>
+                  <a:srgbClr val="23282E"/>
+                </a:solidFill>
+                <a:latin typeface="Corbel" pitchFamily="34" charset="0"/>
+                <a:ea typeface="Corbel" pitchFamily="34" charset="-122"/>
+                <a:cs typeface="Corbel" pitchFamily="34" charset="-120"/>
               </a:rPr>
               <a:t>There is no neutral option and no "not applicable", so someone who paid nothing must still choose.</a:t>
             </a:r>
-            <a:endParaRPr lang="en-US" sz="1300" dirty="0"/>
+            <a:endParaRPr lang="en-US" sz="1250" dirty="0"/>
           </a:p>
           <a:p>
             <a:pPr marL="342900" indent="-342900">
               <a:lnSpc>
-                <a:spcPct val="115000"/>
+                <a:spcPct val="120000"/>
               </a:lnSpc>
+              <a:spcAft>
+                <a:spcPts val="500"/>
+              </a:spcAft>
               <a:buSzPct val="100000"/>
               <a:buFont typeface="+mj-lt"/>
               <a:buAutoNum type="arabicPeriod" startAt="1"/>
             </a:pPr>
             <a:r>
-              <a:rPr lang="en-US" sz="1300" dirty="0">
-                <a:solidFill>
-                  <a:srgbClr val="374151"/>
-                </a:solidFill>
+              <a:rPr lang="en-US" sz="1250" dirty="0">
+                <a:solidFill>
+                  <a:srgbClr val="23282E"/>
+                </a:solidFill>
+                <a:latin typeface="Corbel" pitchFamily="34" charset="0"/>
+                <a:ea typeface="Corbel" pitchFamily="34" charset="-122"/>
+                <a:cs typeface="Corbel" pitchFamily="34" charset="-120"/>
               </a:rPr>
               <a:t>Split into two items, each with a balanced 5-point scale from Very dissatisfied to Very satisfied.</a:t>
             </a:r>
-            <a:endParaRPr lang="en-US" sz="1300" dirty="0"/>
+            <a:endParaRPr lang="en-US" sz="1250" dirty="0"/>
           </a:p>
           <a:p>
             <a:pPr marL="342900" indent="-342900">
               <a:lnSpc>
-                <a:spcPct val="115000"/>
+                <a:spcPct val="120000"/>
               </a:lnSpc>
+              <a:spcAft>
+                <a:spcPts val="500"/>
+              </a:spcAft>
               <a:buSzPct val="100000"/>
               <a:buFont typeface="+mj-lt"/>
               <a:buAutoNum type="arabicPeriod" startAt="1"/>
             </a:pPr>
             <a:r>
-              <a:rPr lang="en-US" sz="1300" dirty="0">
-                <a:solidFill>
-                  <a:srgbClr val="374151"/>
-                </a:solidFill>
+              <a:rPr lang="en-US" sz="1250" dirty="0">
+                <a:solidFill>
+                  <a:srgbClr val="23282E"/>
+                </a:solidFill>
+                <a:latin typeface="Corbel" pitchFamily="34" charset="0"/>
+                <a:ea typeface="Corbel" pitchFamily="34" charset="-122"/>
+                <a:cs typeface="Corbel" pitchFamily="34" charset="-120"/>
               </a:rPr>
               <a:t>Add "Not applicable" to the cost item for patients covered by the NHIS.</a:t>
             </a:r>
-            <a:endParaRPr lang="en-US" sz="1300" dirty="0"/>
+            <a:endParaRPr lang="en-US" sz="1250" dirty="0"/>
           </a:p>
           <a:p>
             <a:pPr marL="342900" indent="-342900">
               <a:lnSpc>
-                <a:spcPct val="115000"/>
+                <a:spcPct val="120000"/>
               </a:lnSpc>
+              <a:spcAft>
+                <a:spcPts val="500"/>
+              </a:spcAft>
               <a:buSzPct val="100000"/>
               <a:buFont typeface="+mj-lt"/>
               <a:buAutoNum type="arabicPeriod" startAt="1"/>
             </a:pPr>
             <a:r>
-              <a:rPr lang="en-US" sz="1300" dirty="0">
-                <a:solidFill>
-                  <a:srgbClr val="374151"/>
-                </a:solidFill>
+              <a:rPr lang="en-US" sz="1250" dirty="0">
+                <a:solidFill>
+                  <a:srgbClr val="23282E"/>
+                </a:solidFill>
+                <a:latin typeface="Corbel" pitchFamily="34" charset="0"/>
+                <a:ea typeface="Corbel" pitchFamily="34" charset="-122"/>
+                <a:cs typeface="Corbel" pitchFamily="34" charset="-120"/>
               </a:rPr>
               <a:t>Pilot on 20 patients and ask them to say aloud what they thought each item meant.</a:t>
             </a:r>
-            <a:endParaRPr lang="en-US" sz="1300" dirty="0"/>
+            <a:endParaRPr lang="en-US" sz="1250" dirty="0"/>
           </a:p>
         </p:txBody>
       </p:sp>
@@ -5436,8 +5831,8 @@
         </p:nvSpPr>
         <p:spPr>
           <a:xfrm>
-            <a:off x="8503920" y="4709160"/>
-            <a:ext cx="800000" cy="300000"/>
+            <a:off x="566928" y="4700016"/>
+            <a:ext cx="914400" cy="274320"/>
           </a:xfrm>
           <a:prstGeom prst="rect">
             <a:avLst/>
@@ -5452,10 +5847,13 @@
           <a:bodyPr/>
           <a:lstStyle>
             <a:lvl1pPr>
-              <a:defRPr sz="1000">
-                <a:solidFill>
-                  <a:srgbClr val="6B7280"/>
-                </a:solidFill>
+              <a:defRPr sz="900">
+                <a:solidFill>
+                  <a:srgbClr val="5F6B76"/>
+                </a:solidFill>
+                <a:latin typeface="Corbel"/>
+                <a:ea typeface="Corbel"/>
+                <a:cs typeface="Corbel"/>
               </a:defRPr>
             </a:lvl1pPr>
           </a:lstStyle>
@@ -5502,8 +5900,8 @@
         </p:nvSpPr>
         <p:spPr>
           <a:xfrm>
-            <a:off x="502920" y="292608"/>
-            <a:ext cx="8046720" cy="228600"/>
+            <a:off x="566928" y="384048"/>
+            <a:ext cx="7772400" cy="237744"/>
           </a:xfrm>
           <a:prstGeom prst="rect">
             <a:avLst/>
@@ -5519,14 +5917,17 @@
               <a:buNone/>
             </a:pPr>
             <a:r>
-              <a:rPr lang="en-US" sz="1100" b="1" spc="150" kern="0" dirty="0">
-                <a:solidFill>
-                  <a:srgbClr val="00A86B"/>
-                </a:solidFill>
+              <a:rPr lang="en-US" sz="1000" spc="200" kern="0" dirty="0">
+                <a:solidFill>
+                  <a:srgbClr val="9A6A3C"/>
+                </a:solidFill>
+                <a:latin typeface="Corbel" pitchFamily="34" charset="0"/>
+                <a:ea typeface="Corbel" pitchFamily="34" charset="-122"/>
+                <a:cs typeface="Corbel" pitchFamily="34" charset="-120"/>
               </a:rPr>
               <a:t>UNIT 8  ·  WORKED EXAMPLE</a:t>
             </a:r>
-            <a:endParaRPr lang="en-US" sz="1100" dirty="0"/>
+            <a:endParaRPr lang="en-US" sz="1000" dirty="0"/>
           </a:p>
         </p:txBody>
       </p:sp>
@@ -5538,8 +5939,8 @@
         </p:nvSpPr>
         <p:spPr>
           <a:xfrm>
-            <a:off x="502920" y="548640"/>
-            <a:ext cx="8046720" cy="566928"/>
+            <a:off x="566928" y="658368"/>
+            <a:ext cx="7772400" cy="658368"/>
           </a:xfrm>
           <a:prstGeom prst="rect">
             <a:avLst/>
@@ -5552,17 +5953,23 @@
           <a:lstStyle/>
           <a:p>
             <a:pPr indent="0" marL="0">
+              <a:lnSpc>
+                <a:spcPct val="100000"/>
+              </a:lnSpc>
               <a:buNone/>
             </a:pPr>
             <a:r>
-              <a:rPr lang="en-US" sz="2300" b="1" dirty="0">
-                <a:solidFill>
-                  <a:srgbClr val="111827"/>
-                </a:solidFill>
+              <a:rPr lang="en-US" sz="2500" dirty="0">
+                <a:solidFill>
+                  <a:srgbClr val="1C3140"/>
+                </a:solidFill>
+                <a:latin typeface="Constantia" pitchFamily="34" charset="0"/>
+                <a:ea typeface="Constantia" pitchFamily="34" charset="-122"/>
+                <a:cs typeface="Constantia" pitchFamily="34" charset="-120"/>
               </a:rPr>
               <a:t>What a translated instrument really requires</a:t>
             </a:r>
-            <a:endParaRPr lang="en-US" sz="2300" dirty="0"/>
+            <a:endParaRPr lang="en-US" sz="2500" dirty="0"/>
           </a:p>
         </p:txBody>
       </p:sp>
@@ -5574,21 +5981,16 @@
         </p:nvSpPr>
         <p:spPr>
           <a:xfrm>
-            <a:off x="502920" y="1207008"/>
-            <a:ext cx="8138160" cy="3200400"/>
+            <a:off x="566928" y="1335024"/>
+            <a:ext cx="566928" cy="20117"/>
           </a:xfrm>
           <a:prstGeom prst="rect">
             <a:avLst/>
           </a:prstGeom>
           <a:solidFill>
-            <a:srgbClr val="F3F7FC"/>
+            <a:srgbClr val="9A6A3C"/>
           </a:solidFill>
-          <a:ln w="9525">
-            <a:solidFill>
-              <a:srgbClr val="0066CC"/>
-            </a:solidFill>
-            <a:prstDash val="solid"/>
-          </a:ln>
+          <a:ln/>
         </p:spPr>
       </p:sp>
       <p:sp>
@@ -5599,8 +6001,8 @@
         </p:nvSpPr>
         <p:spPr>
           <a:xfrm>
-            <a:off x="731520" y="1371600"/>
-            <a:ext cx="7680960" cy="1005840"/>
+            <a:off x="566928" y="1645920"/>
+            <a:ext cx="8010144" cy="822960"/>
           </a:xfrm>
           <a:prstGeom prst="rect">
             <a:avLst/>
@@ -5613,156 +6015,195 @@
           <a:lstStyle/>
           <a:p>
             <a:pPr indent="0" marL="0">
+              <a:lnSpc>
+                <a:spcPct val="124000"/>
+              </a:lnSpc>
+              <a:buNone/>
+            </a:pPr>
+            <a:r>
+              <a:rPr lang="en-US" sz="1300" i="1" dirty="0">
+                <a:solidFill>
+                  <a:srgbClr val="5F6B76"/>
+                </a:solidFill>
+                <a:latin typeface="Constantia" pitchFamily="34" charset="0"/>
+                <a:ea typeface="Constantia" pitchFamily="34" charset="-122"/>
+                <a:cs typeface="Constantia" pitchFamily="34" charset="-120"/>
+              </a:rPr>
+              <a:t>A validated English depression scale is to be used with Twi-speaking participants. The student translates it herself the week before fieldwork.</a:t>
+            </a:r>
+            <a:endParaRPr lang="en-US" sz="1300" dirty="0"/>
+          </a:p>
+        </p:txBody>
+      </p:sp>
+      <p:sp>
+        <p:nvSpPr>
+          <p:cNvPr id="6" name="Text 4"/>
+          <p:cNvSpPr/>
+          <p:nvPr/>
+        </p:nvSpPr>
+        <p:spPr>
+          <a:xfrm>
+            <a:off x="786384" y="2523744"/>
+            <a:ext cx="7406640" cy="1920240"/>
+          </a:xfrm>
+          <a:prstGeom prst="rect">
+            <a:avLst/>
+          </a:prstGeom>
+          <a:noFill/>
+          <a:ln/>
+        </p:spPr>
+        <p:txBody>
+          <a:bodyPr wrap="square" rtlCol="0" anchor="t"/>
+          <a:lstStyle/>
+          <a:p>
+            <a:pPr marL="342900" indent="-342900">
               <a:lnSpc>
                 <a:spcPct val="120000"/>
               </a:lnSpc>
-              <a:buNone/>
-            </a:pPr>
-            <a:r>
-              <a:rPr lang="en-US" sz="1400" i="1" dirty="0">
-                <a:solidFill>
-                  <a:srgbClr val="374151"/>
-                </a:solidFill>
-              </a:rPr>
-              <a:t>A validated English depression scale is to be used with Twi-speaking participants. The student translates it herself the week before fieldwork.</a:t>
-            </a:r>
-            <a:endParaRPr lang="en-US" sz="1400" dirty="0"/>
-          </a:p>
-        </p:txBody>
-      </p:sp>
-      <p:sp>
-        <p:nvSpPr>
-          <p:cNvPr id="6" name="Text 4"/>
-          <p:cNvSpPr/>
-          <p:nvPr/>
-        </p:nvSpPr>
-        <p:spPr>
-          <a:xfrm>
-            <a:off x="868680" y="2395728"/>
-            <a:ext cx="7452360" cy="1920240"/>
-          </a:xfrm>
-          <a:prstGeom prst="rect">
-            <a:avLst/>
-          </a:prstGeom>
-          <a:noFill/>
-          <a:ln/>
-        </p:spPr>
-        <p:txBody>
-          <a:bodyPr wrap="square" rtlCol="0" anchor="t"/>
-          <a:lstStyle/>
-          <a:p>
-            <a:pPr marL="342900" indent="-342900">
-              <a:lnSpc>
-                <a:spcPct val="115000"/>
-              </a:lnSpc>
+              <a:spcAft>
+                <a:spcPts val="500"/>
+              </a:spcAft>
               <a:buSzPct val="100000"/>
               <a:buFont typeface="+mj-lt"/>
               <a:buAutoNum type="arabicPeriod" startAt="1"/>
             </a:pPr>
             <a:r>
-              <a:rPr lang="en-US" sz="1300" dirty="0">
-                <a:solidFill>
-                  <a:srgbClr val="374151"/>
-                </a:solidFill>
+              <a:rPr lang="en-US" sz="1250" dirty="0">
+                <a:solidFill>
+                  <a:srgbClr val="23282E"/>
+                </a:solidFill>
+                <a:latin typeface="Corbel" pitchFamily="34" charset="0"/>
+                <a:ea typeface="Corbel" pitchFamily="34" charset="-122"/>
+                <a:cs typeface="Corbel" pitchFamily="34" charset="-120"/>
               </a:rPr>
               <a:t>Forward translation by two independent bilingual translators, working separately.</a:t>
             </a:r>
-            <a:endParaRPr lang="en-US" sz="1300" dirty="0"/>
+            <a:endParaRPr lang="en-US" sz="1250" dirty="0"/>
           </a:p>
           <a:p>
             <a:pPr marL="342900" indent="-342900">
               <a:lnSpc>
-                <a:spcPct val="115000"/>
+                <a:spcPct val="120000"/>
               </a:lnSpc>
+              <a:spcAft>
+                <a:spcPts val="500"/>
+              </a:spcAft>
               <a:buSzPct val="100000"/>
               <a:buFont typeface="+mj-lt"/>
               <a:buAutoNum type="arabicPeriod" startAt="1"/>
             </a:pPr>
             <a:r>
-              <a:rPr lang="en-US" sz="1300" dirty="0">
-                <a:solidFill>
-                  <a:srgbClr val="374151"/>
-                </a:solidFill>
+              <a:rPr lang="en-US" sz="1250" dirty="0">
+                <a:solidFill>
+                  <a:srgbClr val="23282E"/>
+                </a:solidFill>
+                <a:latin typeface="Corbel" pitchFamily="34" charset="0"/>
+                <a:ea typeface="Corbel" pitchFamily="34" charset="-122"/>
+                <a:cs typeface="Corbel" pitchFamily="34" charset="-120"/>
               </a:rPr>
               <a:t>Reconciliation of the two versions by a panel, resolving each difference deliberately.</a:t>
             </a:r>
-            <a:endParaRPr lang="en-US" sz="1300" dirty="0"/>
+            <a:endParaRPr lang="en-US" sz="1250" dirty="0"/>
           </a:p>
           <a:p>
             <a:pPr marL="342900" indent="-342900">
               <a:lnSpc>
-                <a:spcPct val="115000"/>
+                <a:spcPct val="120000"/>
               </a:lnSpc>
+              <a:spcAft>
+                <a:spcPts val="500"/>
+              </a:spcAft>
               <a:buSzPct val="100000"/>
               <a:buFont typeface="+mj-lt"/>
               <a:buAutoNum type="arabicPeriod" startAt="1"/>
             </a:pPr>
             <a:r>
-              <a:rPr lang="en-US" sz="1300" dirty="0">
-                <a:solidFill>
-                  <a:srgbClr val="374151"/>
-                </a:solidFill>
+              <a:rPr lang="en-US" sz="1250" dirty="0">
+                <a:solidFill>
+                  <a:srgbClr val="23282E"/>
+                </a:solidFill>
+                <a:latin typeface="Corbel" pitchFamily="34" charset="0"/>
+                <a:ea typeface="Corbel" pitchFamily="34" charset="-122"/>
+                <a:cs typeface="Corbel" pitchFamily="34" charset="-120"/>
               </a:rPr>
               <a:t>Back translation into English by a third translator who has never seen the original.</a:t>
             </a:r>
-            <a:endParaRPr lang="en-US" sz="1300" dirty="0"/>
+            <a:endParaRPr lang="en-US" sz="1250" dirty="0"/>
           </a:p>
           <a:p>
             <a:pPr marL="342900" indent="-342900">
               <a:lnSpc>
-                <a:spcPct val="115000"/>
+                <a:spcPct val="120000"/>
               </a:lnSpc>
+              <a:spcAft>
+                <a:spcPts val="500"/>
+              </a:spcAft>
               <a:buSzPct val="100000"/>
               <a:buFont typeface="+mj-lt"/>
               <a:buAutoNum type="arabicPeriod" startAt="1"/>
             </a:pPr>
             <a:r>
-              <a:rPr lang="en-US" sz="1300" dirty="0">
-                <a:solidFill>
-                  <a:srgbClr val="374151"/>
-                </a:solidFill>
+              <a:rPr lang="en-US" sz="1250" dirty="0">
+                <a:solidFill>
+                  <a:srgbClr val="23282E"/>
+                </a:solidFill>
+                <a:latin typeface="Corbel" pitchFamily="34" charset="0"/>
+                <a:ea typeface="Corbel" pitchFamily="34" charset="-122"/>
+                <a:cs typeface="Corbel" pitchFamily="34" charset="-120"/>
               </a:rPr>
               <a:t>Compare back translation with the original; where meaning has drifted, revise and repeat.</a:t>
             </a:r>
-            <a:endParaRPr lang="en-US" sz="1300" dirty="0"/>
+            <a:endParaRPr lang="en-US" sz="1250" dirty="0"/>
           </a:p>
           <a:p>
             <a:pPr marL="342900" indent="-342900">
               <a:lnSpc>
-                <a:spcPct val="115000"/>
+                <a:spcPct val="120000"/>
               </a:lnSpc>
+              <a:spcAft>
+                <a:spcPts val="500"/>
+              </a:spcAft>
               <a:buSzPct val="100000"/>
               <a:buFont typeface="+mj-lt"/>
               <a:buAutoNum type="arabicPeriod" startAt="1"/>
             </a:pPr>
             <a:r>
-              <a:rPr lang="en-US" sz="1300" dirty="0">
-                <a:solidFill>
-                  <a:srgbClr val="374151"/>
-                </a:solidFill>
+              <a:rPr lang="en-US" sz="1250" dirty="0">
+                <a:solidFill>
+                  <a:srgbClr val="23282E"/>
+                </a:solidFill>
+                <a:latin typeface="Corbel" pitchFamily="34" charset="0"/>
+                <a:ea typeface="Corbel" pitchFamily="34" charset="-122"/>
+                <a:cs typeface="Corbel" pitchFamily="34" charset="-120"/>
               </a:rPr>
               <a:t>Cognitive interviewing with 5-10 target participants: ask what each item means to them in their own words.</a:t>
             </a:r>
-            <a:endParaRPr lang="en-US" sz="1300" dirty="0"/>
+            <a:endParaRPr lang="en-US" sz="1250" dirty="0"/>
           </a:p>
           <a:p>
             <a:pPr marL="342900" indent="-342900">
               <a:lnSpc>
-                <a:spcPct val="115000"/>
+                <a:spcPct val="120000"/>
               </a:lnSpc>
+              <a:spcAft>
+                <a:spcPts val="500"/>
+              </a:spcAft>
               <a:buSzPct val="100000"/>
               <a:buFont typeface="+mj-lt"/>
               <a:buAutoNum type="arabicPeriod" startAt="1"/>
             </a:pPr>
             <a:r>
-              <a:rPr lang="en-US" sz="1300" dirty="0">
-                <a:solidFill>
-                  <a:srgbClr val="374151"/>
-                </a:solidFill>
+              <a:rPr lang="en-US" sz="1250" dirty="0">
+                <a:solidFill>
+                  <a:srgbClr val="23282E"/>
+                </a:solidFill>
+                <a:latin typeface="Corbel" pitchFamily="34" charset="0"/>
+                <a:ea typeface="Corbel" pitchFamily="34" charset="-122"/>
+                <a:cs typeface="Corbel" pitchFamily="34" charset="-120"/>
               </a:rPr>
               <a:t>Re-check reliability in the new population — the original Cronbach's alpha does not transfer.</a:t>
             </a:r>
-            <a:endParaRPr lang="en-US" sz="1300" dirty="0"/>
+            <a:endParaRPr lang="en-US" sz="1250" dirty="0"/>
           </a:p>
         </p:txBody>
       </p:sp>
@@ -5778,8 +6219,8 @@
         </p:nvSpPr>
         <p:spPr>
           <a:xfrm>
-            <a:off x="8503920" y="4709160"/>
-            <a:ext cx="800000" cy="300000"/>
+            <a:off x="566928" y="4700016"/>
+            <a:ext cx="914400" cy="274320"/>
           </a:xfrm>
           <a:prstGeom prst="rect">
             <a:avLst/>
@@ -5794,10 +6235,13 @@
           <a:bodyPr/>
           <a:lstStyle>
             <a:lvl1pPr>
-              <a:defRPr sz="1000">
-                <a:solidFill>
-                  <a:srgbClr val="6B7280"/>
-                </a:solidFill>
+              <a:defRPr sz="900">
+                <a:solidFill>
+                  <a:srgbClr val="5F6B76"/>
+                </a:solidFill>
+                <a:latin typeface="Corbel"/>
+                <a:ea typeface="Corbel"/>
+                <a:cs typeface="Corbel"/>
               </a:defRPr>
             </a:lvl1pPr>
           </a:lstStyle>
@@ -5844,8 +6288,8 @@
         </p:nvSpPr>
         <p:spPr>
           <a:xfrm>
-            <a:off x="502920" y="292608"/>
-            <a:ext cx="8046720" cy="228600"/>
+            <a:off x="566928" y="384048"/>
+            <a:ext cx="7772400" cy="237744"/>
           </a:xfrm>
           <a:prstGeom prst="rect">
             <a:avLst/>
@@ -5861,14 +6305,17 @@
               <a:buNone/>
             </a:pPr>
             <a:r>
-              <a:rPr lang="en-US" sz="1100" b="1" spc="150" kern="0" dirty="0">
-                <a:solidFill>
-                  <a:srgbClr val="0066CC"/>
-                </a:solidFill>
+              <a:rPr lang="en-US" sz="1000" spc="200" kern="0" dirty="0">
+                <a:solidFill>
+                  <a:srgbClr val="9A6A3C"/>
+                </a:solidFill>
+                <a:latin typeface="Corbel" pitchFamily="34" charset="0"/>
+                <a:ea typeface="Corbel" pitchFamily="34" charset="-122"/>
+                <a:cs typeface="Corbel" pitchFamily="34" charset="-120"/>
               </a:rPr>
               <a:t>UNIT 8</a:t>
             </a:r>
-            <a:endParaRPr lang="en-US" sz="1100" dirty="0"/>
+            <a:endParaRPr lang="en-US" sz="1000" dirty="0"/>
           </a:p>
         </p:txBody>
       </p:sp>
@@ -5880,8 +6327,8 @@
         </p:nvSpPr>
         <p:spPr>
           <a:xfrm>
-            <a:off x="502920" y="548640"/>
-            <a:ext cx="8046720" cy="640080"/>
+            <a:off x="566928" y="658368"/>
+            <a:ext cx="7772400" cy="658368"/>
           </a:xfrm>
           <a:prstGeom prst="rect">
             <a:avLst/>
@@ -5894,30 +6341,56 @@
           <a:lstStyle/>
           <a:p>
             <a:pPr indent="0" marL="0">
+              <a:lnSpc>
+                <a:spcPct val="100000"/>
+              </a:lnSpc>
               <a:buNone/>
             </a:pPr>
             <a:r>
-              <a:rPr lang="en-US" sz="2400" b="1" dirty="0">
-                <a:solidFill>
-                  <a:srgbClr val="111827"/>
-                </a:solidFill>
+              <a:rPr lang="en-US" sz="2500" dirty="0">
+                <a:solidFill>
+                  <a:srgbClr val="1C3140"/>
+                </a:solidFill>
+                <a:latin typeface="Constantia" pitchFamily="34" charset="0"/>
+                <a:ea typeface="Constantia" pitchFamily="34" charset="-122"/>
+                <a:cs typeface="Constantia" pitchFamily="34" charset="-120"/>
               </a:rPr>
               <a:t>Key terms (1/2)</a:t>
             </a:r>
-            <a:endParaRPr lang="en-US" sz="2400" dirty="0"/>
-          </a:p>
-        </p:txBody>
-      </p:sp>
-      <p:sp>
-        <p:nvSpPr>
-          <p:cNvPr id="4" name="Text 2"/>
+            <a:endParaRPr lang="en-US" sz="2500" dirty="0"/>
+          </a:p>
+        </p:txBody>
+      </p:sp>
+      <p:sp>
+        <p:nvSpPr>
+          <p:cNvPr id="4" name="Shape 2"/>
           <p:cNvSpPr/>
           <p:nvPr/>
         </p:nvSpPr>
         <p:spPr>
           <a:xfrm>
-            <a:off x="685800" y="1325880"/>
-            <a:ext cx="7772400" cy="3200400"/>
+            <a:off x="566928" y="1335024"/>
+            <a:ext cx="566928" cy="20117"/>
+          </a:xfrm>
+          <a:prstGeom prst="rect">
+            <a:avLst/>
+          </a:prstGeom>
+          <a:solidFill>
+            <a:srgbClr val="9A6A3C"/>
+          </a:solidFill>
+          <a:ln/>
+        </p:spPr>
+      </p:sp>
+      <p:sp>
+        <p:nvSpPr>
+          <p:cNvPr id="5" name="Text 3"/>
+          <p:cNvSpPr/>
+          <p:nvPr/>
+        </p:nvSpPr>
+        <p:spPr>
+          <a:xfrm>
+            <a:off x="713232" y="1664208"/>
+            <a:ext cx="7498080" cy="2788920"/>
           </a:xfrm>
           <a:prstGeom prst="rect">
             <a:avLst/>
@@ -5931,19 +6404,22 @@
           <a:p>
             <a:pPr marL="342900" indent="-342900">
               <a:lnSpc>
-                <a:spcPct val="125000"/>
+                <a:spcPct val="130000"/>
               </a:lnSpc>
               <a:spcAft>
-                <a:spcPts val="800"/>
+                <a:spcPts val="1100"/>
               </a:spcAft>
               <a:buSzPct val="100000"/>
-              <a:buChar char="•"/>
+              <a:buChar char="–"/>
             </a:pPr>
             <a:r>
               <a:rPr lang="en-US" sz="1500" dirty="0">
                 <a:solidFill>
-                  <a:srgbClr val="374151"/>
-                </a:solidFill>
+                  <a:srgbClr val="23282E"/>
+                </a:solidFill>
+                <a:latin typeface="Corbel" pitchFamily="34" charset="0"/>
+                <a:ea typeface="Corbel" pitchFamily="34" charset="-122"/>
+                <a:cs typeface="Corbel" pitchFamily="34" charset="-120"/>
               </a:rPr>
               <a:t>Operationalisation — Specifying the observable indicators and procedures by which an abstract construct will be measured.</a:t>
             </a:r>
@@ -5952,19 +6428,22 @@
           <a:p>
             <a:pPr marL="342900" indent="-342900">
               <a:lnSpc>
-                <a:spcPct val="125000"/>
+                <a:spcPct val="130000"/>
               </a:lnSpc>
               <a:spcAft>
-                <a:spcPts val="800"/>
+                <a:spcPts val="1100"/>
               </a:spcAft>
               <a:buSzPct val="100000"/>
-              <a:buChar char="•"/>
+              <a:buChar char="–"/>
             </a:pPr>
             <a:r>
               <a:rPr lang="en-US" sz="1500" dirty="0">
                 <a:solidFill>
-                  <a:srgbClr val="374151"/>
-                </a:solidFill>
+                  <a:srgbClr val="23282E"/>
+                </a:solidFill>
+                <a:latin typeface="Corbel" pitchFamily="34" charset="0"/>
+                <a:ea typeface="Corbel" pitchFamily="34" charset="-122"/>
+                <a:cs typeface="Corbel" pitchFamily="34" charset="-120"/>
               </a:rPr>
               <a:t>Construct validity — Evidence that an instrument measures the theoretical concept it claims to measure.</a:t>
             </a:r>
@@ -5973,19 +6452,22 @@
           <a:p>
             <a:pPr marL="342900" indent="-342900">
               <a:lnSpc>
-                <a:spcPct val="125000"/>
+                <a:spcPct val="130000"/>
               </a:lnSpc>
               <a:spcAft>
-                <a:spcPts val="800"/>
+                <a:spcPts val="1100"/>
               </a:spcAft>
               <a:buSzPct val="100000"/>
-              <a:buChar char="•"/>
+              <a:buChar char="–"/>
             </a:pPr>
             <a:r>
               <a:rPr lang="en-US" sz="1500" dirty="0">
                 <a:solidFill>
-                  <a:srgbClr val="374151"/>
-                </a:solidFill>
+                  <a:srgbClr val="23282E"/>
+                </a:solidFill>
+                <a:latin typeface="Corbel" pitchFamily="34" charset="0"/>
+                <a:ea typeface="Corbel" pitchFamily="34" charset="-122"/>
+                <a:cs typeface="Corbel" pitchFamily="34" charset="-120"/>
               </a:rPr>
               <a:t>Cronbach's alpha — A coefficient of internal consistency among the items of a scale.</a:t>
             </a:r>
@@ -5994,19 +6476,22 @@
           <a:p>
             <a:pPr marL="342900" indent="-342900">
               <a:lnSpc>
-                <a:spcPct val="125000"/>
+                <a:spcPct val="130000"/>
               </a:lnSpc>
               <a:spcAft>
-                <a:spcPts val="800"/>
+                <a:spcPts val="1100"/>
               </a:spcAft>
               <a:buSzPct val="100000"/>
-              <a:buChar char="•"/>
+              <a:buChar char="–"/>
             </a:pPr>
             <a:r>
               <a:rPr lang="en-US" sz="1500" dirty="0">
                 <a:solidFill>
-                  <a:srgbClr val="374151"/>
-                </a:solidFill>
+                  <a:srgbClr val="23282E"/>
+                </a:solidFill>
+                <a:latin typeface="Corbel" pitchFamily="34" charset="0"/>
+                <a:ea typeface="Corbel" pitchFamily="34" charset="-122"/>
+                <a:cs typeface="Corbel" pitchFamily="34" charset="-120"/>
               </a:rPr>
               <a:t>Cohen's kappa — A measure of agreement between raters that corrects for agreement expected by chance.</a:t>
             </a:r>
@@ -6026,8 +6511,8 @@
         </p:nvSpPr>
         <p:spPr>
           <a:xfrm>
-            <a:off x="8503920" y="4709160"/>
-            <a:ext cx="800000" cy="300000"/>
+            <a:off x="566928" y="4700016"/>
+            <a:ext cx="914400" cy="274320"/>
           </a:xfrm>
           <a:prstGeom prst="rect">
             <a:avLst/>
@@ -6042,10 +6527,13 @@
           <a:bodyPr/>
           <a:lstStyle>
             <a:lvl1pPr>
-              <a:defRPr sz="1000">
-                <a:solidFill>
-                  <a:srgbClr val="6B7280"/>
-                </a:solidFill>
+              <a:defRPr sz="900">
+                <a:solidFill>
+                  <a:srgbClr val="5F6B76"/>
+                </a:solidFill>
+                <a:latin typeface="Corbel"/>
+                <a:ea typeface="Corbel"/>
+                <a:cs typeface="Corbel"/>
               </a:defRPr>
             </a:lvl1pPr>
           </a:lstStyle>
@@ -6092,8 +6580,8 @@
         </p:nvSpPr>
         <p:spPr>
           <a:xfrm>
-            <a:off x="502920" y="292608"/>
-            <a:ext cx="8046720" cy="228600"/>
+            <a:off x="566928" y="384048"/>
+            <a:ext cx="7772400" cy="237744"/>
           </a:xfrm>
           <a:prstGeom prst="rect">
             <a:avLst/>
@@ -6109,14 +6597,17 @@
               <a:buNone/>
             </a:pPr>
             <a:r>
-              <a:rPr lang="en-US" sz="1100" b="1" spc="150" kern="0" dirty="0">
-                <a:solidFill>
-                  <a:srgbClr val="0066CC"/>
-                </a:solidFill>
+              <a:rPr lang="en-US" sz="1000" spc="200" kern="0" dirty="0">
+                <a:solidFill>
+                  <a:srgbClr val="9A6A3C"/>
+                </a:solidFill>
+                <a:latin typeface="Corbel" pitchFamily="34" charset="0"/>
+                <a:ea typeface="Corbel" pitchFamily="34" charset="-122"/>
+                <a:cs typeface="Corbel" pitchFamily="34" charset="-120"/>
               </a:rPr>
               <a:t>UNIT 8</a:t>
             </a:r>
-            <a:endParaRPr lang="en-US" sz="1100" dirty="0"/>
+            <a:endParaRPr lang="en-US" sz="1000" dirty="0"/>
           </a:p>
         </p:txBody>
       </p:sp>
@@ -6128,8 +6619,8 @@
         </p:nvSpPr>
         <p:spPr>
           <a:xfrm>
-            <a:off x="502920" y="548640"/>
-            <a:ext cx="8046720" cy="640080"/>
+            <a:off x="566928" y="658368"/>
+            <a:ext cx="7772400" cy="658368"/>
           </a:xfrm>
           <a:prstGeom prst="rect">
             <a:avLst/>
@@ -6142,30 +6633,56 @@
           <a:lstStyle/>
           <a:p>
             <a:pPr indent="0" marL="0">
+              <a:lnSpc>
+                <a:spcPct val="100000"/>
+              </a:lnSpc>
               <a:buNone/>
             </a:pPr>
             <a:r>
-              <a:rPr lang="en-US" sz="2400" b="1" dirty="0">
-                <a:solidFill>
-                  <a:srgbClr val="111827"/>
-                </a:solidFill>
+              <a:rPr lang="en-US" sz="2500" dirty="0">
+                <a:solidFill>
+                  <a:srgbClr val="1C3140"/>
+                </a:solidFill>
+                <a:latin typeface="Constantia" pitchFamily="34" charset="0"/>
+                <a:ea typeface="Constantia" pitchFamily="34" charset="-122"/>
+                <a:cs typeface="Constantia" pitchFamily="34" charset="-120"/>
               </a:rPr>
               <a:t>Key terms (2/2)</a:t>
             </a:r>
-            <a:endParaRPr lang="en-US" sz="2400" dirty="0"/>
-          </a:p>
-        </p:txBody>
-      </p:sp>
-      <p:sp>
-        <p:nvSpPr>
-          <p:cNvPr id="4" name="Text 2"/>
+            <a:endParaRPr lang="en-US" sz="2500" dirty="0"/>
+          </a:p>
+        </p:txBody>
+      </p:sp>
+      <p:sp>
+        <p:nvSpPr>
+          <p:cNvPr id="4" name="Shape 2"/>
           <p:cNvSpPr/>
           <p:nvPr/>
         </p:nvSpPr>
         <p:spPr>
           <a:xfrm>
-            <a:off x="685800" y="1325880"/>
-            <a:ext cx="7772400" cy="3200400"/>
+            <a:off x="566928" y="1335024"/>
+            <a:ext cx="566928" cy="20117"/>
+          </a:xfrm>
+          <a:prstGeom prst="rect">
+            <a:avLst/>
+          </a:prstGeom>
+          <a:solidFill>
+            <a:srgbClr val="9A6A3C"/>
+          </a:solidFill>
+          <a:ln/>
+        </p:spPr>
+      </p:sp>
+      <p:sp>
+        <p:nvSpPr>
+          <p:cNvPr id="5" name="Text 3"/>
+          <p:cNvSpPr/>
+          <p:nvPr/>
+        </p:nvSpPr>
+        <p:spPr>
+          <a:xfrm>
+            <a:off x="713232" y="1664208"/>
+            <a:ext cx="7498080" cy="2788920"/>
           </a:xfrm>
           <a:prstGeom prst="rect">
             <a:avLst/>
@@ -6179,19 +6696,22 @@
           <a:p>
             <a:pPr marL="342900" indent="-342900">
               <a:lnSpc>
-                <a:spcPct val="125000"/>
+                <a:spcPct val="130000"/>
               </a:lnSpc>
               <a:spcAft>
-                <a:spcPts val="800"/>
+                <a:spcPts val="1100"/>
               </a:spcAft>
               <a:buSzPct val="100000"/>
-              <a:buChar char="•"/>
+              <a:buChar char="–"/>
             </a:pPr>
             <a:r>
               <a:rPr lang="en-US" sz="1500" dirty="0">
                 <a:solidFill>
-                  <a:srgbClr val="374151"/>
-                </a:solidFill>
+                  <a:srgbClr val="23282E"/>
+                </a:solidFill>
+                <a:latin typeface="Corbel" pitchFamily="34" charset="0"/>
+                <a:ea typeface="Corbel" pitchFamily="34" charset="-122"/>
+                <a:cs typeface="Corbel" pitchFamily="34" charset="-120"/>
               </a:rPr>
               <a:t>Skip logic — Rules routing a respondent past items that do not apply to them.</a:t>
             </a:r>
@@ -6200,19 +6720,22 @@
           <a:p>
             <a:pPr marL="342900" indent="-342900">
               <a:lnSpc>
-                <a:spcPct val="125000"/>
+                <a:spcPct val="130000"/>
               </a:lnSpc>
               <a:spcAft>
-                <a:spcPts val="800"/>
+                <a:spcPts val="1100"/>
               </a:spcAft>
               <a:buSzPct val="100000"/>
-              <a:buChar char="•"/>
+              <a:buChar char="–"/>
             </a:pPr>
             <a:r>
               <a:rPr lang="en-US" sz="1500" dirty="0">
                 <a:solidFill>
-                  <a:srgbClr val="374151"/>
-                </a:solidFill>
+                  <a:srgbClr val="23282E"/>
+                </a:solidFill>
+                <a:latin typeface="Corbel" pitchFamily="34" charset="0"/>
+                <a:ea typeface="Corbel" pitchFamily="34" charset="-122"/>
+                <a:cs typeface="Corbel" pitchFamily="34" charset="-120"/>
               </a:rPr>
               <a:t>Double entry — Entering paper data twice independently and reconciling differences to catch transcription error.</a:t>
             </a:r>
@@ -6232,8 +6755,8 @@
         </p:nvSpPr>
         <p:spPr>
           <a:xfrm>
-            <a:off x="8503920" y="4709160"/>
-            <a:ext cx="800000" cy="300000"/>
+            <a:off x="566928" y="4700016"/>
+            <a:ext cx="914400" cy="274320"/>
           </a:xfrm>
           <a:prstGeom prst="rect">
             <a:avLst/>
@@ -6248,10 +6771,13 @@
           <a:bodyPr/>
           <a:lstStyle>
             <a:lvl1pPr>
-              <a:defRPr sz="1000">
-                <a:solidFill>
-                  <a:srgbClr val="6B7280"/>
-                </a:solidFill>
+              <a:defRPr sz="900">
+                <a:solidFill>
+                  <a:srgbClr val="5F6B76"/>
+                </a:solidFill>
+                <a:latin typeface="Corbel"/>
+                <a:ea typeface="Corbel"/>
+                <a:cs typeface="Corbel"/>
               </a:defRPr>
             </a:lvl1pPr>
           </a:lstStyle>
@@ -6298,8 +6824,8 @@
         </p:nvSpPr>
         <p:spPr>
           <a:xfrm>
-            <a:off x="502920" y="292608"/>
-            <a:ext cx="8046720" cy="228600"/>
+            <a:off x="685800" y="1024128"/>
+            <a:ext cx="6766560" cy="292608"/>
           </a:xfrm>
           <a:prstGeom prst="rect">
             <a:avLst/>
@@ -6315,14 +6841,17 @@
               <a:buNone/>
             </a:pPr>
             <a:r>
-              <a:rPr lang="en-US" sz="1100" b="1" spc="150" kern="0" dirty="0">
-                <a:solidFill>
-                  <a:srgbClr val="0066CC"/>
-                </a:solidFill>
-              </a:rPr>
-              <a:t>UNIT 8  ·  OVER TO YOU</a:t>
-            </a:r>
-            <a:endParaRPr lang="en-US" sz="1100" dirty="0"/>
+              <a:rPr lang="en-US" sz="1150" spc="240" kern="0" dirty="0">
+                <a:solidFill>
+                  <a:srgbClr val="C8A67B"/>
+                </a:solidFill>
+                <a:latin typeface="Corbel" pitchFamily="34" charset="0"/>
+                <a:ea typeface="Corbel" pitchFamily="34" charset="-122"/>
+                <a:cs typeface="Corbel" pitchFamily="34" charset="-120"/>
+              </a:rPr>
+              <a:t>Over to you</a:t>
+            </a:r>
+            <a:endParaRPr lang="en-US" sz="1150" dirty="0"/>
           </a:p>
         </p:txBody>
       </p:sp>
@@ -6334,8 +6863,8 @@
         </p:nvSpPr>
         <p:spPr>
           <a:xfrm>
-            <a:off x="502920" y="548640"/>
-            <a:ext cx="8046720" cy="640080"/>
+            <a:off x="685800" y="1700784"/>
+            <a:ext cx="6858000" cy="640080"/>
           </a:xfrm>
           <a:prstGeom prst="rect">
             <a:avLst/>
@@ -6351,14 +6880,17 @@
               <a:buNone/>
             </a:pPr>
             <a:r>
-              <a:rPr lang="en-US" sz="2400" b="1" dirty="0">
-                <a:solidFill>
-                  <a:srgbClr val="111827"/>
-                </a:solidFill>
+              <a:rPr lang="en-US" sz="3000" dirty="0">
+                <a:solidFill>
+                  <a:srgbClr val="FFFFFF"/>
+                </a:solidFill>
+                <a:latin typeface="Constantia" pitchFamily="34" charset="0"/>
+                <a:ea typeface="Constantia" pitchFamily="34" charset="-122"/>
+                <a:cs typeface="Constantia" pitchFamily="34" charset="-120"/>
               </a:rPr>
               <a:t>Activity</a:t>
             </a:r>
-            <a:endParaRPr lang="en-US" sz="2400" dirty="0"/>
+            <a:endParaRPr lang="en-US" sz="3000" dirty="0"/>
           </a:p>
         </p:txBody>
       </p:sp>
@@ -6370,8 +6902,8 @@
         </p:nvSpPr>
         <p:spPr>
           <a:xfrm>
-            <a:off x="685800" y="1325880"/>
-            <a:ext cx="7772400" cy="3200400"/>
+            <a:off x="685800" y="2487168"/>
+            <a:ext cx="6949440" cy="1737360"/>
           </a:xfrm>
           <a:prstGeom prst="rect">
             <a:avLst/>
@@ -6383,70 +6915,24 @@
           <a:bodyPr wrap="square" rtlCol="0" anchor="t"/>
           <a:lstStyle/>
           <a:p>
-            <a:pPr marL="342900" indent="-342900">
+            <a:pPr indent="0" marL="0">
               <a:lnSpc>
-                <a:spcPct val="125000"/>
+                <a:spcPct val="134000"/>
               </a:lnSpc>
-              <a:spcAft>
-                <a:spcPts val="800"/>
-              </a:spcAft>
-              <a:buSzPct val="100000"/>
-              <a:buChar char="•"/>
-            </a:pPr>
-            <a:r>
-              <a:rPr lang="en-US" sz="1300" dirty="0">
-                <a:solidFill>
-                  <a:srgbClr val="374151"/>
-                </a:solidFill>
+              <a:buNone/>
+            </a:pPr>
+            <a:r>
+              <a:rPr lang="en-US" sz="1450" dirty="0">
+                <a:solidFill>
+                  <a:srgbClr val="C4CCD4"/>
+                </a:solidFill>
+                <a:latin typeface="Corbel" pitchFamily="34" charset="0"/>
+                <a:ea typeface="Corbel" pitchFamily="34" charset="-122"/>
+                <a:cs typeface="Corbel" pitchFamily="34" charset="-120"/>
               </a:rPr>
               <a:t>Take one construct from your study and write three candidate items for it. Exchange with a partner, who must identify any double-barrelled, leading or ambiguous wording and check the response options are exhaustive and mutually exclusive. Then state which reliability evidence you would report and why.</a:t>
             </a:r>
-            <a:endParaRPr lang="en-US" sz="1300" dirty="0"/>
-          </a:p>
-        </p:txBody>
-      </p:sp>
-      <p:sp>
-        <p:nvSpPr>
-          <p:cNvPr id="25" name="Slide Number Placeholder 0"/>
-          <p:cNvSpPr>
-            <a:spLocks noGrp="1"/>
-          </p:cNvSpPr>
-          <p:nvPr>
-            <p:ph type="sldNum" sz="quarter" idx="4294967295"/>
-          </p:nvPr>
-        </p:nvSpPr>
-        <p:spPr>
-          <a:xfrm>
-            <a:off x="8503920" y="4709160"/>
-            <a:ext cx="800000" cy="300000"/>
-          </a:xfrm>
-          <a:prstGeom prst="rect">
-            <a:avLst/>
-          </a:prstGeom>
-          <a:extLst>
-            <a:ext uri="{C572A759-6A51-4108-AA02-DFA0A04FC94B}">
-              <ma14:wrappingTextBoxFlag xmlns:ma14="http://schemas.microsoft.com/office/mac/drawingml/2011/main" val="0"/>
-            </a:ext>
-          </a:extLst>
-        </p:spPr>
-        <p:txBody>
-          <a:bodyPr/>
-          <a:lstStyle>
-            <a:lvl1pPr>
-              <a:defRPr sz="1000">
-                <a:solidFill>
-                  <a:srgbClr val="6B7280"/>
-                </a:solidFill>
-              </a:defRPr>
-            </a:lvl1pPr>
-          </a:lstStyle>
-          <a:p>
-            <a:pPr algn="l"/>
-            <a:fld id="{F7021451-1387-4CA6-816F-3879F97B5CBC}" type="slidenum">
-              <a:rPr b="0" lang="en-US"/>
-              <a:t>19</a:t>
-            </a:fld>
-            <a:endParaRPr lang="en-US"/>
+            <a:endParaRPr lang="en-US" sz="1450" dirty="0"/>
           </a:p>
         </p:txBody>
       </p:sp>
@@ -6483,8 +6969,8 @@
         </p:nvSpPr>
         <p:spPr>
           <a:xfrm>
-            <a:off x="502920" y="292608"/>
-            <a:ext cx="8046720" cy="228600"/>
+            <a:off x="566928" y="384048"/>
+            <a:ext cx="7772400" cy="237744"/>
           </a:xfrm>
           <a:prstGeom prst="rect">
             <a:avLst/>
@@ -6500,14 +6986,17 @@
               <a:buNone/>
             </a:pPr>
             <a:r>
-              <a:rPr lang="en-US" sz="1100" b="1" spc="150" kern="0" dirty="0">
-                <a:solidFill>
-                  <a:srgbClr val="0066CC"/>
-                </a:solidFill>
+              <a:rPr lang="en-US" sz="1000" spc="200" kern="0" dirty="0">
+                <a:solidFill>
+                  <a:srgbClr val="9A6A3C"/>
+                </a:solidFill>
+                <a:latin typeface="Corbel" pitchFamily="34" charset="0"/>
+                <a:ea typeface="Corbel" pitchFamily="34" charset="-122"/>
+                <a:cs typeface="Corbel" pitchFamily="34" charset="-120"/>
               </a:rPr>
               <a:t>UNIT 8</a:t>
             </a:r>
-            <a:endParaRPr lang="en-US" sz="1100" dirty="0"/>
+            <a:endParaRPr lang="en-US" sz="1000" dirty="0"/>
           </a:p>
         </p:txBody>
       </p:sp>
@@ -6519,8 +7008,8 @@
         </p:nvSpPr>
         <p:spPr>
           <a:xfrm>
-            <a:off x="502920" y="548640"/>
-            <a:ext cx="8046720" cy="640080"/>
+            <a:off x="566928" y="658368"/>
+            <a:ext cx="7772400" cy="658368"/>
           </a:xfrm>
           <a:prstGeom prst="rect">
             <a:avLst/>
@@ -6533,30 +7022,56 @@
           <a:lstStyle/>
           <a:p>
             <a:pPr indent="0" marL="0">
+              <a:lnSpc>
+                <a:spcPct val="100000"/>
+              </a:lnSpc>
               <a:buNone/>
             </a:pPr>
             <a:r>
-              <a:rPr lang="en-US" sz="2400" b="1" dirty="0">
-                <a:solidFill>
-                  <a:srgbClr val="111827"/>
-                </a:solidFill>
+              <a:rPr lang="en-US" sz="2500" dirty="0">
+                <a:solidFill>
+                  <a:srgbClr val="1C3140"/>
+                </a:solidFill>
+                <a:latin typeface="Constantia" pitchFamily="34" charset="0"/>
+                <a:ea typeface="Constantia" pitchFamily="34" charset="-122"/>
+                <a:cs typeface="Constantia" pitchFamily="34" charset="-120"/>
               </a:rPr>
               <a:t>What you will be able to do</a:t>
             </a:r>
-            <a:endParaRPr lang="en-US" sz="2400" dirty="0"/>
-          </a:p>
-        </p:txBody>
-      </p:sp>
-      <p:sp>
-        <p:nvSpPr>
-          <p:cNvPr id="4" name="Text 2"/>
+            <a:endParaRPr lang="en-US" sz="2500" dirty="0"/>
+          </a:p>
+        </p:txBody>
+      </p:sp>
+      <p:sp>
+        <p:nvSpPr>
+          <p:cNvPr id="4" name="Shape 2"/>
           <p:cNvSpPr/>
           <p:nvPr/>
         </p:nvSpPr>
         <p:spPr>
           <a:xfrm>
-            <a:off x="685800" y="1325880"/>
-            <a:ext cx="7772400" cy="3200400"/>
+            <a:off x="566928" y="1335024"/>
+            <a:ext cx="566928" cy="20117"/>
+          </a:xfrm>
+          <a:prstGeom prst="rect">
+            <a:avLst/>
+          </a:prstGeom>
+          <a:solidFill>
+            <a:srgbClr val="9A6A3C"/>
+          </a:solidFill>
+          <a:ln/>
+        </p:spPr>
+      </p:sp>
+      <p:sp>
+        <p:nvSpPr>
+          <p:cNvPr id="5" name="Text 3"/>
+          <p:cNvSpPr/>
+          <p:nvPr/>
+        </p:nvSpPr>
+        <p:spPr>
+          <a:xfrm>
+            <a:off x="713232" y="1664208"/>
+            <a:ext cx="7498080" cy="2788920"/>
           </a:xfrm>
           <a:prstGeom prst="rect">
             <a:avLst/>
@@ -6570,128 +7085,146 @@
           <a:p>
             <a:pPr marL="342900" indent="-342900">
               <a:lnSpc>
-                <a:spcPct val="125000"/>
+                <a:spcPct val="130000"/>
               </a:lnSpc>
               <a:spcAft>
-                <a:spcPts val="800"/>
+                <a:spcPts val="1100"/>
               </a:spcAft>
               <a:buSzPct val="100000"/>
-              <a:buChar char="•"/>
-            </a:pPr>
-            <a:r>
-              <a:rPr lang="en-US" sz="1700" dirty="0">
-                <a:solidFill>
-                  <a:srgbClr val="374151"/>
-                </a:solidFill>
+              <a:buChar char="–"/>
+            </a:pPr>
+            <a:r>
+              <a:rPr lang="en-US" sz="1650" dirty="0">
+                <a:solidFill>
+                  <a:srgbClr val="23282E"/>
+                </a:solidFill>
+                <a:latin typeface="Corbel" pitchFamily="34" charset="0"/>
+                <a:ea typeface="Corbel" pitchFamily="34" charset="-122"/>
+                <a:cs typeface="Corbel" pitchFamily="34" charset="-120"/>
               </a:rPr>
               <a:t>Operationalise a construct into measurable variables and indicators</a:t>
             </a:r>
-            <a:endParaRPr lang="en-US" sz="1700" dirty="0"/>
+            <a:endParaRPr lang="en-US" sz="1650" dirty="0"/>
           </a:p>
           <a:p>
             <a:pPr marL="342900" indent="-342900">
               <a:lnSpc>
-                <a:spcPct val="125000"/>
+                <a:spcPct val="130000"/>
               </a:lnSpc>
               <a:spcAft>
-                <a:spcPts val="800"/>
+                <a:spcPts val="1100"/>
               </a:spcAft>
               <a:buSzPct val="100000"/>
-              <a:buChar char="•"/>
-            </a:pPr>
-            <a:r>
-              <a:rPr lang="en-US" sz="1700" dirty="0">
-                <a:solidFill>
-                  <a:srgbClr val="374151"/>
-                </a:solidFill>
+              <a:buChar char="–"/>
+            </a:pPr>
+            <a:r>
+              <a:rPr lang="en-US" sz="1650" dirty="0">
+                <a:solidFill>
+                  <a:srgbClr val="23282E"/>
+                </a:solidFill>
+                <a:latin typeface="Corbel" pitchFamily="34" charset="0"/>
+                <a:ea typeface="Corbel" pitchFamily="34" charset="-122"/>
+                <a:cs typeface="Corbel" pitchFamily="34" charset="-120"/>
               </a:rPr>
               <a:t>Identify levels of measurement and their analytical consequences</a:t>
             </a:r>
-            <a:endParaRPr lang="en-US" sz="1700" dirty="0"/>
+            <a:endParaRPr lang="en-US" sz="1650" dirty="0"/>
           </a:p>
           <a:p>
             <a:pPr marL="342900" indent="-342900">
               <a:lnSpc>
-                <a:spcPct val="125000"/>
+                <a:spcPct val="130000"/>
               </a:lnSpc>
               <a:spcAft>
-                <a:spcPts val="800"/>
+                <a:spcPts val="1100"/>
               </a:spcAft>
               <a:buSzPct val="100000"/>
-              <a:buChar char="•"/>
-            </a:pPr>
-            <a:r>
-              <a:rPr lang="en-US" sz="1700" dirty="0">
-                <a:solidFill>
-                  <a:srgbClr val="374151"/>
-                </a:solidFill>
+              <a:buChar char="–"/>
+            </a:pPr>
+            <a:r>
+              <a:rPr lang="en-US" sz="1650" dirty="0">
+                <a:solidFill>
+                  <a:srgbClr val="23282E"/>
+                </a:solidFill>
+                <a:latin typeface="Corbel" pitchFamily="34" charset="0"/>
+                <a:ea typeface="Corbel" pitchFamily="34" charset="-122"/>
+                <a:cs typeface="Corbel" pitchFamily="34" charset="-120"/>
               </a:rPr>
               <a:t>Design questionnaire items that avoid the common wording faults</a:t>
             </a:r>
-            <a:endParaRPr lang="en-US" sz="1700" dirty="0"/>
+            <a:endParaRPr lang="en-US" sz="1650" dirty="0"/>
           </a:p>
           <a:p>
             <a:pPr marL="342900" indent="-342900">
               <a:lnSpc>
-                <a:spcPct val="125000"/>
+                <a:spcPct val="130000"/>
               </a:lnSpc>
               <a:spcAft>
-                <a:spcPts val="800"/>
+                <a:spcPts val="1100"/>
               </a:spcAft>
               <a:buSzPct val="100000"/>
-              <a:buChar char="•"/>
-            </a:pPr>
-            <a:r>
-              <a:rPr lang="en-US" sz="1700" dirty="0">
-                <a:solidFill>
-                  <a:srgbClr val="374151"/>
-                </a:solidFill>
+              <a:buChar char="–"/>
+            </a:pPr>
+            <a:r>
+              <a:rPr lang="en-US" sz="1650" dirty="0">
+                <a:solidFill>
+                  <a:srgbClr val="23282E"/>
+                </a:solidFill>
+                <a:latin typeface="Corbel" pitchFamily="34" charset="0"/>
+                <a:ea typeface="Corbel" pitchFamily="34" charset="-122"/>
+                <a:cs typeface="Corbel" pitchFamily="34" charset="-120"/>
               </a:rPr>
               <a:t>Distinguish the main types of validity and reliability and how each is evidenced</a:t>
             </a:r>
-            <a:endParaRPr lang="en-US" sz="1700" dirty="0"/>
+            <a:endParaRPr lang="en-US" sz="1650" dirty="0"/>
           </a:p>
           <a:p>
             <a:pPr marL="342900" indent="-342900">
               <a:lnSpc>
-                <a:spcPct val="125000"/>
+                <a:spcPct val="130000"/>
               </a:lnSpc>
               <a:spcAft>
-                <a:spcPts val="800"/>
+                <a:spcPts val="1100"/>
               </a:spcAft>
               <a:buSzPct val="100000"/>
-              <a:buChar char="•"/>
-            </a:pPr>
-            <a:r>
-              <a:rPr lang="en-US" sz="1700" dirty="0">
-                <a:solidFill>
-                  <a:srgbClr val="374151"/>
-                </a:solidFill>
+              <a:buChar char="–"/>
+            </a:pPr>
+            <a:r>
+              <a:rPr lang="en-US" sz="1650" dirty="0">
+                <a:solidFill>
+                  <a:srgbClr val="23282E"/>
+                </a:solidFill>
+                <a:latin typeface="Corbel" pitchFamily="34" charset="0"/>
+                <a:ea typeface="Corbel" pitchFamily="34" charset="-122"/>
+                <a:cs typeface="Corbel" pitchFamily="34" charset="-120"/>
               </a:rPr>
               <a:t>Plan and report a pilot study</a:t>
             </a:r>
-            <a:endParaRPr lang="en-US" sz="1700" dirty="0"/>
+            <a:endParaRPr lang="en-US" sz="1650" dirty="0"/>
           </a:p>
           <a:p>
             <a:pPr marL="342900" indent="-342900">
               <a:lnSpc>
-                <a:spcPct val="125000"/>
+                <a:spcPct val="130000"/>
               </a:lnSpc>
               <a:spcAft>
-                <a:spcPts val="800"/>
+                <a:spcPts val="1100"/>
               </a:spcAft>
               <a:buSzPct val="100000"/>
-              <a:buChar char="•"/>
-            </a:pPr>
-            <a:r>
-              <a:rPr lang="en-US" sz="1700" dirty="0">
-                <a:solidFill>
-                  <a:srgbClr val="374151"/>
-                </a:solidFill>
+              <a:buChar char="–"/>
+            </a:pPr>
+            <a:r>
+              <a:rPr lang="en-US" sz="1650" dirty="0">
+                <a:solidFill>
+                  <a:srgbClr val="23282E"/>
+                </a:solidFill>
+                <a:latin typeface="Corbel" pitchFamily="34" charset="0"/>
+                <a:ea typeface="Corbel" pitchFamily="34" charset="-122"/>
+                <a:cs typeface="Corbel" pitchFamily="34" charset="-120"/>
               </a:rPr>
               <a:t>Choose between paper and electronic data capture and set up basic data quality controls</a:t>
             </a:r>
-            <a:endParaRPr lang="en-US" sz="1700" dirty="0"/>
+            <a:endParaRPr lang="en-US" sz="1650" dirty="0"/>
           </a:p>
         </p:txBody>
       </p:sp>
@@ -6707,8 +7240,8 @@
         </p:nvSpPr>
         <p:spPr>
           <a:xfrm>
-            <a:off x="8503920" y="4709160"/>
-            <a:ext cx="800000" cy="300000"/>
+            <a:off x="566928" y="4700016"/>
+            <a:ext cx="914400" cy="274320"/>
           </a:xfrm>
           <a:prstGeom prst="rect">
             <a:avLst/>
@@ -6723,10 +7256,13 @@
           <a:bodyPr/>
           <a:lstStyle>
             <a:lvl1pPr>
-              <a:defRPr sz="1000">
-                <a:solidFill>
-                  <a:srgbClr val="6B7280"/>
-                </a:solidFill>
+              <a:defRPr sz="900">
+                <a:solidFill>
+                  <a:srgbClr val="5F6B76"/>
+                </a:solidFill>
+                <a:latin typeface="Corbel"/>
+                <a:ea typeface="Corbel"/>
+                <a:cs typeface="Corbel"/>
               </a:defRPr>
             </a:lvl1pPr>
           </a:lstStyle>
@@ -6773,8 +7309,8 @@
         </p:nvSpPr>
         <p:spPr>
           <a:xfrm>
-            <a:off x="502920" y="292608"/>
-            <a:ext cx="8046720" cy="228600"/>
+            <a:off x="566928" y="384048"/>
+            <a:ext cx="7772400" cy="237744"/>
           </a:xfrm>
           <a:prstGeom prst="rect">
             <a:avLst/>
@@ -6790,14 +7326,17 @@
               <a:buNone/>
             </a:pPr>
             <a:r>
-              <a:rPr lang="en-US" sz="1100" b="1" spc="150" kern="0" dirty="0">
-                <a:solidFill>
-                  <a:srgbClr val="0066CC"/>
-                </a:solidFill>
+              <a:rPr lang="en-US" sz="1000" spc="200" kern="0" dirty="0">
+                <a:solidFill>
+                  <a:srgbClr val="9A6A3C"/>
+                </a:solidFill>
+                <a:latin typeface="Corbel" pitchFamily="34" charset="0"/>
+                <a:ea typeface="Corbel" pitchFamily="34" charset="-122"/>
+                <a:cs typeface="Corbel" pitchFamily="34" charset="-120"/>
               </a:rPr>
               <a:t>UNIT 8</a:t>
             </a:r>
-            <a:endParaRPr lang="en-US" sz="1100" dirty="0"/>
+            <a:endParaRPr lang="en-US" sz="1000" dirty="0"/>
           </a:p>
         </p:txBody>
       </p:sp>
@@ -6809,8 +7348,8 @@
         </p:nvSpPr>
         <p:spPr>
           <a:xfrm>
-            <a:off x="502920" y="548640"/>
-            <a:ext cx="8046720" cy="640080"/>
+            <a:off x="566928" y="658368"/>
+            <a:ext cx="7772400" cy="658368"/>
           </a:xfrm>
           <a:prstGeom prst="rect">
             <a:avLst/>
@@ -6823,30 +7362,56 @@
           <a:lstStyle/>
           <a:p>
             <a:pPr indent="0" marL="0">
+              <a:lnSpc>
+                <a:spcPct val="100000"/>
+              </a:lnSpc>
               <a:buNone/>
             </a:pPr>
             <a:r>
-              <a:rPr lang="en-US" sz="2400" b="1" dirty="0">
-                <a:solidFill>
-                  <a:srgbClr val="111827"/>
-                </a:solidFill>
+              <a:rPr lang="en-US" sz="2500" dirty="0">
+                <a:solidFill>
+                  <a:srgbClr val="1C3140"/>
+                </a:solidFill>
+                <a:latin typeface="Constantia" pitchFamily="34" charset="0"/>
+                <a:ea typeface="Constantia" pitchFamily="34" charset="-122"/>
+                <a:cs typeface="Constantia" pitchFamily="34" charset="-120"/>
               </a:rPr>
               <a:t>From construct to variable (1/2)</a:t>
             </a:r>
-            <a:endParaRPr lang="en-US" sz="2400" dirty="0"/>
-          </a:p>
-        </p:txBody>
-      </p:sp>
-      <p:sp>
-        <p:nvSpPr>
-          <p:cNvPr id="4" name="Text 2"/>
+            <a:endParaRPr lang="en-US" sz="2500" dirty="0"/>
+          </a:p>
+        </p:txBody>
+      </p:sp>
+      <p:sp>
+        <p:nvSpPr>
+          <p:cNvPr id="4" name="Shape 2"/>
           <p:cNvSpPr/>
           <p:nvPr/>
         </p:nvSpPr>
         <p:spPr>
           <a:xfrm>
-            <a:off x="685800" y="1325880"/>
-            <a:ext cx="7772400" cy="3200400"/>
+            <a:off x="566928" y="1335024"/>
+            <a:ext cx="566928" cy="20117"/>
+          </a:xfrm>
+          <a:prstGeom prst="rect">
+            <a:avLst/>
+          </a:prstGeom>
+          <a:solidFill>
+            <a:srgbClr val="9A6A3C"/>
+          </a:solidFill>
+          <a:ln/>
+        </p:spPr>
+      </p:sp>
+      <p:sp>
+        <p:nvSpPr>
+          <p:cNvPr id="5" name="Text 3"/>
+          <p:cNvSpPr/>
+          <p:nvPr/>
+        </p:nvSpPr>
+        <p:spPr>
+          <a:xfrm>
+            <a:off x="713232" y="1664208"/>
+            <a:ext cx="7498080" cy="2788920"/>
           </a:xfrm>
           <a:prstGeom prst="rect">
             <a:avLst/>
@@ -6860,86 +7425,98 @@
           <a:p>
             <a:pPr marL="342900" indent="-342900">
               <a:lnSpc>
-                <a:spcPct val="125000"/>
+                <a:spcPct val="130000"/>
               </a:lnSpc>
               <a:spcAft>
-                <a:spcPts val="800"/>
+                <a:spcPts val="1100"/>
               </a:spcAft>
               <a:buSzPct val="100000"/>
-              <a:buChar char="•"/>
-            </a:pPr>
-            <a:r>
-              <a:rPr lang="en-US" sz="1700" dirty="0">
-                <a:solidFill>
-                  <a:srgbClr val="374151"/>
-                </a:solidFill>
+              <a:buChar char="–"/>
+            </a:pPr>
+            <a:r>
+              <a:rPr lang="en-US" sz="1650" dirty="0">
+                <a:solidFill>
+                  <a:srgbClr val="23282E"/>
+                </a:solidFill>
+                <a:latin typeface="Corbel" pitchFamily="34" charset="0"/>
+                <a:ea typeface="Corbel" pitchFamily="34" charset="-122"/>
+                <a:cs typeface="Corbel" pitchFamily="34" charset="-120"/>
               </a:rPr>
               <a:t>A construct is an abstraction — stigma, food insecurity, quality of care — that cannot be observed directly</a:t>
             </a:r>
-            <a:endParaRPr lang="en-US" sz="1700" dirty="0"/>
+            <a:endParaRPr lang="en-US" sz="1650" dirty="0"/>
           </a:p>
           <a:p>
             <a:pPr marL="342900" indent="-342900">
               <a:lnSpc>
-                <a:spcPct val="125000"/>
+                <a:spcPct val="130000"/>
               </a:lnSpc>
               <a:spcAft>
-                <a:spcPts val="800"/>
+                <a:spcPts val="1100"/>
               </a:spcAft>
               <a:buSzPct val="100000"/>
-              <a:buChar char="•"/>
-            </a:pPr>
-            <a:r>
-              <a:rPr lang="en-US" sz="1700" dirty="0">
-                <a:solidFill>
-                  <a:srgbClr val="374151"/>
-                </a:solidFill>
+              <a:buChar char="–"/>
+            </a:pPr>
+            <a:r>
+              <a:rPr lang="en-US" sz="1650" dirty="0">
+                <a:solidFill>
+                  <a:srgbClr val="23282E"/>
+                </a:solidFill>
+                <a:latin typeface="Corbel" pitchFamily="34" charset="0"/>
+                <a:ea typeface="Corbel" pitchFamily="34" charset="-122"/>
+                <a:cs typeface="Corbel" pitchFamily="34" charset="-120"/>
               </a:rPr>
               <a:t>Operationalisation defines the observable indicators that will stand for it</a:t>
             </a:r>
-            <a:endParaRPr lang="en-US" sz="1700" dirty="0"/>
+            <a:endParaRPr lang="en-US" sz="1650" dirty="0"/>
           </a:p>
           <a:p>
             <a:pPr marL="342900" indent="-342900">
               <a:lnSpc>
-                <a:spcPct val="125000"/>
+                <a:spcPct val="130000"/>
               </a:lnSpc>
               <a:spcAft>
-                <a:spcPts val="800"/>
+                <a:spcPts val="1100"/>
               </a:spcAft>
               <a:buSzPct val="100000"/>
-              <a:buChar char="•"/>
-            </a:pPr>
-            <a:r>
-              <a:rPr lang="en-US" sz="1700" dirty="0">
-                <a:solidFill>
-                  <a:srgbClr val="374151"/>
-                </a:solidFill>
+              <a:buChar char="–"/>
+            </a:pPr>
+            <a:r>
+              <a:rPr lang="en-US" sz="1650" dirty="0">
+                <a:solidFill>
+                  <a:srgbClr val="23282E"/>
+                </a:solidFill>
+                <a:latin typeface="Corbel" pitchFamily="34" charset="0"/>
+                <a:ea typeface="Corbel" pitchFamily="34" charset="-122"/>
+                <a:cs typeface="Corbel" pitchFamily="34" charset="-120"/>
               </a:rPr>
               <a:t>A conceptual definition says what you mean; an operational definition says exactly how it will be measured</a:t>
             </a:r>
-            <a:endParaRPr lang="en-US" sz="1700" dirty="0"/>
+            <a:endParaRPr lang="en-US" sz="1650" dirty="0"/>
           </a:p>
           <a:p>
             <a:pPr marL="342900" indent="-342900">
               <a:lnSpc>
-                <a:spcPct val="125000"/>
+                <a:spcPct val="130000"/>
               </a:lnSpc>
               <a:spcAft>
-                <a:spcPts val="800"/>
+                <a:spcPts val="1100"/>
               </a:spcAft>
               <a:buSzPct val="100000"/>
-              <a:buChar char="•"/>
-            </a:pPr>
-            <a:r>
-              <a:rPr lang="en-US" sz="1700" dirty="0">
-                <a:solidFill>
-                  <a:srgbClr val="374151"/>
-                </a:solidFill>
+              <a:buChar char="–"/>
+            </a:pPr>
+            <a:r>
+              <a:rPr lang="en-US" sz="1650" dirty="0">
+                <a:solidFill>
+                  <a:srgbClr val="23282E"/>
+                </a:solidFill>
+                <a:latin typeface="Corbel" pitchFamily="34" charset="0"/>
+                <a:ea typeface="Corbel" pitchFamily="34" charset="-122"/>
+                <a:cs typeface="Corbel" pitchFamily="34" charset="-120"/>
               </a:rPr>
               <a:t>Prefer an existing validated instrument over inventing your own — validation takes a study of its own</a:t>
             </a:r>
-            <a:endParaRPr lang="en-US" sz="1700" dirty="0"/>
+            <a:endParaRPr lang="en-US" sz="1650" dirty="0"/>
           </a:p>
         </p:txBody>
       </p:sp>
@@ -6955,8 +7532,8 @@
         </p:nvSpPr>
         <p:spPr>
           <a:xfrm>
-            <a:off x="8503920" y="4709160"/>
-            <a:ext cx="800000" cy="300000"/>
+            <a:off x="566928" y="4700016"/>
+            <a:ext cx="914400" cy="274320"/>
           </a:xfrm>
           <a:prstGeom prst="rect">
             <a:avLst/>
@@ -6971,10 +7548,13 @@
           <a:bodyPr/>
           <a:lstStyle>
             <a:lvl1pPr>
-              <a:defRPr sz="1000">
-                <a:solidFill>
-                  <a:srgbClr val="6B7280"/>
-                </a:solidFill>
+              <a:defRPr sz="900">
+                <a:solidFill>
+                  <a:srgbClr val="5F6B76"/>
+                </a:solidFill>
+                <a:latin typeface="Corbel"/>
+                <a:ea typeface="Corbel"/>
+                <a:cs typeface="Corbel"/>
               </a:defRPr>
             </a:lvl1pPr>
           </a:lstStyle>
@@ -7021,8 +7601,8 @@
         </p:nvSpPr>
         <p:spPr>
           <a:xfrm>
-            <a:off x="502920" y="292608"/>
-            <a:ext cx="8046720" cy="228600"/>
+            <a:off x="566928" y="384048"/>
+            <a:ext cx="7772400" cy="237744"/>
           </a:xfrm>
           <a:prstGeom prst="rect">
             <a:avLst/>
@@ -7038,14 +7618,17 @@
               <a:buNone/>
             </a:pPr>
             <a:r>
-              <a:rPr lang="en-US" sz="1100" b="1" spc="150" kern="0" dirty="0">
-                <a:solidFill>
-                  <a:srgbClr val="0066CC"/>
-                </a:solidFill>
+              <a:rPr lang="en-US" sz="1000" spc="200" kern="0" dirty="0">
+                <a:solidFill>
+                  <a:srgbClr val="9A6A3C"/>
+                </a:solidFill>
+                <a:latin typeface="Corbel" pitchFamily="34" charset="0"/>
+                <a:ea typeface="Corbel" pitchFamily="34" charset="-122"/>
+                <a:cs typeface="Corbel" pitchFamily="34" charset="-120"/>
               </a:rPr>
               <a:t>UNIT 8</a:t>
             </a:r>
-            <a:endParaRPr lang="en-US" sz="1100" dirty="0"/>
+            <a:endParaRPr lang="en-US" sz="1000" dirty="0"/>
           </a:p>
         </p:txBody>
       </p:sp>
@@ -7057,8 +7640,8 @@
         </p:nvSpPr>
         <p:spPr>
           <a:xfrm>
-            <a:off x="502920" y="548640"/>
-            <a:ext cx="8046720" cy="640080"/>
+            <a:off x="566928" y="658368"/>
+            <a:ext cx="7772400" cy="658368"/>
           </a:xfrm>
           <a:prstGeom prst="rect">
             <a:avLst/>
@@ -7071,30 +7654,56 @@
           <a:lstStyle/>
           <a:p>
             <a:pPr indent="0" marL="0">
+              <a:lnSpc>
+                <a:spcPct val="100000"/>
+              </a:lnSpc>
               <a:buNone/>
             </a:pPr>
             <a:r>
-              <a:rPr lang="en-US" sz="2400" b="1" dirty="0">
-                <a:solidFill>
-                  <a:srgbClr val="111827"/>
-                </a:solidFill>
+              <a:rPr lang="en-US" sz="2500" dirty="0">
+                <a:solidFill>
+                  <a:srgbClr val="1C3140"/>
+                </a:solidFill>
+                <a:latin typeface="Constantia" pitchFamily="34" charset="0"/>
+                <a:ea typeface="Constantia" pitchFamily="34" charset="-122"/>
+                <a:cs typeface="Constantia" pitchFamily="34" charset="-120"/>
               </a:rPr>
               <a:t>From construct to variable (2/2)</a:t>
             </a:r>
-            <a:endParaRPr lang="en-US" sz="2400" dirty="0"/>
-          </a:p>
-        </p:txBody>
-      </p:sp>
-      <p:sp>
-        <p:nvSpPr>
-          <p:cNvPr id="4" name="Text 2"/>
+            <a:endParaRPr lang="en-US" sz="2500" dirty="0"/>
+          </a:p>
+        </p:txBody>
+      </p:sp>
+      <p:sp>
+        <p:nvSpPr>
+          <p:cNvPr id="4" name="Shape 2"/>
           <p:cNvSpPr/>
           <p:nvPr/>
         </p:nvSpPr>
         <p:spPr>
           <a:xfrm>
-            <a:off x="685800" y="1325880"/>
-            <a:ext cx="7772400" cy="3200400"/>
+            <a:off x="566928" y="1335024"/>
+            <a:ext cx="566928" cy="20117"/>
+          </a:xfrm>
+          <a:prstGeom prst="rect">
+            <a:avLst/>
+          </a:prstGeom>
+          <a:solidFill>
+            <a:srgbClr val="9A6A3C"/>
+          </a:solidFill>
+          <a:ln/>
+        </p:spPr>
+      </p:sp>
+      <p:sp>
+        <p:nvSpPr>
+          <p:cNvPr id="5" name="Text 3"/>
+          <p:cNvSpPr/>
+          <p:nvPr/>
+        </p:nvSpPr>
+        <p:spPr>
+          <a:xfrm>
+            <a:off x="713232" y="1664208"/>
+            <a:ext cx="7498080" cy="2788920"/>
           </a:xfrm>
           <a:prstGeom prst="rect">
             <a:avLst/>
@@ -7108,19 +7717,22 @@
           <a:p>
             <a:pPr marL="342900" indent="-342900">
               <a:lnSpc>
-                <a:spcPct val="125000"/>
+                <a:spcPct val="130000"/>
               </a:lnSpc>
               <a:spcAft>
-                <a:spcPts val="800"/>
+                <a:spcPts val="1100"/>
               </a:spcAft>
               <a:buSzPct val="100000"/>
-              <a:buChar char="•"/>
+              <a:buChar char="–"/>
             </a:pPr>
             <a:r>
               <a:rPr lang="en-US" sz="1500" dirty="0">
                 <a:solidFill>
-                  <a:srgbClr val="374151"/>
-                </a:solidFill>
+                  <a:srgbClr val="23282E"/>
+                </a:solidFill>
+                <a:latin typeface="Corbel" pitchFamily="34" charset="0"/>
+                <a:ea typeface="Corbel" pitchFamily="34" charset="-122"/>
+                <a:cs typeface="Corbel" pitchFamily="34" charset="-120"/>
               </a:rPr>
               <a:t>If you adapt an instrument, report what you changed and re-examine its reliability in your population</a:t>
             </a:r>
@@ -7129,19 +7741,22 @@
           <a:p>
             <a:pPr marL="342900" indent="-342900">
               <a:lnSpc>
-                <a:spcPct val="125000"/>
+                <a:spcPct val="130000"/>
               </a:lnSpc>
               <a:spcAft>
-                <a:spcPts val="800"/>
+                <a:spcPts val="1100"/>
               </a:spcAft>
               <a:buSzPct val="100000"/>
-              <a:buChar char="•"/>
+              <a:buChar char="–"/>
             </a:pPr>
             <a:r>
               <a:rPr lang="en-US" sz="1500" dirty="0">
                 <a:solidFill>
-                  <a:srgbClr val="374151"/>
-                </a:solidFill>
+                  <a:srgbClr val="23282E"/>
+                </a:solidFill>
+                <a:latin typeface="Corbel" pitchFamily="34" charset="0"/>
+                <a:ea typeface="Corbel" pitchFamily="34" charset="-122"/>
+                <a:cs typeface="Corbel" pitchFamily="34" charset="-120"/>
               </a:rPr>
               <a:t>Instruments validated elsewhere may behave differently after translation or in a different culture, and should be re-tested</a:t>
             </a:r>
@@ -7161,8 +7776,8 @@
         </p:nvSpPr>
         <p:spPr>
           <a:xfrm>
-            <a:off x="8503920" y="4709160"/>
-            <a:ext cx="800000" cy="300000"/>
+            <a:off x="566928" y="4700016"/>
+            <a:ext cx="914400" cy="274320"/>
           </a:xfrm>
           <a:prstGeom prst="rect">
             <a:avLst/>
@@ -7177,10 +7792,13 @@
           <a:bodyPr/>
           <a:lstStyle>
             <a:lvl1pPr>
-              <a:defRPr sz="1000">
-                <a:solidFill>
-                  <a:srgbClr val="6B7280"/>
-                </a:solidFill>
+              <a:defRPr sz="900">
+                <a:solidFill>
+                  <a:srgbClr val="5F6B76"/>
+                </a:solidFill>
+                <a:latin typeface="Corbel"/>
+                <a:ea typeface="Corbel"/>
+                <a:cs typeface="Corbel"/>
               </a:defRPr>
             </a:lvl1pPr>
           </a:lstStyle>
@@ -7227,8 +7845,8 @@
         </p:nvSpPr>
         <p:spPr>
           <a:xfrm>
-            <a:off x="502920" y="292608"/>
-            <a:ext cx="8046720" cy="228600"/>
+            <a:off x="566928" y="384048"/>
+            <a:ext cx="7772400" cy="237744"/>
           </a:xfrm>
           <a:prstGeom prst="rect">
             <a:avLst/>
@@ -7244,14 +7862,17 @@
               <a:buNone/>
             </a:pPr>
             <a:r>
-              <a:rPr lang="en-US" sz="1100" b="1" spc="150" kern="0" dirty="0">
-                <a:solidFill>
-                  <a:srgbClr val="00A86B"/>
-                </a:solidFill>
+              <a:rPr lang="en-US" sz="1000" spc="200" kern="0" dirty="0">
+                <a:solidFill>
+                  <a:srgbClr val="9A6A3C"/>
+                </a:solidFill>
+                <a:latin typeface="Corbel" pitchFamily="34" charset="0"/>
+                <a:ea typeface="Corbel" pitchFamily="34" charset="-122"/>
+                <a:cs typeface="Corbel" pitchFamily="34" charset="-120"/>
               </a:rPr>
               <a:t>UNIT 8</a:t>
             </a:r>
-            <a:endParaRPr lang="en-US" sz="1100" dirty="0"/>
+            <a:endParaRPr lang="en-US" sz="1000" dirty="0"/>
           </a:p>
         </p:txBody>
       </p:sp>
@@ -7263,8 +7884,8 @@
         </p:nvSpPr>
         <p:spPr>
           <a:xfrm>
-            <a:off x="502920" y="548640"/>
-            <a:ext cx="8046720" cy="548640"/>
+            <a:off x="566928" y="658368"/>
+            <a:ext cx="7772400" cy="658368"/>
           </a:xfrm>
           <a:prstGeom prst="rect">
             <a:avLst/>
@@ -7273,21 +7894,27 @@
           <a:ln/>
         </p:spPr>
         <p:txBody>
-          <a:bodyPr wrap="square" rtlCol="0" anchor="ctr"/>
+          <a:bodyPr wrap="square" rtlCol="0" anchor="t"/>
           <a:lstStyle/>
           <a:p>
             <a:pPr indent="0" marL="0">
+              <a:lnSpc>
+                <a:spcPct val="100000"/>
+              </a:lnSpc>
               <a:buNone/>
             </a:pPr>
             <a:r>
-              <a:rPr lang="en-US" sz="2400" b="1" dirty="0">
-                <a:solidFill>
-                  <a:srgbClr val="111827"/>
-                </a:solidFill>
+              <a:rPr lang="en-US" sz="2500" dirty="0">
+                <a:solidFill>
+                  <a:srgbClr val="1C3140"/>
+                </a:solidFill>
+                <a:latin typeface="Constantia" pitchFamily="34" charset="0"/>
+                <a:ea typeface="Constantia" pitchFamily="34" charset="-122"/>
+                <a:cs typeface="Constantia" pitchFamily="34" charset="-120"/>
               </a:rPr>
               <a:t>In practice</a:t>
             </a:r>
-            <a:endParaRPr lang="en-US" sz="2400" dirty="0"/>
+            <a:endParaRPr lang="en-US" sz="2500" dirty="0"/>
           </a:p>
         </p:txBody>
       </p:sp>
@@ -7299,28 +7926,48 @@
         </p:nvSpPr>
         <p:spPr>
           <a:xfrm>
-            <a:off x="502920" y="1280160"/>
-            <a:ext cx="54864" cy="2377440"/>
+            <a:off x="566928" y="1335024"/>
+            <a:ext cx="566928" cy="20117"/>
           </a:xfrm>
           <a:prstGeom prst="rect">
             <a:avLst/>
           </a:prstGeom>
           <a:solidFill>
-            <a:srgbClr val="00A86B"/>
+            <a:srgbClr val="9A6A3C"/>
           </a:solidFill>
           <a:ln/>
         </p:spPr>
       </p:sp>
       <p:sp>
         <p:nvSpPr>
-          <p:cNvPr id="5" name="Text 3"/>
+          <p:cNvPr id="5" name="Shape 3"/>
           <p:cNvSpPr/>
           <p:nvPr/>
         </p:nvSpPr>
         <p:spPr>
           <a:xfrm>
-            <a:off x="777240" y="1280160"/>
-            <a:ext cx="7589520" cy="2377440"/>
+            <a:off x="566928" y="1664208"/>
+            <a:ext cx="8010144" cy="2395728"/>
+          </a:xfrm>
+          <a:prstGeom prst="rect">
+            <a:avLst/>
+          </a:prstGeom>
+          <a:solidFill>
+            <a:srgbClr val="F6F4F0"/>
+          </a:solidFill>
+          <a:ln/>
+        </p:spPr>
+      </p:sp>
+      <p:sp>
+        <p:nvSpPr>
+          <p:cNvPr id="6" name="Text 4"/>
+          <p:cNvSpPr/>
+          <p:nvPr/>
+        </p:nvSpPr>
+        <p:spPr>
+          <a:xfrm>
+            <a:off x="932688" y="1847088"/>
+            <a:ext cx="7278624" cy="2029968"/>
           </a:xfrm>
           <a:prstGeom prst="rect">
             <a:avLst/>
@@ -7334,15 +7981,18 @@
           <a:p>
             <a:pPr indent="0" marL="0">
               <a:lnSpc>
-                <a:spcPct val="130000"/>
+                <a:spcPct val="132000"/>
               </a:lnSpc>
               <a:buNone/>
             </a:pPr>
             <a:r>
-              <a:rPr lang="en-US" sz="1600" dirty="0">
-                <a:solidFill>
-                  <a:srgbClr val="374151"/>
-                </a:solidFill>
+              <a:rPr lang="en-US" sz="1600" i="1" dirty="0">
+                <a:solidFill>
+                  <a:srgbClr val="1C3140"/>
+                </a:solidFill>
+                <a:latin typeface="Constantia" pitchFamily="34" charset="0"/>
+                <a:ea typeface="Constantia" pitchFamily="34" charset="-122"/>
+                <a:cs typeface="Constantia" pitchFamily="34" charset="-120"/>
               </a:rPr>
               <a:t>Translation requires forward translation, back translation by an independent translator, reconciliation by a panel, and cognitive interviewing with a few target participants. Translating a questionnaire yourself the night before is the single most common source of unusable data.</a:t>
             </a:r>
@@ -7362,8 +8012,8 @@
         </p:nvSpPr>
         <p:spPr>
           <a:xfrm>
-            <a:off x="8503920" y="4709160"/>
-            <a:ext cx="800000" cy="300000"/>
+            <a:off x="566928" y="4700016"/>
+            <a:ext cx="914400" cy="274320"/>
           </a:xfrm>
           <a:prstGeom prst="rect">
             <a:avLst/>
@@ -7378,10 +8028,13 @@
           <a:bodyPr/>
           <a:lstStyle>
             <a:lvl1pPr>
-              <a:defRPr sz="1000">
-                <a:solidFill>
-                  <a:srgbClr val="6B7280"/>
-                </a:solidFill>
+              <a:defRPr sz="900">
+                <a:solidFill>
+                  <a:srgbClr val="5F6B76"/>
+                </a:solidFill>
+                <a:latin typeface="Corbel"/>
+                <a:ea typeface="Corbel"/>
+                <a:cs typeface="Corbel"/>
               </a:defRPr>
             </a:lvl1pPr>
           </a:lstStyle>
@@ -7428,8 +8081,8 @@
         </p:nvSpPr>
         <p:spPr>
           <a:xfrm>
-            <a:off x="502920" y="292608"/>
-            <a:ext cx="8046720" cy="228600"/>
+            <a:off x="566928" y="384048"/>
+            <a:ext cx="7772400" cy="237744"/>
           </a:xfrm>
           <a:prstGeom prst="rect">
             <a:avLst/>
@@ -7445,14 +8098,17 @@
               <a:buNone/>
             </a:pPr>
             <a:r>
-              <a:rPr lang="en-US" sz="1100" b="1" spc="150" kern="0" dirty="0">
-                <a:solidFill>
-                  <a:srgbClr val="0066CC"/>
-                </a:solidFill>
+              <a:rPr lang="en-US" sz="1000" spc="200" kern="0" dirty="0">
+                <a:solidFill>
+                  <a:srgbClr val="9A6A3C"/>
+                </a:solidFill>
+                <a:latin typeface="Corbel" pitchFamily="34" charset="0"/>
+                <a:ea typeface="Corbel" pitchFamily="34" charset="-122"/>
+                <a:cs typeface="Corbel" pitchFamily="34" charset="-120"/>
               </a:rPr>
               <a:t>UNIT 8</a:t>
             </a:r>
-            <a:endParaRPr lang="en-US" sz="1100" dirty="0"/>
+            <a:endParaRPr lang="en-US" sz="1000" dirty="0"/>
           </a:p>
         </p:txBody>
       </p:sp>
@@ -7464,8 +8120,8 @@
         </p:nvSpPr>
         <p:spPr>
           <a:xfrm>
-            <a:off x="502920" y="548640"/>
-            <a:ext cx="8046720" cy="640080"/>
+            <a:off x="566928" y="658368"/>
+            <a:ext cx="7772400" cy="658368"/>
           </a:xfrm>
           <a:prstGeom prst="rect">
             <a:avLst/>
@@ -7478,30 +8134,56 @@
           <a:lstStyle/>
           <a:p>
             <a:pPr indent="0" marL="0">
+              <a:lnSpc>
+                <a:spcPct val="100000"/>
+              </a:lnSpc>
               <a:buNone/>
             </a:pPr>
             <a:r>
-              <a:rPr lang="en-US" sz="2400" b="1" dirty="0">
-                <a:solidFill>
-                  <a:srgbClr val="111827"/>
-                </a:solidFill>
+              <a:rPr lang="en-US" sz="2500" dirty="0">
+                <a:solidFill>
+                  <a:srgbClr val="1C3140"/>
+                </a:solidFill>
+                <a:latin typeface="Constantia" pitchFamily="34" charset="0"/>
+                <a:ea typeface="Constantia" pitchFamily="34" charset="-122"/>
+                <a:cs typeface="Constantia" pitchFamily="34" charset="-120"/>
               </a:rPr>
               <a:t>Levels of measurement (1/2)</a:t>
             </a:r>
-            <a:endParaRPr lang="en-US" sz="2400" dirty="0"/>
-          </a:p>
-        </p:txBody>
-      </p:sp>
-      <p:sp>
-        <p:nvSpPr>
-          <p:cNvPr id="4" name="Text 2"/>
+            <a:endParaRPr lang="en-US" sz="2500" dirty="0"/>
+          </a:p>
+        </p:txBody>
+      </p:sp>
+      <p:sp>
+        <p:nvSpPr>
+          <p:cNvPr id="4" name="Shape 2"/>
           <p:cNvSpPr/>
           <p:nvPr/>
         </p:nvSpPr>
         <p:spPr>
           <a:xfrm>
-            <a:off x="685800" y="1325880"/>
-            <a:ext cx="7772400" cy="3200400"/>
+            <a:off x="566928" y="1335024"/>
+            <a:ext cx="566928" cy="20117"/>
+          </a:xfrm>
+          <a:prstGeom prst="rect">
+            <a:avLst/>
+          </a:prstGeom>
+          <a:solidFill>
+            <a:srgbClr val="9A6A3C"/>
+          </a:solidFill>
+          <a:ln/>
+        </p:spPr>
+      </p:sp>
+      <p:sp>
+        <p:nvSpPr>
+          <p:cNvPr id="5" name="Text 3"/>
+          <p:cNvSpPr/>
+          <p:nvPr/>
+        </p:nvSpPr>
+        <p:spPr>
+          <a:xfrm>
+            <a:off x="713232" y="1664208"/>
+            <a:ext cx="7498080" cy="2788920"/>
           </a:xfrm>
           <a:prstGeom prst="rect">
             <a:avLst/>
@@ -7515,107 +8197,122 @@
           <a:p>
             <a:pPr marL="342900" indent="-342900">
               <a:lnSpc>
-                <a:spcPct val="125000"/>
+                <a:spcPct val="130000"/>
               </a:lnSpc>
               <a:spcAft>
-                <a:spcPts val="800"/>
+                <a:spcPts val="1100"/>
               </a:spcAft>
               <a:buSzPct val="100000"/>
-              <a:buChar char="•"/>
-            </a:pPr>
-            <a:r>
-              <a:rPr lang="en-US" sz="1700" dirty="0">
-                <a:solidFill>
-                  <a:srgbClr val="374151"/>
-                </a:solidFill>
+              <a:buChar char="–"/>
+            </a:pPr>
+            <a:r>
+              <a:rPr lang="en-US" sz="1650" dirty="0">
+                <a:solidFill>
+                  <a:srgbClr val="23282E"/>
+                </a:solidFill>
+                <a:latin typeface="Corbel" pitchFamily="34" charset="0"/>
+                <a:ea typeface="Corbel" pitchFamily="34" charset="-122"/>
+                <a:cs typeface="Corbel" pitchFamily="34" charset="-120"/>
               </a:rPr>
               <a:t>Nominal — unordered categories (blood group, district); only counts and proportions are meaningful</a:t>
             </a:r>
-            <a:endParaRPr lang="en-US" sz="1700" dirty="0"/>
+            <a:endParaRPr lang="en-US" sz="1650" dirty="0"/>
           </a:p>
           <a:p>
             <a:pPr marL="342900" indent="-342900">
               <a:lnSpc>
-                <a:spcPct val="125000"/>
+                <a:spcPct val="130000"/>
               </a:lnSpc>
               <a:spcAft>
-                <a:spcPts val="800"/>
+                <a:spcPts val="1100"/>
               </a:spcAft>
               <a:buSzPct val="100000"/>
-              <a:buChar char="•"/>
-            </a:pPr>
-            <a:r>
-              <a:rPr lang="en-US" sz="1700" dirty="0">
-                <a:solidFill>
-                  <a:srgbClr val="374151"/>
-                </a:solidFill>
+              <a:buChar char="–"/>
+            </a:pPr>
+            <a:r>
+              <a:rPr lang="en-US" sz="1650" dirty="0">
+                <a:solidFill>
+                  <a:srgbClr val="23282E"/>
+                </a:solidFill>
+                <a:latin typeface="Corbel" pitchFamily="34" charset="0"/>
+                <a:ea typeface="Corbel" pitchFamily="34" charset="-122"/>
+                <a:cs typeface="Corbel" pitchFamily="34" charset="-120"/>
               </a:rPr>
               <a:t>Ordinal — ordered categories with unequal or unknown intervals (Likert responses, disease stage)</a:t>
             </a:r>
-            <a:endParaRPr lang="en-US" sz="1700" dirty="0"/>
+            <a:endParaRPr lang="en-US" sz="1650" dirty="0"/>
           </a:p>
           <a:p>
             <a:pPr marL="342900" indent="-342900">
               <a:lnSpc>
-                <a:spcPct val="125000"/>
+                <a:spcPct val="130000"/>
               </a:lnSpc>
               <a:spcAft>
-                <a:spcPts val="800"/>
+                <a:spcPts val="1100"/>
               </a:spcAft>
               <a:buSzPct val="100000"/>
-              <a:buChar char="•"/>
-            </a:pPr>
-            <a:r>
-              <a:rPr lang="en-US" sz="1700" dirty="0">
-                <a:solidFill>
-                  <a:srgbClr val="374151"/>
-                </a:solidFill>
+              <a:buChar char="–"/>
+            </a:pPr>
+            <a:r>
+              <a:rPr lang="en-US" sz="1650" dirty="0">
+                <a:solidFill>
+                  <a:srgbClr val="23282E"/>
+                </a:solidFill>
+                <a:latin typeface="Corbel" pitchFamily="34" charset="0"/>
+                <a:ea typeface="Corbel" pitchFamily="34" charset="-122"/>
+                <a:cs typeface="Corbel" pitchFamily="34" charset="-120"/>
               </a:rPr>
               <a:t>Interval — equal intervals but no true zero (temperature in Celsius)</a:t>
             </a:r>
-            <a:endParaRPr lang="en-US" sz="1700" dirty="0"/>
+            <a:endParaRPr lang="en-US" sz="1650" dirty="0"/>
           </a:p>
           <a:p>
             <a:pPr marL="342900" indent="-342900">
               <a:lnSpc>
-                <a:spcPct val="125000"/>
+                <a:spcPct val="130000"/>
               </a:lnSpc>
               <a:spcAft>
-                <a:spcPts val="800"/>
+                <a:spcPts val="1100"/>
               </a:spcAft>
               <a:buSzPct val="100000"/>
-              <a:buChar char="•"/>
-            </a:pPr>
-            <a:r>
-              <a:rPr lang="en-US" sz="1700" dirty="0">
-                <a:solidFill>
-                  <a:srgbClr val="374151"/>
-                </a:solidFill>
+              <a:buChar char="–"/>
+            </a:pPr>
+            <a:r>
+              <a:rPr lang="en-US" sz="1650" dirty="0">
+                <a:solidFill>
+                  <a:srgbClr val="23282E"/>
+                </a:solidFill>
+                <a:latin typeface="Corbel" pitchFamily="34" charset="0"/>
+                <a:ea typeface="Corbel" pitchFamily="34" charset="-122"/>
+                <a:cs typeface="Corbel" pitchFamily="34" charset="-120"/>
               </a:rPr>
               <a:t>Ratio — equal intervals with a true zero (weight, income, count of visits)</a:t>
             </a:r>
-            <a:endParaRPr lang="en-US" sz="1700" dirty="0"/>
+            <a:endParaRPr lang="en-US" sz="1650" dirty="0"/>
           </a:p>
           <a:p>
             <a:pPr marL="342900" indent="-342900">
               <a:lnSpc>
-                <a:spcPct val="125000"/>
+                <a:spcPct val="130000"/>
               </a:lnSpc>
               <a:spcAft>
-                <a:spcPts val="800"/>
+                <a:spcPts val="1100"/>
               </a:spcAft>
               <a:buSzPct val="100000"/>
-              <a:buChar char="•"/>
-            </a:pPr>
-            <a:r>
-              <a:rPr lang="en-US" sz="1700" dirty="0">
-                <a:solidFill>
-                  <a:srgbClr val="374151"/>
-                </a:solidFill>
+              <a:buChar char="–"/>
+            </a:pPr>
+            <a:r>
+              <a:rPr lang="en-US" sz="1650" dirty="0">
+                <a:solidFill>
+                  <a:srgbClr val="23282E"/>
+                </a:solidFill>
+                <a:latin typeface="Corbel" pitchFamily="34" charset="0"/>
+                <a:ea typeface="Corbel" pitchFamily="34" charset="-122"/>
+                <a:cs typeface="Corbel" pitchFamily="34" charset="-120"/>
               </a:rPr>
               <a:t>The level determines which summary statistics and which tests are legitimate</a:t>
             </a:r>
-            <a:endParaRPr lang="en-US" sz="1700" dirty="0"/>
+            <a:endParaRPr lang="en-US" sz="1650" dirty="0"/>
           </a:p>
         </p:txBody>
       </p:sp>
@@ -7631,8 +8328,8 @@
         </p:nvSpPr>
         <p:spPr>
           <a:xfrm>
-            <a:off x="8503920" y="4709160"/>
-            <a:ext cx="800000" cy="300000"/>
+            <a:off x="566928" y="4700016"/>
+            <a:ext cx="914400" cy="274320"/>
           </a:xfrm>
           <a:prstGeom prst="rect">
             <a:avLst/>
@@ -7647,10 +8344,13 @@
           <a:bodyPr/>
           <a:lstStyle>
             <a:lvl1pPr>
-              <a:defRPr sz="1000">
-                <a:solidFill>
-                  <a:srgbClr val="6B7280"/>
-                </a:solidFill>
+              <a:defRPr sz="900">
+                <a:solidFill>
+                  <a:srgbClr val="5F6B76"/>
+                </a:solidFill>
+                <a:latin typeface="Corbel"/>
+                <a:ea typeface="Corbel"/>
+                <a:cs typeface="Corbel"/>
               </a:defRPr>
             </a:lvl1pPr>
           </a:lstStyle>
@@ -7697,8 +8397,8 @@
         </p:nvSpPr>
         <p:spPr>
           <a:xfrm>
-            <a:off x="502920" y="292608"/>
-            <a:ext cx="8046720" cy="228600"/>
+            <a:off x="566928" y="384048"/>
+            <a:ext cx="7772400" cy="237744"/>
           </a:xfrm>
           <a:prstGeom prst="rect">
             <a:avLst/>
@@ -7714,14 +8414,17 @@
               <a:buNone/>
             </a:pPr>
             <a:r>
-              <a:rPr lang="en-US" sz="1100" b="1" spc="150" kern="0" dirty="0">
-                <a:solidFill>
-                  <a:srgbClr val="0066CC"/>
-                </a:solidFill>
+              <a:rPr lang="en-US" sz="1000" spc="200" kern="0" dirty="0">
+                <a:solidFill>
+                  <a:srgbClr val="9A6A3C"/>
+                </a:solidFill>
+                <a:latin typeface="Corbel" pitchFamily="34" charset="0"/>
+                <a:ea typeface="Corbel" pitchFamily="34" charset="-122"/>
+                <a:cs typeface="Corbel" pitchFamily="34" charset="-120"/>
               </a:rPr>
               <a:t>UNIT 8</a:t>
             </a:r>
-            <a:endParaRPr lang="en-US" sz="1100" dirty="0"/>
+            <a:endParaRPr lang="en-US" sz="1000" dirty="0"/>
           </a:p>
         </p:txBody>
       </p:sp>
@@ -7733,8 +8436,8 @@
         </p:nvSpPr>
         <p:spPr>
           <a:xfrm>
-            <a:off x="502920" y="548640"/>
-            <a:ext cx="8046720" cy="640080"/>
+            <a:off x="566928" y="658368"/>
+            <a:ext cx="7772400" cy="658368"/>
           </a:xfrm>
           <a:prstGeom prst="rect">
             <a:avLst/>
@@ -7747,30 +8450,56 @@
           <a:lstStyle/>
           <a:p>
             <a:pPr indent="0" marL="0">
+              <a:lnSpc>
+                <a:spcPct val="100000"/>
+              </a:lnSpc>
               <a:buNone/>
             </a:pPr>
             <a:r>
-              <a:rPr lang="en-US" sz="2400" b="1" dirty="0">
-                <a:solidFill>
-                  <a:srgbClr val="111827"/>
-                </a:solidFill>
+              <a:rPr lang="en-US" sz="2500" dirty="0">
+                <a:solidFill>
+                  <a:srgbClr val="1C3140"/>
+                </a:solidFill>
+                <a:latin typeface="Constantia" pitchFamily="34" charset="0"/>
+                <a:ea typeface="Constantia" pitchFamily="34" charset="-122"/>
+                <a:cs typeface="Constantia" pitchFamily="34" charset="-120"/>
               </a:rPr>
               <a:t>Levels of measurement (2/2)</a:t>
             </a:r>
-            <a:endParaRPr lang="en-US" sz="2400" dirty="0"/>
-          </a:p>
-        </p:txBody>
-      </p:sp>
-      <p:sp>
-        <p:nvSpPr>
-          <p:cNvPr id="4" name="Text 2"/>
+            <a:endParaRPr lang="en-US" sz="2500" dirty="0"/>
+          </a:p>
+        </p:txBody>
+      </p:sp>
+      <p:sp>
+        <p:nvSpPr>
+          <p:cNvPr id="4" name="Shape 2"/>
           <p:cNvSpPr/>
           <p:nvPr/>
         </p:nvSpPr>
         <p:spPr>
           <a:xfrm>
-            <a:off x="685800" y="1325880"/>
-            <a:ext cx="7772400" cy="3200400"/>
+            <a:off x="566928" y="1335024"/>
+            <a:ext cx="566928" cy="20117"/>
+          </a:xfrm>
+          <a:prstGeom prst="rect">
+            <a:avLst/>
+          </a:prstGeom>
+          <a:solidFill>
+            <a:srgbClr val="9A6A3C"/>
+          </a:solidFill>
+          <a:ln/>
+        </p:spPr>
+      </p:sp>
+      <p:sp>
+        <p:nvSpPr>
+          <p:cNvPr id="5" name="Text 3"/>
+          <p:cNvSpPr/>
+          <p:nvPr/>
+        </p:nvSpPr>
+        <p:spPr>
+          <a:xfrm>
+            <a:off x="713232" y="1664208"/>
+            <a:ext cx="7498080" cy="2788920"/>
           </a:xfrm>
           <a:prstGeom prst="rect">
             <a:avLst/>
@@ -7784,19 +8513,22 @@
           <a:p>
             <a:pPr marL="342900" indent="-342900">
               <a:lnSpc>
-                <a:spcPct val="125000"/>
+                <a:spcPct val="130000"/>
               </a:lnSpc>
               <a:spcAft>
-                <a:spcPts val="800"/>
+                <a:spcPts val="1100"/>
               </a:spcAft>
               <a:buSzPct val="100000"/>
-              <a:buChar char="•"/>
+              <a:buChar char="–"/>
             </a:pPr>
             <a:r>
               <a:rPr lang="en-US" sz="1500" dirty="0">
                 <a:solidFill>
-                  <a:srgbClr val="374151"/>
-                </a:solidFill>
+                  <a:srgbClr val="23282E"/>
+                </a:solidFill>
+                <a:latin typeface="Corbel" pitchFamily="34" charset="0"/>
+                <a:ea typeface="Corbel" pitchFamily="34" charset="-122"/>
+                <a:cs typeface="Corbel" pitchFamily="34" charset="-120"/>
               </a:rPr>
               <a:t>Record data at the finest level available: exact age can always be collapsed into bands later, but bands can never be recovered into exact ages</a:t>
             </a:r>
@@ -7816,8 +8548,8 @@
         </p:nvSpPr>
         <p:spPr>
           <a:xfrm>
-            <a:off x="8503920" y="4709160"/>
-            <a:ext cx="800000" cy="300000"/>
+            <a:off x="566928" y="4700016"/>
+            <a:ext cx="914400" cy="274320"/>
           </a:xfrm>
           <a:prstGeom prst="rect">
             <a:avLst/>
@@ -7832,10 +8564,13 @@
           <a:bodyPr/>
           <a:lstStyle>
             <a:lvl1pPr>
-              <a:defRPr sz="1000">
-                <a:solidFill>
-                  <a:srgbClr val="6B7280"/>
-                </a:solidFill>
+              <a:defRPr sz="900">
+                <a:solidFill>
+                  <a:srgbClr val="5F6B76"/>
+                </a:solidFill>
+                <a:latin typeface="Corbel"/>
+                <a:ea typeface="Corbel"/>
+                <a:cs typeface="Corbel"/>
               </a:defRPr>
             </a:lvl1pPr>
           </a:lstStyle>
@@ -7882,8 +8617,8 @@
         </p:nvSpPr>
         <p:spPr>
           <a:xfrm>
-            <a:off x="502920" y="292608"/>
-            <a:ext cx="8046720" cy="228600"/>
+            <a:off x="566928" y="384048"/>
+            <a:ext cx="7772400" cy="237744"/>
           </a:xfrm>
           <a:prstGeom prst="rect">
             <a:avLst/>
@@ -7899,14 +8634,17 @@
               <a:buNone/>
             </a:pPr>
             <a:r>
-              <a:rPr lang="en-US" sz="1100" b="1" spc="150" kern="0" dirty="0">
-                <a:solidFill>
-                  <a:srgbClr val="0066CC"/>
-                </a:solidFill>
+              <a:rPr lang="en-US" sz="1000" spc="200" kern="0" dirty="0">
+                <a:solidFill>
+                  <a:srgbClr val="9A6A3C"/>
+                </a:solidFill>
+                <a:latin typeface="Corbel" pitchFamily="34" charset="0"/>
+                <a:ea typeface="Corbel" pitchFamily="34" charset="-122"/>
+                <a:cs typeface="Corbel" pitchFamily="34" charset="-120"/>
               </a:rPr>
               <a:t>UNIT 8</a:t>
             </a:r>
-            <a:endParaRPr lang="en-US" sz="1100" dirty="0"/>
+            <a:endParaRPr lang="en-US" sz="1000" dirty="0"/>
           </a:p>
         </p:txBody>
       </p:sp>
@@ -7918,8 +8656,8 @@
         </p:nvSpPr>
         <p:spPr>
           <a:xfrm>
-            <a:off x="502920" y="548640"/>
-            <a:ext cx="8046720" cy="640080"/>
+            <a:off x="566928" y="658368"/>
+            <a:ext cx="7772400" cy="658368"/>
           </a:xfrm>
           <a:prstGeom prst="rect">
             <a:avLst/>
@@ -7932,30 +8670,56 @@
           <a:lstStyle/>
           <a:p>
             <a:pPr indent="0" marL="0">
+              <a:lnSpc>
+                <a:spcPct val="100000"/>
+              </a:lnSpc>
               <a:buNone/>
             </a:pPr>
             <a:r>
-              <a:rPr lang="en-US" sz="2400" b="1" dirty="0">
-                <a:solidFill>
-                  <a:srgbClr val="111827"/>
-                </a:solidFill>
+              <a:rPr lang="en-US" sz="2500" dirty="0">
+                <a:solidFill>
+                  <a:srgbClr val="1C3140"/>
+                </a:solidFill>
+                <a:latin typeface="Constantia" pitchFamily="34" charset="0"/>
+                <a:ea typeface="Constantia" pitchFamily="34" charset="-122"/>
+                <a:cs typeface="Constantia" pitchFamily="34" charset="-120"/>
               </a:rPr>
               <a:t>Writing good items (1/2)</a:t>
             </a:r>
-            <a:endParaRPr lang="en-US" sz="2400" dirty="0"/>
-          </a:p>
-        </p:txBody>
-      </p:sp>
-      <p:sp>
-        <p:nvSpPr>
-          <p:cNvPr id="4" name="Text 2"/>
+            <a:endParaRPr lang="en-US" sz="2500" dirty="0"/>
+          </a:p>
+        </p:txBody>
+      </p:sp>
+      <p:sp>
+        <p:nvSpPr>
+          <p:cNvPr id="4" name="Shape 2"/>
           <p:cNvSpPr/>
           <p:nvPr/>
         </p:nvSpPr>
         <p:spPr>
           <a:xfrm>
-            <a:off x="685800" y="1325880"/>
-            <a:ext cx="7772400" cy="3200400"/>
+            <a:off x="566928" y="1335024"/>
+            <a:ext cx="566928" cy="20117"/>
+          </a:xfrm>
+          <a:prstGeom prst="rect">
+            <a:avLst/>
+          </a:prstGeom>
+          <a:solidFill>
+            <a:srgbClr val="9A6A3C"/>
+          </a:solidFill>
+          <a:ln/>
+        </p:spPr>
+      </p:sp>
+      <p:sp>
+        <p:nvSpPr>
+          <p:cNvPr id="5" name="Text 3"/>
+          <p:cNvSpPr/>
+          <p:nvPr/>
+        </p:nvSpPr>
+        <p:spPr>
+          <a:xfrm>
+            <a:off x="713232" y="1664208"/>
+            <a:ext cx="7498080" cy="2788920"/>
           </a:xfrm>
           <a:prstGeom prst="rect">
             <a:avLst/>
@@ -7969,19 +8733,22 @@
           <a:p>
             <a:pPr marL="342900" indent="-342900">
               <a:lnSpc>
-                <a:spcPct val="125000"/>
+                <a:spcPct val="130000"/>
               </a:lnSpc>
               <a:spcAft>
-                <a:spcPts val="800"/>
+                <a:spcPts val="1100"/>
               </a:spcAft>
               <a:buSzPct val="100000"/>
-              <a:buChar char="•"/>
+              <a:buChar char="–"/>
             </a:pPr>
             <a:r>
               <a:rPr lang="en-US" sz="1500" dirty="0">
                 <a:solidFill>
-                  <a:srgbClr val="374151"/>
-                </a:solidFill>
+                  <a:srgbClr val="23282E"/>
+                </a:solidFill>
+                <a:latin typeface="Corbel" pitchFamily="34" charset="0"/>
+                <a:ea typeface="Corbel" pitchFamily="34" charset="-122"/>
+                <a:cs typeface="Corbel" pitchFamily="34" charset="-120"/>
               </a:rPr>
               <a:t>One idea per item — "Was the staff friendly and efficient?" is double-barrelled and unanswerable if one was and one was not</a:t>
             </a:r>
@@ -7990,19 +8757,22 @@
           <a:p>
             <a:pPr marL="342900" indent="-342900">
               <a:lnSpc>
-                <a:spcPct val="125000"/>
+                <a:spcPct val="130000"/>
               </a:lnSpc>
               <a:spcAft>
-                <a:spcPts val="800"/>
+                <a:spcPts val="1100"/>
               </a:spcAft>
               <a:buSzPct val="100000"/>
-              <a:buChar char="•"/>
+              <a:buChar char="–"/>
             </a:pPr>
             <a:r>
               <a:rPr lang="en-US" sz="1500" dirty="0">
                 <a:solidFill>
-                  <a:srgbClr val="374151"/>
-                </a:solidFill>
+                  <a:srgbClr val="23282E"/>
+                </a:solidFill>
+                <a:latin typeface="Corbel" pitchFamily="34" charset="0"/>
+                <a:ea typeface="Corbel" pitchFamily="34" charset="-122"/>
+                <a:cs typeface="Corbel" pitchFamily="34" charset="-120"/>
               </a:rPr>
               <a:t>Avoid leading wording, loaded terms and negatives, especially double negatives</a:t>
             </a:r>
@@ -8011,19 +8781,22 @@
           <a:p>
             <a:pPr marL="342900" indent="-342900">
               <a:lnSpc>
-                <a:spcPct val="125000"/>
+                <a:spcPct val="130000"/>
               </a:lnSpc>
               <a:spcAft>
-                <a:spcPts val="800"/>
+                <a:spcPts val="1100"/>
               </a:spcAft>
               <a:buSzPct val="100000"/>
-              <a:buChar char="•"/>
+              <a:buChar char="–"/>
             </a:pPr>
             <a:r>
               <a:rPr lang="en-US" sz="1500" dirty="0">
                 <a:solidFill>
-                  <a:srgbClr val="374151"/>
-                </a:solidFill>
+                  <a:srgbClr val="23282E"/>
+                </a:solidFill>
+                <a:latin typeface="Corbel" pitchFamily="34" charset="0"/>
+                <a:ea typeface="Corbel" pitchFamily="34" charset="-122"/>
+                <a:cs typeface="Corbel" pitchFamily="34" charset="-120"/>
               </a:rPr>
               <a:t>Match vocabulary to the least literate respondent you expect</a:t>
             </a:r>
@@ -8032,19 +8805,22 @@
           <a:p>
             <a:pPr marL="342900" indent="-342900">
               <a:lnSpc>
-                <a:spcPct val="125000"/>
+                <a:spcPct val="130000"/>
               </a:lnSpc>
               <a:spcAft>
-                <a:spcPts val="800"/>
+                <a:spcPts val="1100"/>
               </a:spcAft>
               <a:buSzPct val="100000"/>
-              <a:buChar char="•"/>
+              <a:buChar char="–"/>
             </a:pPr>
             <a:r>
               <a:rPr lang="en-US" sz="1500" dirty="0">
                 <a:solidFill>
-                  <a:srgbClr val="374151"/>
-                </a:solidFill>
+                  <a:srgbClr val="23282E"/>
+                </a:solidFill>
+                <a:latin typeface="Corbel" pitchFamily="34" charset="0"/>
+                <a:ea typeface="Corbel" pitchFamily="34" charset="-122"/>
+                <a:cs typeface="Corbel" pitchFamily="34" charset="-120"/>
               </a:rPr>
               <a:t>Make response options exhaustive and mutually exclusive; check for gaps and overlaps in age bands</a:t>
             </a:r>
@@ -8053,19 +8829,22 @@
           <a:p>
             <a:pPr marL="342900" indent="-342900">
               <a:lnSpc>
-                <a:spcPct val="125000"/>
+                <a:spcPct val="130000"/>
               </a:lnSpc>
               <a:spcAft>
-                <a:spcPts val="800"/>
+                <a:spcPts val="1100"/>
               </a:spcAft>
               <a:buSzPct val="100000"/>
-              <a:buChar char="•"/>
+              <a:buChar char="–"/>
             </a:pPr>
             <a:r>
               <a:rPr lang="en-US" sz="1500" dirty="0">
                 <a:solidFill>
-                  <a:srgbClr val="374151"/>
-                </a:solidFill>
+                  <a:srgbClr val="23282E"/>
+                </a:solidFill>
+                <a:latin typeface="Corbel" pitchFamily="34" charset="0"/>
+                <a:ea typeface="Corbel" pitchFamily="34" charset="-122"/>
+                <a:cs typeface="Corbel" pitchFamily="34" charset="-120"/>
               </a:rPr>
               <a:t>Offer "don't know" and "prefer not to answer" where forcing a choice would fabricate data</a:t>
             </a:r>
@@ -8085,8 +8864,8 @@
         </p:nvSpPr>
         <p:spPr>
           <a:xfrm>
-            <a:off x="8503920" y="4709160"/>
-            <a:ext cx="800000" cy="300000"/>
+            <a:off x="566928" y="4700016"/>
+            <a:ext cx="914400" cy="274320"/>
           </a:xfrm>
           <a:prstGeom prst="rect">
             <a:avLst/>
@@ -8101,10 +8880,13 @@
           <a:bodyPr/>
           <a:lstStyle>
             <a:lvl1pPr>
-              <a:defRPr sz="1000">
-                <a:solidFill>
-                  <a:srgbClr val="6B7280"/>
-                </a:solidFill>
+              <a:defRPr sz="900">
+                <a:solidFill>
+                  <a:srgbClr val="5F6B76"/>
+                </a:solidFill>
+                <a:latin typeface="Corbel"/>
+                <a:ea typeface="Corbel"/>
+                <a:cs typeface="Corbel"/>
               </a:defRPr>
             </a:lvl1pPr>
           </a:lstStyle>
@@ -8151,8 +8933,8 @@
         </p:nvSpPr>
         <p:spPr>
           <a:xfrm>
-            <a:off x="502920" y="292608"/>
-            <a:ext cx="8046720" cy="228600"/>
+            <a:off x="566928" y="384048"/>
+            <a:ext cx="7772400" cy="237744"/>
           </a:xfrm>
           <a:prstGeom prst="rect">
             <a:avLst/>
@@ -8168,14 +8950,17 @@
               <a:buNone/>
             </a:pPr>
             <a:r>
-              <a:rPr lang="en-US" sz="1100" b="1" spc="150" kern="0" dirty="0">
-                <a:solidFill>
-                  <a:srgbClr val="0066CC"/>
-                </a:solidFill>
+              <a:rPr lang="en-US" sz="1000" spc="200" kern="0" dirty="0">
+                <a:solidFill>
+                  <a:srgbClr val="9A6A3C"/>
+                </a:solidFill>
+                <a:latin typeface="Corbel" pitchFamily="34" charset="0"/>
+                <a:ea typeface="Corbel" pitchFamily="34" charset="-122"/>
+                <a:cs typeface="Corbel" pitchFamily="34" charset="-120"/>
               </a:rPr>
               <a:t>UNIT 8</a:t>
             </a:r>
-            <a:endParaRPr lang="en-US" sz="1100" dirty="0"/>
+            <a:endParaRPr lang="en-US" sz="1000" dirty="0"/>
           </a:p>
         </p:txBody>
       </p:sp>
@@ -8187,8 +8972,8 @@
         </p:nvSpPr>
         <p:spPr>
           <a:xfrm>
-            <a:off x="502920" y="548640"/>
-            <a:ext cx="8046720" cy="640080"/>
+            <a:off x="566928" y="658368"/>
+            <a:ext cx="7772400" cy="658368"/>
           </a:xfrm>
           <a:prstGeom prst="rect">
             <a:avLst/>
@@ -8201,30 +8986,56 @@
           <a:lstStyle/>
           <a:p>
             <a:pPr indent="0" marL="0">
+              <a:lnSpc>
+                <a:spcPct val="100000"/>
+              </a:lnSpc>
               <a:buNone/>
             </a:pPr>
             <a:r>
-              <a:rPr lang="en-US" sz="2400" b="1" dirty="0">
-                <a:solidFill>
-                  <a:srgbClr val="111827"/>
-                </a:solidFill>
+              <a:rPr lang="en-US" sz="2500" dirty="0">
+                <a:solidFill>
+                  <a:srgbClr val="1C3140"/>
+                </a:solidFill>
+                <a:latin typeface="Constantia" pitchFamily="34" charset="0"/>
+                <a:ea typeface="Constantia" pitchFamily="34" charset="-122"/>
+                <a:cs typeface="Constantia" pitchFamily="34" charset="-120"/>
               </a:rPr>
               <a:t>Writing good items (2/2)</a:t>
             </a:r>
-            <a:endParaRPr lang="en-US" sz="2400" dirty="0"/>
-          </a:p>
-        </p:txBody>
-      </p:sp>
-      <p:sp>
-        <p:nvSpPr>
-          <p:cNvPr id="4" name="Text 2"/>
+            <a:endParaRPr lang="en-US" sz="2500" dirty="0"/>
+          </a:p>
+        </p:txBody>
+      </p:sp>
+      <p:sp>
+        <p:nvSpPr>
+          <p:cNvPr id="4" name="Shape 2"/>
           <p:cNvSpPr/>
           <p:nvPr/>
         </p:nvSpPr>
         <p:spPr>
           <a:xfrm>
-            <a:off x="685800" y="1325880"/>
-            <a:ext cx="7772400" cy="3200400"/>
+            <a:off x="566928" y="1335024"/>
+            <a:ext cx="566928" cy="20117"/>
+          </a:xfrm>
+          <a:prstGeom prst="rect">
+            <a:avLst/>
+          </a:prstGeom>
+          <a:solidFill>
+            <a:srgbClr val="9A6A3C"/>
+          </a:solidFill>
+          <a:ln/>
+        </p:spPr>
+      </p:sp>
+      <p:sp>
+        <p:nvSpPr>
+          <p:cNvPr id="5" name="Text 3"/>
+          <p:cNvSpPr/>
+          <p:nvPr/>
+        </p:nvSpPr>
+        <p:spPr>
+          <a:xfrm>
+            <a:off x="713232" y="1664208"/>
+            <a:ext cx="7498080" cy="2788920"/>
           </a:xfrm>
           <a:prstGeom prst="rect">
             <a:avLst/>
@@ -8238,19 +9049,22 @@
           <a:p>
             <a:pPr marL="342900" indent="-342900">
               <a:lnSpc>
-                <a:spcPct val="125000"/>
+                <a:spcPct val="130000"/>
               </a:lnSpc>
               <a:spcAft>
-                <a:spcPts val="800"/>
+                <a:spcPts val="1100"/>
               </a:spcAft>
               <a:buSzPct val="100000"/>
-              <a:buChar char="•"/>
+              <a:buChar char="–"/>
             </a:pPr>
             <a:r>
               <a:rPr lang="en-US" sz="1500" dirty="0">
                 <a:solidFill>
-                  <a:srgbClr val="374151"/>
-                </a:solidFill>
+                  <a:srgbClr val="23282E"/>
+                </a:solidFill>
+                <a:latin typeface="Corbel" pitchFamily="34" charset="0"/>
+                <a:ea typeface="Corbel" pitchFamily="34" charset="-122"/>
+                <a:cs typeface="Corbel" pitchFamily="34" charset="-120"/>
               </a:rPr>
               <a:t>Decide deliberately whether a Likert scale has a midpoint — removing it forces a direction, which may or may not be what you want</a:t>
             </a:r>
@@ -8259,19 +9073,22 @@
           <a:p>
             <a:pPr marL="342900" indent="-342900">
               <a:lnSpc>
-                <a:spcPct val="125000"/>
+                <a:spcPct val="130000"/>
               </a:lnSpc>
               <a:spcAft>
-                <a:spcPts val="800"/>
+                <a:spcPts val="1100"/>
               </a:spcAft>
               <a:buSzPct val="100000"/>
-              <a:buChar char="•"/>
+              <a:buChar char="–"/>
             </a:pPr>
             <a:r>
               <a:rPr lang="en-US" sz="1500" dirty="0">
                 <a:solidFill>
-                  <a:srgbClr val="374151"/>
-                </a:solidFill>
+                  <a:srgbClr val="23282E"/>
+                </a:solidFill>
+                <a:latin typeface="Corbel" pitchFamily="34" charset="0"/>
+                <a:ea typeface="Corbel" pitchFamily="34" charset="-122"/>
+                <a:cs typeface="Corbel" pitchFamily="34" charset="-120"/>
               </a:rPr>
               <a:t>Order matters: put sensitive items late, once rapport exists, and beware of earlier items priming later ones</a:t>
             </a:r>
@@ -8291,8 +9108,8 @@
         </p:nvSpPr>
         <p:spPr>
           <a:xfrm>
-            <a:off x="8503920" y="4709160"/>
-            <a:ext cx="800000" cy="300000"/>
+            <a:off x="566928" y="4700016"/>
+            <a:ext cx="914400" cy="274320"/>
           </a:xfrm>
           <a:prstGeom prst="rect">
             <a:avLst/>
@@ -8307,10 +9124,13 @@
           <a:bodyPr/>
           <a:lstStyle>
             <a:lvl1pPr>
-              <a:defRPr sz="1000">
-                <a:solidFill>
-                  <a:srgbClr val="6B7280"/>
-                </a:solidFill>
+              <a:defRPr sz="900">
+                <a:solidFill>
+                  <a:srgbClr val="5F6B76"/>
+                </a:solidFill>
+                <a:latin typeface="Corbel"/>
+                <a:ea typeface="Corbel"/>
+                <a:cs typeface="Corbel"/>
               </a:defRPr>
             </a:lvl1pPr>
           </a:lstStyle>
@@ -8375,7 +9195,7 @@
     </a:clrScheme>
     <a:fontScheme name="Office">
       <a:majorFont>
-        <a:latin typeface="Calibri Light" panose="020F0302020204030204"/>
+        <a:latin typeface="Constantia"/>
         <a:ea typeface=""/>
         <a:cs typeface=""/>
         <a:font script="Jpan" typeface="游ゴシック Light"/>
@@ -8427,7 +9247,7 @@
         <a:font script="Tfng" typeface="Ebrima"/>
       </a:majorFont>
       <a:minorFont>
-        <a:latin typeface="Calibri" panose="020F0502020204030204"/>
+        <a:latin typeface="Corbel"/>
         <a:ea typeface=""/>
         <a:cs typeface=""/>
         <a:font script="Jpan" typeface="游ゴシック"/>
